--- a/presentation/siaga_nova_deck.pptx
+++ b/presentation/siaga_nova_deck.pptx
@@ -7214,7 +7214,7 @@
           <a:p>
             <a:pPr/>
             <a:r>
-              <a:t>1.12 years average error  |  R² 0.92 (2012-2014 held out)</a:t>
+              <a:t>1.08 years average error  |  R² 0.93 (2012-2014 held out)</a:t>
             </a:r>
           </a:p>
         </p:txBody>
@@ -7335,7 +7335,7 @@
           <a:p>
             <a:pPr/>
             <a:r>
-              <a:t>2.29 years average error  |  R² 0.69 (2015-2019, unseen source)</a:t>
+              <a:t>1.96 years average error  |  R² 0.76 (2015-2019, unseen source)</a:t>
             </a:r>
           </a:p>
         </p:txBody>

--- a/presentation/siaga_nova_deck.pptx
+++ b/presentation/siaga_nova_deck.pptx
@@ -77,10 +77,10 @@
         <a:latin typeface="+mj-lt"/>
         <a:ea typeface="+mj-ea"/>
         <a:cs typeface="+mj-cs"/>
-        <a:sym typeface="Arial"/>
+        <a:sym typeface="Helvetica"/>
       </a:defRPr>
     </a:lvl1pPr>
-    <a:lvl2pPr marL="0" marR="0" indent="457200" algn="l" defTabSz="914400" rtl="0" fontAlgn="auto" latinLnBrk="0" hangingPunct="0">
+    <a:lvl2pPr marL="0" marR="0" indent="0" algn="l" defTabSz="914400" rtl="0" fontAlgn="auto" latinLnBrk="0" hangingPunct="0">
       <a:lnSpc>
         <a:spcPct val="100000"/>
       </a:lnSpc>
@@ -107,10 +107,10 @@
         <a:latin typeface="+mj-lt"/>
         <a:ea typeface="+mj-ea"/>
         <a:cs typeface="+mj-cs"/>
-        <a:sym typeface="Arial"/>
+        <a:sym typeface="Helvetica"/>
       </a:defRPr>
     </a:lvl2pPr>
-    <a:lvl3pPr marL="0" marR="0" indent="914400" algn="l" defTabSz="914400" rtl="0" fontAlgn="auto" latinLnBrk="0" hangingPunct="0">
+    <a:lvl3pPr marL="0" marR="0" indent="0" algn="l" defTabSz="914400" rtl="0" fontAlgn="auto" latinLnBrk="0" hangingPunct="0">
       <a:lnSpc>
         <a:spcPct val="100000"/>
       </a:lnSpc>
@@ -137,10 +137,10 @@
         <a:latin typeface="+mj-lt"/>
         <a:ea typeface="+mj-ea"/>
         <a:cs typeface="+mj-cs"/>
-        <a:sym typeface="Arial"/>
+        <a:sym typeface="Helvetica"/>
       </a:defRPr>
     </a:lvl3pPr>
-    <a:lvl4pPr marL="0" marR="0" indent="1371600" algn="l" defTabSz="914400" rtl="0" fontAlgn="auto" latinLnBrk="0" hangingPunct="0">
+    <a:lvl4pPr marL="0" marR="0" indent="0" algn="l" defTabSz="914400" rtl="0" fontAlgn="auto" latinLnBrk="0" hangingPunct="0">
       <a:lnSpc>
         <a:spcPct val="100000"/>
       </a:lnSpc>
@@ -167,10 +167,10 @@
         <a:latin typeface="+mj-lt"/>
         <a:ea typeface="+mj-ea"/>
         <a:cs typeface="+mj-cs"/>
-        <a:sym typeface="Arial"/>
+        <a:sym typeface="Helvetica"/>
       </a:defRPr>
     </a:lvl4pPr>
-    <a:lvl5pPr marL="0" marR="0" indent="1828800" algn="l" defTabSz="914400" rtl="0" fontAlgn="auto" latinLnBrk="0" hangingPunct="0">
+    <a:lvl5pPr marL="0" marR="0" indent="0" algn="l" defTabSz="914400" rtl="0" fontAlgn="auto" latinLnBrk="0" hangingPunct="0">
       <a:lnSpc>
         <a:spcPct val="100000"/>
       </a:lnSpc>
@@ -197,10 +197,10 @@
         <a:latin typeface="+mj-lt"/>
         <a:ea typeface="+mj-ea"/>
         <a:cs typeface="+mj-cs"/>
-        <a:sym typeface="Arial"/>
+        <a:sym typeface="Helvetica"/>
       </a:defRPr>
     </a:lvl5pPr>
-    <a:lvl6pPr marL="0" marR="0" indent="2286000" algn="l" defTabSz="914400" rtl="0" fontAlgn="auto" latinLnBrk="0" hangingPunct="0">
+    <a:lvl6pPr marL="0" marR="0" indent="0" algn="l" defTabSz="914400" rtl="0" fontAlgn="auto" latinLnBrk="0" hangingPunct="0">
       <a:lnSpc>
         <a:spcPct val="100000"/>
       </a:lnSpc>
@@ -227,10 +227,10 @@
         <a:latin typeface="+mj-lt"/>
         <a:ea typeface="+mj-ea"/>
         <a:cs typeface="+mj-cs"/>
-        <a:sym typeface="Arial"/>
+        <a:sym typeface="Helvetica"/>
       </a:defRPr>
     </a:lvl6pPr>
-    <a:lvl7pPr marL="0" marR="0" indent="2743200" algn="l" defTabSz="914400" rtl="0" fontAlgn="auto" latinLnBrk="0" hangingPunct="0">
+    <a:lvl7pPr marL="0" marR="0" indent="0" algn="l" defTabSz="914400" rtl="0" fontAlgn="auto" latinLnBrk="0" hangingPunct="0">
       <a:lnSpc>
         <a:spcPct val="100000"/>
       </a:lnSpc>
@@ -257,10 +257,10 @@
         <a:latin typeface="+mj-lt"/>
         <a:ea typeface="+mj-ea"/>
         <a:cs typeface="+mj-cs"/>
-        <a:sym typeface="Arial"/>
+        <a:sym typeface="Helvetica"/>
       </a:defRPr>
     </a:lvl7pPr>
-    <a:lvl8pPr marL="0" marR="0" indent="3200400" algn="l" defTabSz="914400" rtl="0" fontAlgn="auto" latinLnBrk="0" hangingPunct="0">
+    <a:lvl8pPr marL="0" marR="0" indent="0" algn="l" defTabSz="914400" rtl="0" fontAlgn="auto" latinLnBrk="0" hangingPunct="0">
       <a:lnSpc>
         <a:spcPct val="100000"/>
       </a:lnSpc>
@@ -287,10 +287,10 @@
         <a:latin typeface="+mj-lt"/>
         <a:ea typeface="+mj-ea"/>
         <a:cs typeface="+mj-cs"/>
-        <a:sym typeface="Arial"/>
+        <a:sym typeface="Helvetica"/>
       </a:defRPr>
     </a:lvl8pPr>
-    <a:lvl9pPr marL="0" marR="0" indent="3657600" algn="l" defTabSz="914400" rtl="0" fontAlgn="auto" latinLnBrk="0" hangingPunct="0">
+    <a:lvl9pPr marL="0" marR="0" indent="0" algn="l" defTabSz="914400" rtl="0" fontAlgn="auto" latinLnBrk="0" hangingPunct="0">
       <a:lnSpc>
         <a:spcPct val="100000"/>
       </a:lnSpc>
@@ -317,7 +317,7 @@
         <a:latin typeface="+mj-lt"/>
         <a:ea typeface="+mj-ea"/>
         <a:cs typeface="+mj-cs"/>
-        <a:sym typeface="Arial"/>
+        <a:sym typeface="Helvetica"/>
       </a:defRPr>
     </a:lvl9pPr>
   </p:defaultTextStyle>
@@ -401,73 +401,73 @@
   <p:notesStyle>
     <a:lvl1pPr latinLnBrk="0">
       <a:defRPr sz="1200">
-        <a:latin typeface="+mj-lt"/>
-        <a:ea typeface="+mj-ea"/>
-        <a:cs typeface="+mj-cs"/>
+        <a:latin typeface="+mn-lt"/>
+        <a:ea typeface="+mn-ea"/>
+        <a:cs typeface="+mn-cs"/>
         <a:sym typeface="Arial"/>
       </a:defRPr>
     </a:lvl1pPr>
     <a:lvl2pPr indent="228600" latinLnBrk="0">
       <a:defRPr sz="1200">
-        <a:latin typeface="+mj-lt"/>
-        <a:ea typeface="+mj-ea"/>
-        <a:cs typeface="+mj-cs"/>
+        <a:latin typeface="+mn-lt"/>
+        <a:ea typeface="+mn-ea"/>
+        <a:cs typeface="+mn-cs"/>
         <a:sym typeface="Arial"/>
       </a:defRPr>
     </a:lvl2pPr>
     <a:lvl3pPr indent="457200" latinLnBrk="0">
       <a:defRPr sz="1200">
-        <a:latin typeface="+mj-lt"/>
-        <a:ea typeface="+mj-ea"/>
-        <a:cs typeface="+mj-cs"/>
+        <a:latin typeface="+mn-lt"/>
+        <a:ea typeface="+mn-ea"/>
+        <a:cs typeface="+mn-cs"/>
         <a:sym typeface="Arial"/>
       </a:defRPr>
     </a:lvl3pPr>
     <a:lvl4pPr indent="685800" latinLnBrk="0">
       <a:defRPr sz="1200">
-        <a:latin typeface="+mj-lt"/>
-        <a:ea typeface="+mj-ea"/>
-        <a:cs typeface="+mj-cs"/>
+        <a:latin typeface="+mn-lt"/>
+        <a:ea typeface="+mn-ea"/>
+        <a:cs typeface="+mn-cs"/>
         <a:sym typeface="Arial"/>
       </a:defRPr>
     </a:lvl4pPr>
     <a:lvl5pPr indent="914400" latinLnBrk="0">
       <a:defRPr sz="1200">
-        <a:latin typeface="+mj-lt"/>
-        <a:ea typeface="+mj-ea"/>
-        <a:cs typeface="+mj-cs"/>
+        <a:latin typeface="+mn-lt"/>
+        <a:ea typeface="+mn-ea"/>
+        <a:cs typeface="+mn-cs"/>
         <a:sym typeface="Arial"/>
       </a:defRPr>
     </a:lvl5pPr>
     <a:lvl6pPr indent="1143000" latinLnBrk="0">
       <a:defRPr sz="1200">
-        <a:latin typeface="+mj-lt"/>
-        <a:ea typeface="+mj-ea"/>
-        <a:cs typeface="+mj-cs"/>
+        <a:latin typeface="+mn-lt"/>
+        <a:ea typeface="+mn-ea"/>
+        <a:cs typeface="+mn-cs"/>
         <a:sym typeface="Arial"/>
       </a:defRPr>
     </a:lvl6pPr>
     <a:lvl7pPr indent="1371600" latinLnBrk="0">
       <a:defRPr sz="1200">
-        <a:latin typeface="+mj-lt"/>
-        <a:ea typeface="+mj-ea"/>
-        <a:cs typeface="+mj-cs"/>
+        <a:latin typeface="+mn-lt"/>
+        <a:ea typeface="+mn-ea"/>
+        <a:cs typeface="+mn-cs"/>
         <a:sym typeface="Arial"/>
       </a:defRPr>
     </a:lvl7pPr>
     <a:lvl8pPr indent="1600200" latinLnBrk="0">
       <a:defRPr sz="1200">
-        <a:latin typeface="+mj-lt"/>
-        <a:ea typeface="+mj-ea"/>
-        <a:cs typeface="+mj-cs"/>
+        <a:latin typeface="+mn-lt"/>
+        <a:ea typeface="+mn-ea"/>
+        <a:cs typeface="+mn-cs"/>
         <a:sym typeface="Arial"/>
       </a:defRPr>
     </a:lvl8pPr>
     <a:lvl9pPr indent="1828800" latinLnBrk="0">
       <a:defRPr sz="1200">
-        <a:latin typeface="+mj-lt"/>
-        <a:ea typeface="+mj-ea"/>
-        <a:cs typeface="+mj-cs"/>
+        <a:latin typeface="+mn-lt"/>
+        <a:ea typeface="+mn-ea"/>
+        <a:cs typeface="+mn-cs"/>
         <a:sym typeface="Arial"/>
       </a:defRPr>
     </a:lvl9pPr>
@@ -557,23 +557,23 @@
         </p:nvSpPr>
         <p:spPr>
           <a:xfrm>
-            <a:off x="608965" y="92074"/>
-            <a:ext cx="10961370" cy="1508127"/>
-          </a:xfrm>
-          <a:prstGeom prst="rect">
-            <a:avLst/>
-          </a:prstGeom>
-          <a:ln w="12700">
-            <a:miter lim="400000"/>
-          </a:ln>
-          <a:extLst>
-            <a:ext uri="{C572A759-6A51-4108-AA02-DFA0A04FC94B}">
-              <ma14:wrappingTextBoxFlag xmlns:ma14="http://schemas.microsoft.com/office/mac/drawingml/2011/main" val="1"/>
-            </a:ext>
-          </a:extLst>
-        </p:spPr>
-        <p:txBody>
-          <a:bodyPr lIns="45719" rIns="45719" anchor="ctr"/>
+            <a:off x="1824780" y="769937"/>
+            <a:ext cx="9743441" cy="1668463"/>
+          </a:xfrm>
+          <a:prstGeom prst="rect">
+            <a:avLst/>
+          </a:prstGeom>
+          <a:ln w="12700">
+            <a:miter lim="400000"/>
+          </a:ln>
+          <a:extLst>
+            <a:ext uri="{C572A759-6A51-4108-AA02-DFA0A04FC94B}">
+              <ma14:wrappingTextBoxFlag xmlns:ma14="http://schemas.microsoft.com/office/mac/drawingml/2011/main" val="1"/>
+            </a:ext>
+          </a:extLst>
+        </p:spPr>
+        <p:txBody>
+          <a:bodyPr lIns="45718" tIns="45718" rIns="45718" bIns="45718" anchor="ctr"/>
           <a:lstStyle/>
           <a:p>
             <a:pPr/>
@@ -593,23 +593,23 @@
         </p:nvSpPr>
         <p:spPr>
           <a:xfrm>
-            <a:off x="608965" y="1600200"/>
-            <a:ext cx="10961370" cy="5257800"/>
-          </a:xfrm>
-          <a:prstGeom prst="rect">
-            <a:avLst/>
-          </a:prstGeom>
-          <a:ln w="12700">
-            <a:miter lim="400000"/>
-          </a:ln>
-          <a:extLst>
-            <a:ext uri="{C572A759-6A51-4108-AA02-DFA0A04FC94B}">
-              <ma14:wrappingTextBoxFlag xmlns:ma14="http://schemas.microsoft.com/office/mac/drawingml/2011/main" val="1"/>
-            </a:ext>
-          </a:extLst>
-        </p:spPr>
-        <p:txBody>
-          <a:bodyPr lIns="45719" rIns="45719"/>
+            <a:off x="6797994" y="2438400"/>
+            <a:ext cx="4770227" cy="4419600"/>
+          </a:xfrm>
+          <a:prstGeom prst="rect">
+            <a:avLst/>
+          </a:prstGeom>
+          <a:ln w="12700">
+            <a:miter lim="400000"/>
+          </a:ln>
+          <a:extLst>
+            <a:ext uri="{C572A759-6A51-4108-AA02-DFA0A04FC94B}">
+              <ma14:wrappingTextBoxFlag xmlns:ma14="http://schemas.microsoft.com/office/mac/drawingml/2011/main" val="1"/>
+            </a:ext>
+          </a:extLst>
+        </p:spPr>
+        <p:txBody>
+          <a:bodyPr lIns="45718" tIns="45718" rIns="45718" bIns="45718"/>
           <a:lstStyle/>
           <a:p>
             <a:pPr/>
@@ -653,23 +653,28 @@
         </p:nvSpPr>
         <p:spPr>
           <a:xfrm>
-            <a:off x="5886661" y="6172200"/>
-            <a:ext cx="2841838" cy="368301"/>
-          </a:xfrm>
-          <a:prstGeom prst="rect">
-            <a:avLst/>
-          </a:prstGeom>
-          <a:ln w="12700">
-            <a:miter lim="400000"/>
-          </a:ln>
-        </p:spPr>
-        <p:txBody>
-          <a:bodyPr wrap="none" lIns="45719" rIns="45719" anchor="ctr">
+            <a:off x="8454845" y="6224224"/>
+            <a:ext cx="273654" cy="264253"/>
+          </a:xfrm>
+          <a:prstGeom prst="rect">
+            <a:avLst/>
+          </a:prstGeom>
+          <a:ln w="12700">
+            <a:miter lim="400000"/>
+          </a:ln>
+        </p:spPr>
+        <p:txBody>
+          <a:bodyPr wrap="none" lIns="45718" tIns="45718" rIns="45718" bIns="45718" anchor="ctr">
             <a:spAutoFit/>
           </a:bodyPr>
           <a:lstStyle>
             <a:lvl1pPr algn="r">
-              <a:defRPr sz="1200"/>
+              <a:defRPr sz="1200">
+                <a:latin typeface="+mn-lt"/>
+                <a:ea typeface="+mn-ea"/>
+                <a:cs typeface="+mn-cs"/>
+                <a:sym typeface="Arial"/>
+              </a:defRPr>
             </a:lvl1pPr>
           </a:lstStyle>
           <a:p>
@@ -707,9 +712,9 @@
             <a:srgbClr val="000000"/>
           </a:solidFill>
           <a:uFillTx/>
-          <a:latin typeface="+mj-lt"/>
-          <a:ea typeface="+mj-ea"/>
-          <a:cs typeface="+mj-cs"/>
+          <a:latin typeface="+mn-lt"/>
+          <a:ea typeface="+mn-ea"/>
+          <a:cs typeface="+mn-cs"/>
           <a:sym typeface="Arial"/>
         </a:defRPr>
       </a:lvl1pPr>
@@ -733,9 +738,9 @@
             <a:srgbClr val="000000"/>
           </a:solidFill>
           <a:uFillTx/>
-          <a:latin typeface="+mj-lt"/>
-          <a:ea typeface="+mj-ea"/>
-          <a:cs typeface="+mj-cs"/>
+          <a:latin typeface="+mn-lt"/>
+          <a:ea typeface="+mn-ea"/>
+          <a:cs typeface="+mn-cs"/>
           <a:sym typeface="Arial"/>
         </a:defRPr>
       </a:lvl2pPr>
@@ -759,9 +764,9 @@
             <a:srgbClr val="000000"/>
           </a:solidFill>
           <a:uFillTx/>
-          <a:latin typeface="+mj-lt"/>
-          <a:ea typeface="+mj-ea"/>
-          <a:cs typeface="+mj-cs"/>
+          <a:latin typeface="+mn-lt"/>
+          <a:ea typeface="+mn-ea"/>
+          <a:cs typeface="+mn-cs"/>
           <a:sym typeface="Arial"/>
         </a:defRPr>
       </a:lvl3pPr>
@@ -785,9 +790,9 @@
             <a:srgbClr val="000000"/>
           </a:solidFill>
           <a:uFillTx/>
-          <a:latin typeface="+mj-lt"/>
-          <a:ea typeface="+mj-ea"/>
-          <a:cs typeface="+mj-cs"/>
+          <a:latin typeface="+mn-lt"/>
+          <a:ea typeface="+mn-ea"/>
+          <a:cs typeface="+mn-cs"/>
           <a:sym typeface="Arial"/>
         </a:defRPr>
       </a:lvl4pPr>
@@ -811,9 +816,9 @@
             <a:srgbClr val="000000"/>
           </a:solidFill>
           <a:uFillTx/>
-          <a:latin typeface="+mj-lt"/>
-          <a:ea typeface="+mj-ea"/>
-          <a:cs typeface="+mj-cs"/>
+          <a:latin typeface="+mn-lt"/>
+          <a:ea typeface="+mn-ea"/>
+          <a:cs typeface="+mn-cs"/>
           <a:sym typeface="Arial"/>
         </a:defRPr>
       </a:lvl5pPr>
@@ -837,9 +842,9 @@
             <a:srgbClr val="000000"/>
           </a:solidFill>
           <a:uFillTx/>
-          <a:latin typeface="+mj-lt"/>
-          <a:ea typeface="+mj-ea"/>
-          <a:cs typeface="+mj-cs"/>
+          <a:latin typeface="+mn-lt"/>
+          <a:ea typeface="+mn-ea"/>
+          <a:cs typeface="+mn-cs"/>
           <a:sym typeface="Arial"/>
         </a:defRPr>
       </a:lvl6pPr>
@@ -863,9 +868,9 @@
             <a:srgbClr val="000000"/>
           </a:solidFill>
           <a:uFillTx/>
-          <a:latin typeface="+mj-lt"/>
-          <a:ea typeface="+mj-ea"/>
-          <a:cs typeface="+mj-cs"/>
+          <a:latin typeface="+mn-lt"/>
+          <a:ea typeface="+mn-ea"/>
+          <a:cs typeface="+mn-cs"/>
           <a:sym typeface="Arial"/>
         </a:defRPr>
       </a:lvl7pPr>
@@ -889,9 +894,9 @@
             <a:srgbClr val="000000"/>
           </a:solidFill>
           <a:uFillTx/>
-          <a:latin typeface="+mj-lt"/>
-          <a:ea typeface="+mj-ea"/>
-          <a:cs typeface="+mj-cs"/>
+          <a:latin typeface="+mn-lt"/>
+          <a:ea typeface="+mn-ea"/>
+          <a:cs typeface="+mn-cs"/>
           <a:sym typeface="Arial"/>
         </a:defRPr>
       </a:lvl8pPr>
@@ -915,9 +920,9 @@
             <a:srgbClr val="000000"/>
           </a:solidFill>
           <a:uFillTx/>
-          <a:latin typeface="+mj-lt"/>
-          <a:ea typeface="+mj-ea"/>
-          <a:cs typeface="+mj-cs"/>
+          <a:latin typeface="+mn-lt"/>
+          <a:ea typeface="+mn-ea"/>
+          <a:cs typeface="+mn-cs"/>
           <a:sym typeface="Arial"/>
         </a:defRPr>
       </a:lvl9pPr>
@@ -943,9 +948,9 @@
             <a:srgbClr val="000000"/>
           </a:solidFill>
           <a:uFillTx/>
-          <a:latin typeface="+mj-lt"/>
-          <a:ea typeface="+mj-ea"/>
-          <a:cs typeface="+mj-cs"/>
+          <a:latin typeface="+mn-lt"/>
+          <a:ea typeface="+mn-ea"/>
+          <a:cs typeface="+mn-cs"/>
           <a:sym typeface="Arial"/>
         </a:defRPr>
       </a:lvl1pPr>
@@ -969,9 +974,9 @@
             <a:srgbClr val="000000"/>
           </a:solidFill>
           <a:uFillTx/>
-          <a:latin typeface="+mj-lt"/>
-          <a:ea typeface="+mj-ea"/>
-          <a:cs typeface="+mj-cs"/>
+          <a:latin typeface="+mn-lt"/>
+          <a:ea typeface="+mn-ea"/>
+          <a:cs typeface="+mn-cs"/>
           <a:sym typeface="Arial"/>
         </a:defRPr>
       </a:lvl2pPr>
@@ -995,9 +1000,9 @@
             <a:srgbClr val="000000"/>
           </a:solidFill>
           <a:uFillTx/>
-          <a:latin typeface="+mj-lt"/>
-          <a:ea typeface="+mj-ea"/>
-          <a:cs typeface="+mj-cs"/>
+          <a:latin typeface="+mn-lt"/>
+          <a:ea typeface="+mn-ea"/>
+          <a:cs typeface="+mn-cs"/>
           <a:sym typeface="Arial"/>
         </a:defRPr>
       </a:lvl3pPr>
@@ -1021,9 +1026,9 @@
             <a:srgbClr val="000000"/>
           </a:solidFill>
           <a:uFillTx/>
-          <a:latin typeface="+mj-lt"/>
-          <a:ea typeface="+mj-ea"/>
-          <a:cs typeface="+mj-cs"/>
+          <a:latin typeface="+mn-lt"/>
+          <a:ea typeface="+mn-ea"/>
+          <a:cs typeface="+mn-cs"/>
           <a:sym typeface="Arial"/>
         </a:defRPr>
       </a:lvl4pPr>
@@ -1047,9 +1052,9 @@
             <a:srgbClr val="000000"/>
           </a:solidFill>
           <a:uFillTx/>
-          <a:latin typeface="+mj-lt"/>
-          <a:ea typeface="+mj-ea"/>
-          <a:cs typeface="+mj-cs"/>
+          <a:latin typeface="+mn-lt"/>
+          <a:ea typeface="+mn-ea"/>
+          <a:cs typeface="+mn-cs"/>
           <a:sym typeface="Arial"/>
         </a:defRPr>
       </a:lvl5pPr>
@@ -1073,9 +1078,9 @@
             <a:srgbClr val="000000"/>
           </a:solidFill>
           <a:uFillTx/>
-          <a:latin typeface="+mj-lt"/>
-          <a:ea typeface="+mj-ea"/>
-          <a:cs typeface="+mj-cs"/>
+          <a:latin typeface="+mn-lt"/>
+          <a:ea typeface="+mn-ea"/>
+          <a:cs typeface="+mn-cs"/>
           <a:sym typeface="Arial"/>
         </a:defRPr>
       </a:lvl6pPr>
@@ -1099,9 +1104,9 @@
             <a:srgbClr val="000000"/>
           </a:solidFill>
           <a:uFillTx/>
-          <a:latin typeface="+mj-lt"/>
-          <a:ea typeface="+mj-ea"/>
-          <a:cs typeface="+mj-cs"/>
+          <a:latin typeface="+mn-lt"/>
+          <a:ea typeface="+mn-ea"/>
+          <a:cs typeface="+mn-cs"/>
           <a:sym typeface="Arial"/>
         </a:defRPr>
       </a:lvl7pPr>
@@ -1125,9 +1130,9 @@
             <a:srgbClr val="000000"/>
           </a:solidFill>
           <a:uFillTx/>
-          <a:latin typeface="+mj-lt"/>
-          <a:ea typeface="+mj-ea"/>
-          <a:cs typeface="+mj-cs"/>
+          <a:latin typeface="+mn-lt"/>
+          <a:ea typeface="+mn-ea"/>
+          <a:cs typeface="+mn-cs"/>
           <a:sym typeface="Arial"/>
         </a:defRPr>
       </a:lvl8pPr>
@@ -1151,9 +1156,9 @@
             <a:srgbClr val="000000"/>
           </a:solidFill>
           <a:uFillTx/>
-          <a:latin typeface="+mj-lt"/>
-          <a:ea typeface="+mj-ea"/>
-          <a:cs typeface="+mj-cs"/>
+          <a:latin typeface="+mn-lt"/>
+          <a:ea typeface="+mn-ea"/>
+          <a:cs typeface="+mn-cs"/>
           <a:sym typeface="Arial"/>
         </a:defRPr>
       </a:lvl9pPr>
@@ -1185,7 +1190,7 @@
           <a:sym typeface="Arial"/>
         </a:defRPr>
       </a:lvl1pPr>
-      <a:lvl2pPr marL="0" marR="0" indent="457200" algn="r" defTabSz="914400" rtl="0" latinLnBrk="0">
+      <a:lvl2pPr marL="0" marR="0" indent="0" algn="r" defTabSz="914400" rtl="0" latinLnBrk="0">
         <a:lnSpc>
           <a:spcPct val="100000"/>
         </a:lnSpc>
@@ -1211,7 +1216,7 @@
           <a:sym typeface="Arial"/>
         </a:defRPr>
       </a:lvl2pPr>
-      <a:lvl3pPr marL="0" marR="0" indent="914400" algn="r" defTabSz="914400" rtl="0" latinLnBrk="0">
+      <a:lvl3pPr marL="0" marR="0" indent="0" algn="r" defTabSz="914400" rtl="0" latinLnBrk="0">
         <a:lnSpc>
           <a:spcPct val="100000"/>
         </a:lnSpc>
@@ -1237,7 +1242,7 @@
           <a:sym typeface="Arial"/>
         </a:defRPr>
       </a:lvl3pPr>
-      <a:lvl4pPr marL="0" marR="0" indent="1371600" algn="r" defTabSz="914400" rtl="0" latinLnBrk="0">
+      <a:lvl4pPr marL="0" marR="0" indent="0" algn="r" defTabSz="914400" rtl="0" latinLnBrk="0">
         <a:lnSpc>
           <a:spcPct val="100000"/>
         </a:lnSpc>
@@ -1263,7 +1268,7 @@
           <a:sym typeface="Arial"/>
         </a:defRPr>
       </a:lvl4pPr>
-      <a:lvl5pPr marL="0" marR="0" indent="1828800" algn="r" defTabSz="914400" rtl="0" latinLnBrk="0">
+      <a:lvl5pPr marL="0" marR="0" indent="0" algn="r" defTabSz="914400" rtl="0" latinLnBrk="0">
         <a:lnSpc>
           <a:spcPct val="100000"/>
         </a:lnSpc>
@@ -1289,7 +1294,7 @@
           <a:sym typeface="Arial"/>
         </a:defRPr>
       </a:lvl5pPr>
-      <a:lvl6pPr marL="0" marR="0" indent="2286000" algn="r" defTabSz="914400" rtl="0" latinLnBrk="0">
+      <a:lvl6pPr marL="0" marR="0" indent="0" algn="r" defTabSz="914400" rtl="0" latinLnBrk="0">
         <a:lnSpc>
           <a:spcPct val="100000"/>
         </a:lnSpc>
@@ -1315,7 +1320,7 @@
           <a:sym typeface="Arial"/>
         </a:defRPr>
       </a:lvl6pPr>
-      <a:lvl7pPr marL="0" marR="0" indent="2743200" algn="r" defTabSz="914400" rtl="0" latinLnBrk="0">
+      <a:lvl7pPr marL="0" marR="0" indent="0" algn="r" defTabSz="914400" rtl="0" latinLnBrk="0">
         <a:lnSpc>
           <a:spcPct val="100000"/>
         </a:lnSpc>
@@ -1341,7 +1346,7 @@
           <a:sym typeface="Arial"/>
         </a:defRPr>
       </a:lvl7pPr>
-      <a:lvl8pPr marL="0" marR="0" indent="3200400" algn="r" defTabSz="914400" rtl="0" latinLnBrk="0">
+      <a:lvl8pPr marL="0" marR="0" indent="0" algn="r" defTabSz="914400" rtl="0" latinLnBrk="0">
         <a:lnSpc>
           <a:spcPct val="100000"/>
         </a:lnSpc>
@@ -1367,7 +1372,7 @@
           <a:sym typeface="Arial"/>
         </a:defRPr>
       </a:lvl8pPr>
-      <a:lvl9pPr marL="0" marR="0" indent="3657600" algn="r" defTabSz="914400" rtl="0" latinLnBrk="0">
+      <a:lvl9pPr marL="0" marR="0" indent="0" algn="r" defTabSz="914400" rtl="0" latinLnBrk="0">
         <a:lnSpc>
           <a:spcPct val="100000"/>
         </a:lnSpc>
@@ -1415,9 +1420,153 @@
           <a:chExt cx="0" cy="0"/>
         </a:xfrm>
       </p:grpSpPr>
+      <p:sp>
+        <p:nvSpPr>
+          <p:cNvPr id="20" name="Text 0"/>
+          <p:cNvSpPr txBox="1"/>
+          <p:nvPr/>
+        </p:nvSpPr>
+        <p:spPr>
+          <a:xfrm>
+            <a:off x="731518" y="4155784"/>
+            <a:ext cx="9052564" cy="375230"/>
+          </a:xfrm>
+          <a:prstGeom prst="rect">
+            <a:avLst/>
+          </a:prstGeom>
+          <a:ln w="12700">
+            <a:miter lim="400000"/>
+          </a:ln>
+          <a:extLst>
+            <a:ext uri="{C572A759-6A51-4108-AA02-DFA0A04FC94B}">
+              <ma14:wrappingTextBoxFlag xmlns:ma14="http://schemas.microsoft.com/office/mac/drawingml/2011/main" val="1"/>
+            </a:ext>
+          </a:extLst>
+        </p:spPr>
+        <p:txBody>
+          <a:bodyPr lIns="45718" tIns="45718" rIns="45718" bIns="45718" anchor="ctr">
+            <a:spAutoFit/>
+          </a:bodyPr>
+          <a:lstStyle>
+            <a:lvl1pPr>
+              <a:defRPr sz="2000">
+                <a:solidFill>
+                  <a:srgbClr val="6B6A66"/>
+                </a:solidFill>
+                <a:latin typeface="+mn-lt"/>
+                <a:ea typeface="+mn-ea"/>
+                <a:cs typeface="+mn-cs"/>
+                <a:sym typeface="Arial"/>
+              </a:defRPr>
+            </a:lvl1pPr>
+          </a:lstStyle>
+          <a:p>
+            <a:pPr/>
+            <a:r>
+              <a:t>The eye that watches five years ahead.</a:t>
+            </a:r>
+          </a:p>
+        </p:txBody>
+      </p:sp>
+      <p:sp>
+        <p:nvSpPr>
+          <p:cNvPr id="21" name="Text 1"/>
+          <p:cNvSpPr txBox="1"/>
+          <p:nvPr/>
+        </p:nvSpPr>
+        <p:spPr>
+          <a:xfrm>
+            <a:off x="731518" y="4708050"/>
+            <a:ext cx="10881364" cy="276538"/>
+          </a:xfrm>
+          <a:prstGeom prst="rect">
+            <a:avLst/>
+          </a:prstGeom>
+          <a:ln w="12700">
+            <a:miter lim="400000"/>
+          </a:ln>
+          <a:extLst>
+            <a:ext uri="{C572A759-6A51-4108-AA02-DFA0A04FC94B}">
+              <ma14:wrappingTextBoxFlag xmlns:ma14="http://schemas.microsoft.com/office/mac/drawingml/2011/main" val="1"/>
+            </a:ext>
+          </a:extLst>
+        </p:spPr>
+        <p:txBody>
+          <a:bodyPr lIns="45718" tIns="45718" rIns="45718" bIns="45718" anchor="ctr">
+            <a:spAutoFit/>
+          </a:bodyPr>
+          <a:lstStyle>
+            <a:lvl1pPr>
+              <a:defRPr b="1" spc="100" sz="1300">
+                <a:solidFill>
+                  <a:srgbClr val="2A78D6"/>
+                </a:solidFill>
+                <a:latin typeface="+mn-lt"/>
+                <a:ea typeface="+mn-ea"/>
+                <a:cs typeface="+mn-cs"/>
+                <a:sym typeface="Arial"/>
+              </a:defRPr>
+            </a:lvl1pPr>
+          </a:lstStyle>
+          <a:p>
+            <a:pPr/>
+            <a:r>
+              <a:t>10Alytics Global Hackathon 2026   |   Track B: Data Science   |   Pod Nova</a:t>
+            </a:r>
+          </a:p>
+        </p:txBody>
+      </p:sp>
+      <p:sp>
+        <p:nvSpPr>
+          <p:cNvPr id="22" name="Text 2"/>
+          <p:cNvSpPr txBox="1"/>
+          <p:nvPr/>
+        </p:nvSpPr>
+        <p:spPr>
+          <a:xfrm>
+            <a:off x="731518" y="6085793"/>
+            <a:ext cx="10881364" cy="264254"/>
+          </a:xfrm>
+          <a:prstGeom prst="rect">
+            <a:avLst/>
+          </a:prstGeom>
+          <a:ln w="12700">
+            <a:miter lim="400000"/>
+          </a:ln>
+          <a:extLst>
+            <a:ext uri="{C572A759-6A51-4108-AA02-DFA0A04FC94B}">
+              <ma14:wrappingTextBoxFlag xmlns:ma14="http://schemas.microsoft.com/office/mac/drawingml/2011/main" val="1"/>
+            </a:ext>
+          </a:extLst>
+        </p:spPr>
+        <p:txBody>
+          <a:bodyPr lIns="45718" tIns="45718" rIns="45718" bIns="45718" anchor="ctr">
+            <a:spAutoFit/>
+          </a:bodyPr>
+          <a:lstStyle>
+            <a:lvl1pPr>
+              <a:defRPr sz="1200">
+                <a:solidFill>
+                  <a:srgbClr val="6B6A66"/>
+                </a:solidFill>
+                <a:latin typeface="+mn-lt"/>
+                <a:ea typeface="+mn-ea"/>
+                <a:cs typeface="+mn-cs"/>
+                <a:sym typeface="Arial"/>
+              </a:defRPr>
+            </a:lvl1pPr>
+          </a:lstStyle>
+          <a:p>
+            <a:pPr/>
+            <a:r>
+              <a:t>An early-warning intelligence layer for ASEAN public health   |  A Dedication towards  SDG 3, 10, 17</a:t>
+            </a:r>
+          </a:p>
+        </p:txBody>
+      </p:sp>
       <p:pic>
         <p:nvPicPr>
-          <p:cNvPr id="20" name="Image 0" descr="Image 0"/>
+          <p:cNvPr id="23" name="image1.png" descr="image1.png"/>
           <p:cNvPicPr>
             <a:picLocks noChangeAspect="1"/>
           </p:cNvPicPr>
@@ -1427,14 +1576,15 @@
           <a:blip r:embed="rId2">
             <a:extLst/>
           </a:blip>
+          <a:srcRect l="0" t="0" r="0" b="63262"/>
           <a:stretch>
             <a:fillRect/>
           </a:stretch>
         </p:blipFill>
         <p:spPr>
           <a:xfrm>
-            <a:off x="294461" y="1879129"/>
-            <a:ext cx="7623588" cy="2452807"/>
+            <a:off x="57382" y="1633051"/>
+            <a:ext cx="6385087" cy="2345699"/>
           </a:xfrm>
           <a:prstGeom prst="rect">
             <a:avLst/>
@@ -1444,138 +1594,6 @@
           </a:ln>
         </p:spPr>
       </p:pic>
-      <p:sp>
-        <p:nvSpPr>
-          <p:cNvPr id="21" name="Text 0"/>
-          <p:cNvSpPr txBox="1"/>
-          <p:nvPr/>
-        </p:nvSpPr>
-        <p:spPr>
-          <a:xfrm>
-            <a:off x="731519" y="4155784"/>
-            <a:ext cx="9052562" cy="375232"/>
-          </a:xfrm>
-          <a:prstGeom prst="rect">
-            <a:avLst/>
-          </a:prstGeom>
-          <a:ln w="12700">
-            <a:miter lim="400000"/>
-          </a:ln>
-          <a:extLst>
-            <a:ext uri="{C572A759-6A51-4108-AA02-DFA0A04FC94B}">
-              <ma14:wrappingTextBoxFlag xmlns:ma14="http://schemas.microsoft.com/office/mac/drawingml/2011/main" val="1"/>
-            </a:ext>
-          </a:extLst>
-        </p:spPr>
-        <p:txBody>
-          <a:bodyPr lIns="45719" rIns="45719" anchor="ctr">
-            <a:spAutoFit/>
-          </a:bodyPr>
-          <a:lstStyle>
-            <a:lvl1pPr>
-              <a:defRPr sz="2000">
-                <a:solidFill>
-                  <a:srgbClr val="6B6A66"/>
-                </a:solidFill>
-              </a:defRPr>
-            </a:lvl1pPr>
-          </a:lstStyle>
-          <a:p>
-            <a:pPr/>
-            <a:r>
-              <a:t>The eye that watches five years ahead.</a:t>
-            </a:r>
-          </a:p>
-        </p:txBody>
-      </p:sp>
-      <p:sp>
-        <p:nvSpPr>
-          <p:cNvPr id="22" name="Text 1"/>
-          <p:cNvSpPr txBox="1"/>
-          <p:nvPr/>
-        </p:nvSpPr>
-        <p:spPr>
-          <a:xfrm>
-            <a:off x="731519" y="4708050"/>
-            <a:ext cx="10881362" cy="276540"/>
-          </a:xfrm>
-          <a:prstGeom prst="rect">
-            <a:avLst/>
-          </a:prstGeom>
-          <a:ln w="12700">
-            <a:miter lim="400000"/>
-          </a:ln>
-          <a:extLst>
-            <a:ext uri="{C572A759-6A51-4108-AA02-DFA0A04FC94B}">
-              <ma14:wrappingTextBoxFlag xmlns:ma14="http://schemas.microsoft.com/office/mac/drawingml/2011/main" val="1"/>
-            </a:ext>
-          </a:extLst>
-        </p:spPr>
-        <p:txBody>
-          <a:bodyPr lIns="45719" rIns="45719" anchor="ctr">
-            <a:spAutoFit/>
-          </a:bodyPr>
-          <a:lstStyle>
-            <a:lvl1pPr>
-              <a:defRPr b="1" spc="100" sz="1300">
-                <a:solidFill>
-                  <a:srgbClr val="2A78D6"/>
-                </a:solidFill>
-              </a:defRPr>
-            </a:lvl1pPr>
-          </a:lstStyle>
-          <a:p>
-            <a:pPr/>
-            <a:r>
-              <a:t>10Alytics Global Hackathon 2026   |   Track B: Data Science   |   Pod Nova</a:t>
-            </a:r>
-          </a:p>
-        </p:txBody>
-      </p:sp>
-      <p:sp>
-        <p:nvSpPr>
-          <p:cNvPr id="23" name="Text 2"/>
-          <p:cNvSpPr txBox="1"/>
-          <p:nvPr/>
-        </p:nvSpPr>
-        <p:spPr>
-          <a:xfrm>
-            <a:off x="731519" y="6085793"/>
-            <a:ext cx="10881362" cy="264255"/>
-          </a:xfrm>
-          <a:prstGeom prst="rect">
-            <a:avLst/>
-          </a:prstGeom>
-          <a:ln w="12700">
-            <a:miter lim="400000"/>
-          </a:ln>
-          <a:extLst>
-            <a:ext uri="{C572A759-6A51-4108-AA02-DFA0A04FC94B}">
-              <ma14:wrappingTextBoxFlag xmlns:ma14="http://schemas.microsoft.com/office/mac/drawingml/2011/main" val="1"/>
-            </a:ext>
-          </a:extLst>
-        </p:spPr>
-        <p:txBody>
-          <a:bodyPr lIns="45719" rIns="45719" anchor="ctr">
-            <a:spAutoFit/>
-          </a:bodyPr>
-          <a:lstStyle>
-            <a:lvl1pPr>
-              <a:defRPr sz="1200">
-                <a:solidFill>
-                  <a:srgbClr val="6B6A66"/>
-                </a:solidFill>
-              </a:defRPr>
-            </a:lvl1pPr>
-          </a:lstStyle>
-          <a:p>
-            <a:pPr/>
-            <a:r>
-              <a:t>An early-warning intelligence layer for ASEAN public health   |   SDG 3, 10, 17</a:t>
-            </a:r>
-          </a:p>
-        </p:txBody>
-      </p:sp>
     </p:spTree>
   </p:cSld>
   <p:clrMapOvr>
@@ -1611,22 +1629,22 @@
         <p:spPr>
           <a:xfrm>
             <a:off x="685800" y="507952"/>
-            <a:ext cx="10881361" cy="264256"/>
-          </a:xfrm>
-          <a:prstGeom prst="rect">
-            <a:avLst/>
-          </a:prstGeom>
-          <a:ln w="12700">
-            <a:miter lim="400000"/>
-          </a:ln>
-          <a:extLst>
-            <a:ext uri="{C572A759-6A51-4108-AA02-DFA0A04FC94B}">
-              <ma14:wrappingTextBoxFlag xmlns:ma14="http://schemas.microsoft.com/office/mac/drawingml/2011/main" val="1"/>
-            </a:ext>
-          </a:extLst>
-        </p:spPr>
-        <p:txBody>
-          <a:bodyPr lIns="45719" rIns="45719" anchor="ctr">
+            <a:ext cx="10881361" cy="264254"/>
+          </a:xfrm>
+          <a:prstGeom prst="rect">
+            <a:avLst/>
+          </a:prstGeom>
+          <a:ln w="12700">
+            <a:miter lim="400000"/>
+          </a:ln>
+          <a:extLst>
+            <a:ext uri="{C572A759-6A51-4108-AA02-DFA0A04FC94B}">
+              <ma14:wrappingTextBoxFlag xmlns:ma14="http://schemas.microsoft.com/office/mac/drawingml/2011/main" val="1"/>
+            </a:ext>
+          </a:extLst>
+        </p:spPr>
+        <p:txBody>
+          <a:bodyPr lIns="45718" tIns="45718" rIns="45718" bIns="45718" anchor="ctr">
             <a:spAutoFit/>
           </a:bodyPr>
           <a:lstStyle>
@@ -1635,6 +1653,10 @@
                 <a:solidFill>
                   <a:srgbClr val="2A78D6"/>
                 </a:solidFill>
+                <a:latin typeface="+mn-lt"/>
+                <a:ea typeface="+mn-ea"/>
+                <a:cs typeface="+mn-cs"/>
+                <a:sym typeface="Arial"/>
               </a:defRPr>
             </a:lvl1pPr>
           </a:lstStyle>
@@ -1654,23 +1676,23 @@
         </p:nvSpPr>
         <p:spPr>
           <a:xfrm>
-            <a:off x="685800" y="905831"/>
-            <a:ext cx="10881361" cy="474338"/>
-          </a:xfrm>
-          <a:prstGeom prst="rect">
-            <a:avLst/>
-          </a:prstGeom>
-          <a:ln w="12700">
-            <a:miter lim="400000"/>
-          </a:ln>
-          <a:extLst>
-            <a:ext uri="{C572A759-6A51-4108-AA02-DFA0A04FC94B}">
-              <ma14:wrappingTextBoxFlag xmlns:ma14="http://schemas.microsoft.com/office/mac/drawingml/2011/main" val="1"/>
-            </a:ext>
-          </a:extLst>
-        </p:spPr>
-        <p:txBody>
-          <a:bodyPr lIns="45719" rIns="45719" anchor="ctr">
+            <a:off x="685800" y="905832"/>
+            <a:ext cx="10881361" cy="474336"/>
+          </a:xfrm>
+          <a:prstGeom prst="rect">
+            <a:avLst/>
+          </a:prstGeom>
+          <a:ln w="12700">
+            <a:miter lim="400000"/>
+          </a:ln>
+          <a:extLst>
+            <a:ext uri="{C572A759-6A51-4108-AA02-DFA0A04FC94B}">
+              <ma14:wrappingTextBoxFlag xmlns:ma14="http://schemas.microsoft.com/office/mac/drawingml/2011/main" val="1"/>
+            </a:ext>
+          </a:extLst>
+        </p:spPr>
+        <p:txBody>
+          <a:bodyPr lIns="45718" tIns="45718" rIns="45718" bIns="45718" anchor="ctr">
             <a:spAutoFit/>
           </a:bodyPr>
           <a:lstStyle>
@@ -1679,6 +1701,10 @@
                 <a:solidFill>
                   <a:srgbClr val="0B0B0B"/>
                 </a:solidFill>
+                <a:latin typeface="+mn-lt"/>
+                <a:ea typeface="+mn-ea"/>
+                <a:cs typeface="+mn-cs"/>
+                <a:sym typeface="Arial"/>
               </a:defRPr>
             </a:lvl1pPr>
           </a:lstStyle>
@@ -1699,7 +1725,7 @@
         <p:spPr>
           <a:xfrm>
             <a:off x="640080" y="1645920"/>
-            <a:ext cx="502921" cy="502921"/>
+            <a:ext cx="502923" cy="502923"/>
           </a:xfrm>
           <a:prstGeom prst="ellipse">
             <a:avLst/>
@@ -1712,10 +1738,17 @@
           </a:ln>
         </p:spPr>
         <p:txBody>
-          <a:bodyPr lIns="45719" rIns="45719"/>
+          <a:bodyPr lIns="45718" tIns="45718" rIns="45718" bIns="45718"/>
           <a:lstStyle/>
           <a:p>
-            <a:pPr/>
+            <a:pPr>
+              <a:defRPr>
+                <a:latin typeface="+mn-lt"/>
+                <a:ea typeface="+mn-ea"/>
+                <a:cs typeface="+mn-cs"/>
+                <a:sym typeface="Arial"/>
+              </a:defRPr>
+            </a:pPr>
           </a:p>
         </p:txBody>
       </p:sp>
@@ -1727,23 +1760,23 @@
         </p:nvSpPr>
         <p:spPr>
           <a:xfrm>
-            <a:off x="685800" y="1722048"/>
-            <a:ext cx="411480" cy="350663"/>
-          </a:xfrm>
-          <a:prstGeom prst="rect">
-            <a:avLst/>
-          </a:prstGeom>
-          <a:ln w="12700">
-            <a:miter lim="400000"/>
-          </a:ln>
-          <a:extLst>
-            <a:ext uri="{C572A759-6A51-4108-AA02-DFA0A04FC94B}">
-              <ma14:wrappingTextBoxFlag xmlns:ma14="http://schemas.microsoft.com/office/mac/drawingml/2011/main" val="1"/>
-            </a:ext>
-          </a:extLst>
-        </p:spPr>
-        <p:txBody>
-          <a:bodyPr lIns="45719" rIns="45719" anchor="ctr">
+            <a:off x="685799" y="1722048"/>
+            <a:ext cx="411482" cy="350661"/>
+          </a:xfrm>
+          <a:prstGeom prst="rect">
+            <a:avLst/>
+          </a:prstGeom>
+          <a:ln w="12700">
+            <a:miter lim="400000"/>
+          </a:ln>
+          <a:extLst>
+            <a:ext uri="{C572A759-6A51-4108-AA02-DFA0A04FC94B}">
+              <ma14:wrappingTextBoxFlag xmlns:ma14="http://schemas.microsoft.com/office/mac/drawingml/2011/main" val="1"/>
+            </a:ext>
+          </a:extLst>
+        </p:spPr>
+        <p:txBody>
+          <a:bodyPr lIns="45718" tIns="45718" rIns="45718" bIns="45718" anchor="ctr">
             <a:spAutoFit/>
           </a:bodyPr>
           <a:lstStyle>
@@ -1752,6 +1785,10 @@
                 <a:solidFill>
                   <a:srgbClr val="FFFFFF"/>
                 </a:solidFill>
+                <a:latin typeface="+mn-lt"/>
+                <a:ea typeface="+mn-ea"/>
+                <a:cs typeface="+mn-cs"/>
+                <a:sym typeface="Arial"/>
               </a:defRPr>
             </a:lvl1pPr>
           </a:lstStyle>
@@ -1771,23 +1808,23 @@
         </p:nvSpPr>
         <p:spPr>
           <a:xfrm>
-            <a:off x="1371600" y="1626383"/>
-            <a:ext cx="9966961" cy="313394"/>
-          </a:xfrm>
-          <a:prstGeom prst="rect">
-            <a:avLst/>
-          </a:prstGeom>
-          <a:ln w="12700">
-            <a:miter lim="400000"/>
-          </a:ln>
-          <a:extLst>
-            <a:ext uri="{C572A759-6A51-4108-AA02-DFA0A04FC94B}">
-              <ma14:wrappingTextBoxFlag xmlns:ma14="http://schemas.microsoft.com/office/mac/drawingml/2011/main" val="1"/>
-            </a:ext>
-          </a:extLst>
-        </p:spPr>
-        <p:txBody>
-          <a:bodyPr lIns="45719" rIns="45719" anchor="ctr">
+            <a:off x="1371600" y="1626384"/>
+            <a:ext cx="9966961" cy="313391"/>
+          </a:xfrm>
+          <a:prstGeom prst="rect">
+            <a:avLst/>
+          </a:prstGeom>
+          <a:ln w="12700">
+            <a:miter lim="400000"/>
+          </a:ln>
+          <a:extLst>
+            <a:ext uri="{C572A759-6A51-4108-AA02-DFA0A04FC94B}">
+              <ma14:wrappingTextBoxFlag xmlns:ma14="http://schemas.microsoft.com/office/mac/drawingml/2011/main" val="1"/>
+            </a:ext>
+          </a:extLst>
+        </p:spPr>
+        <p:txBody>
+          <a:bodyPr lIns="45718" tIns="45718" rIns="45718" bIns="45718" anchor="ctr">
             <a:spAutoFit/>
           </a:bodyPr>
           <a:lstStyle>
@@ -1796,6 +1833,10 @@
                 <a:solidFill>
                   <a:srgbClr val="0B0B0B"/>
                 </a:solidFill>
+                <a:latin typeface="+mn-lt"/>
+                <a:ea typeface="+mn-ea"/>
+                <a:cs typeface="+mn-cs"/>
+                <a:sym typeface="Arial"/>
               </a:defRPr>
             </a:lvl1pPr>
           </a:lstStyle>
@@ -1815,23 +1856,23 @@
         </p:nvSpPr>
         <p:spPr>
           <a:xfrm>
-            <a:off x="1371600" y="2062432"/>
-            <a:ext cx="9966961" cy="264256"/>
-          </a:xfrm>
-          <a:prstGeom prst="rect">
-            <a:avLst/>
-          </a:prstGeom>
-          <a:ln w="12700">
-            <a:miter lim="400000"/>
-          </a:ln>
-          <a:extLst>
-            <a:ext uri="{C572A759-6A51-4108-AA02-DFA0A04FC94B}">
-              <ma14:wrappingTextBoxFlag xmlns:ma14="http://schemas.microsoft.com/office/mac/drawingml/2011/main" val="1"/>
-            </a:ext>
-          </a:extLst>
-        </p:spPr>
-        <p:txBody>
-          <a:bodyPr lIns="45719" rIns="45719" anchor="ctr">
+            <a:off x="1371600" y="2062433"/>
+            <a:ext cx="9966961" cy="264253"/>
+          </a:xfrm>
+          <a:prstGeom prst="rect">
+            <a:avLst/>
+          </a:prstGeom>
+          <a:ln w="12700">
+            <a:miter lim="400000"/>
+          </a:ln>
+          <a:extLst>
+            <a:ext uri="{C572A759-6A51-4108-AA02-DFA0A04FC94B}">
+              <ma14:wrappingTextBoxFlag xmlns:ma14="http://schemas.microsoft.com/office/mac/drawingml/2011/main" val="1"/>
+            </a:ext>
+          </a:extLst>
+        </p:spPr>
+        <p:txBody>
+          <a:bodyPr lIns="45718" tIns="45718" rIns="45718" bIns="45718" anchor="ctr">
             <a:spAutoFit/>
           </a:bodyPr>
           <a:lstStyle>
@@ -1840,6 +1881,10 @@
                 <a:solidFill>
                   <a:srgbClr val="6B6A66"/>
                 </a:solidFill>
+                <a:latin typeface="+mn-lt"/>
+                <a:ea typeface="+mn-ea"/>
+                <a:cs typeface="+mn-cs"/>
+                <a:sym typeface="Arial"/>
               </a:defRPr>
             </a:lvl1pPr>
           </a:lstStyle>
@@ -1859,8 +1904,8 @@
         </p:nvSpPr>
         <p:spPr>
           <a:xfrm>
-            <a:off x="640080" y="2578607"/>
-            <a:ext cx="502921" cy="502921"/>
+            <a:off x="640080" y="2578606"/>
+            <a:ext cx="502923" cy="502923"/>
           </a:xfrm>
           <a:prstGeom prst="ellipse">
             <a:avLst/>
@@ -1873,10 +1918,17 @@
           </a:ln>
         </p:spPr>
         <p:txBody>
-          <a:bodyPr lIns="45719" rIns="45719"/>
+          <a:bodyPr lIns="45718" tIns="45718" rIns="45718" bIns="45718"/>
           <a:lstStyle/>
           <a:p>
-            <a:pPr/>
+            <a:pPr>
+              <a:defRPr>
+                <a:latin typeface="+mn-lt"/>
+                <a:ea typeface="+mn-ea"/>
+                <a:cs typeface="+mn-cs"/>
+                <a:sym typeface="Arial"/>
+              </a:defRPr>
+            </a:pPr>
           </a:p>
         </p:txBody>
       </p:sp>
@@ -1888,23 +1940,23 @@
         </p:nvSpPr>
         <p:spPr>
           <a:xfrm>
-            <a:off x="685800" y="2654736"/>
-            <a:ext cx="411480" cy="350663"/>
-          </a:xfrm>
-          <a:prstGeom prst="rect">
-            <a:avLst/>
-          </a:prstGeom>
-          <a:ln w="12700">
-            <a:miter lim="400000"/>
-          </a:ln>
-          <a:extLst>
-            <a:ext uri="{C572A759-6A51-4108-AA02-DFA0A04FC94B}">
-              <ma14:wrappingTextBoxFlag xmlns:ma14="http://schemas.microsoft.com/office/mac/drawingml/2011/main" val="1"/>
-            </a:ext>
-          </a:extLst>
-        </p:spPr>
-        <p:txBody>
-          <a:bodyPr lIns="45719" rIns="45719" anchor="ctr">
+            <a:off x="685799" y="2654737"/>
+            <a:ext cx="411482" cy="350660"/>
+          </a:xfrm>
+          <a:prstGeom prst="rect">
+            <a:avLst/>
+          </a:prstGeom>
+          <a:ln w="12700">
+            <a:miter lim="400000"/>
+          </a:ln>
+          <a:extLst>
+            <a:ext uri="{C572A759-6A51-4108-AA02-DFA0A04FC94B}">
+              <ma14:wrappingTextBoxFlag xmlns:ma14="http://schemas.microsoft.com/office/mac/drawingml/2011/main" val="1"/>
+            </a:ext>
+          </a:extLst>
+        </p:spPr>
+        <p:txBody>
+          <a:bodyPr lIns="45718" tIns="45718" rIns="45718" bIns="45718" anchor="ctr">
             <a:spAutoFit/>
           </a:bodyPr>
           <a:lstStyle>
@@ -1913,6 +1965,10 @@
                 <a:solidFill>
                   <a:srgbClr val="FFFFFF"/>
                 </a:solidFill>
+                <a:latin typeface="+mn-lt"/>
+                <a:ea typeface="+mn-ea"/>
+                <a:cs typeface="+mn-cs"/>
+                <a:sym typeface="Arial"/>
               </a:defRPr>
             </a:lvl1pPr>
           </a:lstStyle>
@@ -1933,22 +1989,22 @@
         <p:spPr>
           <a:xfrm>
             <a:off x="1371600" y="2559071"/>
-            <a:ext cx="9966961" cy="313394"/>
-          </a:xfrm>
-          <a:prstGeom prst="rect">
-            <a:avLst/>
-          </a:prstGeom>
-          <a:ln w="12700">
-            <a:miter lim="400000"/>
-          </a:ln>
-          <a:extLst>
-            <a:ext uri="{C572A759-6A51-4108-AA02-DFA0A04FC94B}">
-              <ma14:wrappingTextBoxFlag xmlns:ma14="http://schemas.microsoft.com/office/mac/drawingml/2011/main" val="1"/>
-            </a:ext>
-          </a:extLst>
-        </p:spPr>
-        <p:txBody>
-          <a:bodyPr lIns="45719" rIns="45719" anchor="ctr">
+            <a:ext cx="9966961" cy="313392"/>
+          </a:xfrm>
+          <a:prstGeom prst="rect">
+            <a:avLst/>
+          </a:prstGeom>
+          <a:ln w="12700">
+            <a:miter lim="400000"/>
+          </a:ln>
+          <a:extLst>
+            <a:ext uri="{C572A759-6A51-4108-AA02-DFA0A04FC94B}">
+              <ma14:wrappingTextBoxFlag xmlns:ma14="http://schemas.microsoft.com/office/mac/drawingml/2011/main" val="1"/>
+            </a:ext>
+          </a:extLst>
+        </p:spPr>
+        <p:txBody>
+          <a:bodyPr lIns="45718" tIns="45718" rIns="45718" bIns="45718" anchor="ctr">
             <a:spAutoFit/>
           </a:bodyPr>
           <a:lstStyle>
@@ -1957,6 +2013,10 @@
                 <a:solidFill>
                   <a:srgbClr val="0B0B0B"/>
                 </a:solidFill>
+                <a:latin typeface="+mn-lt"/>
+                <a:ea typeface="+mn-ea"/>
+                <a:cs typeface="+mn-cs"/>
+                <a:sym typeface="Arial"/>
               </a:defRPr>
             </a:lvl1pPr>
           </a:lstStyle>
@@ -1976,23 +2036,23 @@
         </p:nvSpPr>
         <p:spPr>
           <a:xfrm>
-            <a:off x="1371600" y="2995120"/>
-            <a:ext cx="9966961" cy="264256"/>
-          </a:xfrm>
-          <a:prstGeom prst="rect">
-            <a:avLst/>
-          </a:prstGeom>
-          <a:ln w="12700">
-            <a:miter lim="400000"/>
-          </a:ln>
-          <a:extLst>
-            <a:ext uri="{C572A759-6A51-4108-AA02-DFA0A04FC94B}">
-              <ma14:wrappingTextBoxFlag xmlns:ma14="http://schemas.microsoft.com/office/mac/drawingml/2011/main" val="1"/>
-            </a:ext>
-          </a:extLst>
-        </p:spPr>
-        <p:txBody>
-          <a:bodyPr lIns="45719" rIns="45719" anchor="ctr">
+            <a:off x="1371600" y="2995121"/>
+            <a:ext cx="9966961" cy="264253"/>
+          </a:xfrm>
+          <a:prstGeom prst="rect">
+            <a:avLst/>
+          </a:prstGeom>
+          <a:ln w="12700">
+            <a:miter lim="400000"/>
+          </a:ln>
+          <a:extLst>
+            <a:ext uri="{C572A759-6A51-4108-AA02-DFA0A04FC94B}">
+              <ma14:wrappingTextBoxFlag xmlns:ma14="http://schemas.microsoft.com/office/mac/drawingml/2011/main" val="1"/>
+            </a:ext>
+          </a:extLst>
+        </p:spPr>
+        <p:txBody>
+          <a:bodyPr lIns="45718" tIns="45718" rIns="45718" bIns="45718" anchor="ctr">
             <a:spAutoFit/>
           </a:bodyPr>
           <a:lstStyle>
@@ -2001,6 +2061,10 @@
                 <a:solidFill>
                   <a:srgbClr val="6B6A66"/>
                 </a:solidFill>
+                <a:latin typeface="+mn-lt"/>
+                <a:ea typeface="+mn-ea"/>
+                <a:cs typeface="+mn-cs"/>
+                <a:sym typeface="Arial"/>
               </a:defRPr>
             </a:lvl1pPr>
           </a:lstStyle>
@@ -2021,7 +2085,7 @@
         <p:spPr>
           <a:xfrm>
             <a:off x="640080" y="3511296"/>
-            <a:ext cx="502921" cy="502921"/>
+            <a:ext cx="502923" cy="502923"/>
           </a:xfrm>
           <a:prstGeom prst="ellipse">
             <a:avLst/>
@@ -2034,10 +2098,17 @@
           </a:ln>
         </p:spPr>
         <p:txBody>
-          <a:bodyPr lIns="45719" rIns="45719"/>
+          <a:bodyPr lIns="45718" tIns="45718" rIns="45718" bIns="45718"/>
           <a:lstStyle/>
           <a:p>
-            <a:pPr/>
+            <a:pPr>
+              <a:defRPr>
+                <a:latin typeface="+mn-lt"/>
+                <a:ea typeface="+mn-ea"/>
+                <a:cs typeface="+mn-cs"/>
+                <a:sym typeface="Arial"/>
+              </a:defRPr>
+            </a:pPr>
           </a:p>
         </p:txBody>
       </p:sp>
@@ -2049,23 +2120,23 @@
         </p:nvSpPr>
         <p:spPr>
           <a:xfrm>
-            <a:off x="685800" y="3587424"/>
-            <a:ext cx="411480" cy="350663"/>
-          </a:xfrm>
-          <a:prstGeom prst="rect">
-            <a:avLst/>
-          </a:prstGeom>
-          <a:ln w="12700">
-            <a:miter lim="400000"/>
-          </a:ln>
-          <a:extLst>
-            <a:ext uri="{C572A759-6A51-4108-AA02-DFA0A04FC94B}">
-              <ma14:wrappingTextBoxFlag xmlns:ma14="http://schemas.microsoft.com/office/mac/drawingml/2011/main" val="1"/>
-            </a:ext>
-          </a:extLst>
-        </p:spPr>
-        <p:txBody>
-          <a:bodyPr lIns="45719" rIns="45719" anchor="ctr">
+            <a:off x="685799" y="3587425"/>
+            <a:ext cx="411482" cy="350660"/>
+          </a:xfrm>
+          <a:prstGeom prst="rect">
+            <a:avLst/>
+          </a:prstGeom>
+          <a:ln w="12700">
+            <a:miter lim="400000"/>
+          </a:ln>
+          <a:extLst>
+            <a:ext uri="{C572A759-6A51-4108-AA02-DFA0A04FC94B}">
+              <ma14:wrappingTextBoxFlag xmlns:ma14="http://schemas.microsoft.com/office/mac/drawingml/2011/main" val="1"/>
+            </a:ext>
+          </a:extLst>
+        </p:spPr>
+        <p:txBody>
+          <a:bodyPr lIns="45718" tIns="45718" rIns="45718" bIns="45718" anchor="ctr">
             <a:spAutoFit/>
           </a:bodyPr>
           <a:lstStyle>
@@ -2074,6 +2145,10 @@
                 <a:solidFill>
                   <a:srgbClr val="FFFFFF"/>
                 </a:solidFill>
+                <a:latin typeface="+mn-lt"/>
+                <a:ea typeface="+mn-ea"/>
+                <a:cs typeface="+mn-cs"/>
+                <a:sym typeface="Arial"/>
               </a:defRPr>
             </a:lvl1pPr>
           </a:lstStyle>
@@ -2094,22 +2169,22 @@
         <p:spPr>
           <a:xfrm>
             <a:off x="1371600" y="3491759"/>
-            <a:ext cx="9966961" cy="313394"/>
-          </a:xfrm>
-          <a:prstGeom prst="rect">
-            <a:avLst/>
-          </a:prstGeom>
-          <a:ln w="12700">
-            <a:miter lim="400000"/>
-          </a:ln>
-          <a:extLst>
-            <a:ext uri="{C572A759-6A51-4108-AA02-DFA0A04FC94B}">
-              <ma14:wrappingTextBoxFlag xmlns:ma14="http://schemas.microsoft.com/office/mac/drawingml/2011/main" val="1"/>
-            </a:ext>
-          </a:extLst>
-        </p:spPr>
-        <p:txBody>
-          <a:bodyPr lIns="45719" rIns="45719" anchor="ctr">
+            <a:ext cx="9966961" cy="313392"/>
+          </a:xfrm>
+          <a:prstGeom prst="rect">
+            <a:avLst/>
+          </a:prstGeom>
+          <a:ln w="12700">
+            <a:miter lim="400000"/>
+          </a:ln>
+          <a:extLst>
+            <a:ext uri="{C572A759-6A51-4108-AA02-DFA0A04FC94B}">
+              <ma14:wrappingTextBoxFlag xmlns:ma14="http://schemas.microsoft.com/office/mac/drawingml/2011/main" val="1"/>
+            </a:ext>
+          </a:extLst>
+        </p:spPr>
+        <p:txBody>
+          <a:bodyPr lIns="45718" tIns="45718" rIns="45718" bIns="45718" anchor="ctr">
             <a:spAutoFit/>
           </a:bodyPr>
           <a:lstStyle>
@@ -2118,6 +2193,10 @@
                 <a:solidFill>
                   <a:srgbClr val="0B0B0B"/>
                 </a:solidFill>
+                <a:latin typeface="+mn-lt"/>
+                <a:ea typeface="+mn-ea"/>
+                <a:cs typeface="+mn-cs"/>
+                <a:sym typeface="Arial"/>
               </a:defRPr>
             </a:lvl1pPr>
           </a:lstStyle>
@@ -2138,22 +2217,22 @@
         <p:spPr>
           <a:xfrm>
             <a:off x="1371600" y="3927808"/>
-            <a:ext cx="9966961" cy="264256"/>
-          </a:xfrm>
-          <a:prstGeom prst="rect">
-            <a:avLst/>
-          </a:prstGeom>
-          <a:ln w="12700">
-            <a:miter lim="400000"/>
-          </a:ln>
-          <a:extLst>
-            <a:ext uri="{C572A759-6A51-4108-AA02-DFA0A04FC94B}">
-              <ma14:wrappingTextBoxFlag xmlns:ma14="http://schemas.microsoft.com/office/mac/drawingml/2011/main" val="1"/>
-            </a:ext>
-          </a:extLst>
-        </p:spPr>
-        <p:txBody>
-          <a:bodyPr lIns="45719" rIns="45719" anchor="ctr">
+            <a:ext cx="9966961" cy="264254"/>
+          </a:xfrm>
+          <a:prstGeom prst="rect">
+            <a:avLst/>
+          </a:prstGeom>
+          <a:ln w="12700">
+            <a:miter lim="400000"/>
+          </a:ln>
+          <a:extLst>
+            <a:ext uri="{C572A759-6A51-4108-AA02-DFA0A04FC94B}">
+              <ma14:wrappingTextBoxFlag xmlns:ma14="http://schemas.microsoft.com/office/mac/drawingml/2011/main" val="1"/>
+            </a:ext>
+          </a:extLst>
+        </p:spPr>
+        <p:txBody>
+          <a:bodyPr lIns="45718" tIns="45718" rIns="45718" bIns="45718" anchor="ctr">
             <a:spAutoFit/>
           </a:bodyPr>
           <a:lstStyle>
@@ -2162,6 +2241,10 @@
                 <a:solidFill>
                   <a:srgbClr val="6B6A66"/>
                 </a:solidFill>
+                <a:latin typeface="+mn-lt"/>
+                <a:ea typeface="+mn-ea"/>
+                <a:cs typeface="+mn-cs"/>
+                <a:sym typeface="Arial"/>
               </a:defRPr>
             </a:lvl1pPr>
           </a:lstStyle>
@@ -2182,7 +2265,7 @@
         <p:spPr>
           <a:xfrm>
             <a:off x="640080" y="4443984"/>
-            <a:ext cx="502921" cy="502921"/>
+            <a:ext cx="502923" cy="502923"/>
           </a:xfrm>
           <a:prstGeom prst="ellipse">
             <a:avLst/>
@@ -2195,10 +2278,17 @@
           </a:ln>
         </p:spPr>
         <p:txBody>
-          <a:bodyPr lIns="45719" rIns="45719"/>
+          <a:bodyPr lIns="45718" tIns="45718" rIns="45718" bIns="45718"/>
           <a:lstStyle/>
           <a:p>
-            <a:pPr/>
+            <a:pPr>
+              <a:defRPr>
+                <a:latin typeface="+mn-lt"/>
+                <a:ea typeface="+mn-ea"/>
+                <a:cs typeface="+mn-cs"/>
+                <a:sym typeface="Arial"/>
+              </a:defRPr>
+            </a:pPr>
           </a:p>
         </p:txBody>
       </p:sp>
@@ -2210,23 +2300,23 @@
         </p:nvSpPr>
         <p:spPr>
           <a:xfrm>
-            <a:off x="685800" y="4520112"/>
-            <a:ext cx="411480" cy="350663"/>
-          </a:xfrm>
-          <a:prstGeom prst="rect">
-            <a:avLst/>
-          </a:prstGeom>
-          <a:ln w="12700">
-            <a:miter lim="400000"/>
-          </a:ln>
-          <a:extLst>
-            <a:ext uri="{C572A759-6A51-4108-AA02-DFA0A04FC94B}">
-              <ma14:wrappingTextBoxFlag xmlns:ma14="http://schemas.microsoft.com/office/mac/drawingml/2011/main" val="1"/>
-            </a:ext>
-          </a:extLst>
-        </p:spPr>
-        <p:txBody>
-          <a:bodyPr lIns="45719" rIns="45719" anchor="ctr">
+            <a:off x="685799" y="4520113"/>
+            <a:ext cx="411482" cy="350660"/>
+          </a:xfrm>
+          <a:prstGeom prst="rect">
+            <a:avLst/>
+          </a:prstGeom>
+          <a:ln w="12700">
+            <a:miter lim="400000"/>
+          </a:ln>
+          <a:extLst>
+            <a:ext uri="{C572A759-6A51-4108-AA02-DFA0A04FC94B}">
+              <ma14:wrappingTextBoxFlag xmlns:ma14="http://schemas.microsoft.com/office/mac/drawingml/2011/main" val="1"/>
+            </a:ext>
+          </a:extLst>
+        </p:spPr>
+        <p:txBody>
+          <a:bodyPr lIns="45718" tIns="45718" rIns="45718" bIns="45718" anchor="ctr">
             <a:spAutoFit/>
           </a:bodyPr>
           <a:lstStyle>
@@ -2235,6 +2325,10 @@
                 <a:solidFill>
                   <a:srgbClr val="FFFFFF"/>
                 </a:solidFill>
+                <a:latin typeface="+mn-lt"/>
+                <a:ea typeface="+mn-ea"/>
+                <a:cs typeface="+mn-cs"/>
+                <a:sym typeface="Arial"/>
               </a:defRPr>
             </a:lvl1pPr>
           </a:lstStyle>
@@ -2255,22 +2349,22 @@
         <p:spPr>
           <a:xfrm>
             <a:off x="1371600" y="4424447"/>
-            <a:ext cx="9966961" cy="313394"/>
-          </a:xfrm>
-          <a:prstGeom prst="rect">
-            <a:avLst/>
-          </a:prstGeom>
-          <a:ln w="12700">
-            <a:miter lim="400000"/>
-          </a:ln>
-          <a:extLst>
-            <a:ext uri="{C572A759-6A51-4108-AA02-DFA0A04FC94B}">
-              <ma14:wrappingTextBoxFlag xmlns:ma14="http://schemas.microsoft.com/office/mac/drawingml/2011/main" val="1"/>
-            </a:ext>
-          </a:extLst>
-        </p:spPr>
-        <p:txBody>
-          <a:bodyPr lIns="45719" rIns="45719" anchor="ctr">
+            <a:ext cx="9966961" cy="313392"/>
+          </a:xfrm>
+          <a:prstGeom prst="rect">
+            <a:avLst/>
+          </a:prstGeom>
+          <a:ln w="12700">
+            <a:miter lim="400000"/>
+          </a:ln>
+          <a:extLst>
+            <a:ext uri="{C572A759-6A51-4108-AA02-DFA0A04FC94B}">
+              <ma14:wrappingTextBoxFlag xmlns:ma14="http://schemas.microsoft.com/office/mac/drawingml/2011/main" val="1"/>
+            </a:ext>
+          </a:extLst>
+        </p:spPr>
+        <p:txBody>
+          <a:bodyPr lIns="45718" tIns="45718" rIns="45718" bIns="45718" anchor="ctr">
             <a:spAutoFit/>
           </a:bodyPr>
           <a:lstStyle>
@@ -2279,6 +2373,10 @@
                 <a:solidFill>
                   <a:srgbClr val="0B0B0B"/>
                 </a:solidFill>
+                <a:latin typeface="+mn-lt"/>
+                <a:ea typeface="+mn-ea"/>
+                <a:cs typeface="+mn-cs"/>
+                <a:sym typeface="Arial"/>
               </a:defRPr>
             </a:lvl1pPr>
           </a:lstStyle>
@@ -2299,22 +2397,22 @@
         <p:spPr>
           <a:xfrm>
             <a:off x="1371600" y="4860496"/>
-            <a:ext cx="9966961" cy="264256"/>
-          </a:xfrm>
-          <a:prstGeom prst="rect">
-            <a:avLst/>
-          </a:prstGeom>
-          <a:ln w="12700">
-            <a:miter lim="400000"/>
-          </a:ln>
-          <a:extLst>
-            <a:ext uri="{C572A759-6A51-4108-AA02-DFA0A04FC94B}">
-              <ma14:wrappingTextBoxFlag xmlns:ma14="http://schemas.microsoft.com/office/mac/drawingml/2011/main" val="1"/>
-            </a:ext>
-          </a:extLst>
-        </p:spPr>
-        <p:txBody>
-          <a:bodyPr lIns="45719" rIns="45719" anchor="ctr">
+            <a:ext cx="9966961" cy="264254"/>
+          </a:xfrm>
+          <a:prstGeom prst="rect">
+            <a:avLst/>
+          </a:prstGeom>
+          <a:ln w="12700">
+            <a:miter lim="400000"/>
+          </a:ln>
+          <a:extLst>
+            <a:ext uri="{C572A759-6A51-4108-AA02-DFA0A04FC94B}">
+              <ma14:wrappingTextBoxFlag xmlns:ma14="http://schemas.microsoft.com/office/mac/drawingml/2011/main" val="1"/>
+            </a:ext>
+          </a:extLst>
+        </p:spPr>
+        <p:txBody>
+          <a:bodyPr lIns="45718" tIns="45718" rIns="45718" bIns="45718" anchor="ctr">
             <a:spAutoFit/>
           </a:bodyPr>
           <a:lstStyle>
@@ -2323,6 +2421,10 @@
                 <a:solidFill>
                   <a:srgbClr val="6B6A66"/>
                 </a:solidFill>
+                <a:latin typeface="+mn-lt"/>
+                <a:ea typeface="+mn-ea"/>
+                <a:cs typeface="+mn-cs"/>
+                <a:sym typeface="Arial"/>
               </a:defRPr>
             </a:lvl1pPr>
           </a:lstStyle>
@@ -2343,7 +2445,7 @@
         <p:spPr>
           <a:xfrm>
             <a:off x="640080" y="5376671"/>
-            <a:ext cx="502921" cy="502921"/>
+            <a:ext cx="502923" cy="502923"/>
           </a:xfrm>
           <a:prstGeom prst="ellipse">
             <a:avLst/>
@@ -2356,10 +2458,17 @@
           </a:ln>
         </p:spPr>
         <p:txBody>
-          <a:bodyPr lIns="45719" rIns="45719"/>
+          <a:bodyPr lIns="45718" tIns="45718" rIns="45718" bIns="45718"/>
           <a:lstStyle/>
           <a:p>
-            <a:pPr/>
+            <a:pPr>
+              <a:defRPr>
+                <a:latin typeface="+mn-lt"/>
+                <a:ea typeface="+mn-ea"/>
+                <a:cs typeface="+mn-cs"/>
+                <a:sym typeface="Arial"/>
+              </a:defRPr>
+            </a:pPr>
           </a:p>
         </p:txBody>
       </p:sp>
@@ -2371,23 +2480,23 @@
         </p:nvSpPr>
         <p:spPr>
           <a:xfrm>
-            <a:off x="685800" y="5452800"/>
-            <a:ext cx="411480" cy="350663"/>
-          </a:xfrm>
-          <a:prstGeom prst="rect">
-            <a:avLst/>
-          </a:prstGeom>
-          <a:ln w="12700">
-            <a:miter lim="400000"/>
-          </a:ln>
-          <a:extLst>
-            <a:ext uri="{C572A759-6A51-4108-AA02-DFA0A04FC94B}">
-              <ma14:wrappingTextBoxFlag xmlns:ma14="http://schemas.microsoft.com/office/mac/drawingml/2011/main" val="1"/>
-            </a:ext>
-          </a:extLst>
-        </p:spPr>
-        <p:txBody>
-          <a:bodyPr lIns="45719" rIns="45719" anchor="ctr">
+            <a:off x="685799" y="5452801"/>
+            <a:ext cx="411482" cy="350660"/>
+          </a:xfrm>
+          <a:prstGeom prst="rect">
+            <a:avLst/>
+          </a:prstGeom>
+          <a:ln w="12700">
+            <a:miter lim="400000"/>
+          </a:ln>
+          <a:extLst>
+            <a:ext uri="{C572A759-6A51-4108-AA02-DFA0A04FC94B}">
+              <ma14:wrappingTextBoxFlag xmlns:ma14="http://schemas.microsoft.com/office/mac/drawingml/2011/main" val="1"/>
+            </a:ext>
+          </a:extLst>
+        </p:spPr>
+        <p:txBody>
+          <a:bodyPr lIns="45718" tIns="45718" rIns="45718" bIns="45718" anchor="ctr">
             <a:spAutoFit/>
           </a:bodyPr>
           <a:lstStyle>
@@ -2396,6 +2505,10 @@
                 <a:solidFill>
                   <a:srgbClr val="FFFFFF"/>
                 </a:solidFill>
+                <a:latin typeface="+mn-lt"/>
+                <a:ea typeface="+mn-ea"/>
+                <a:cs typeface="+mn-cs"/>
+                <a:sym typeface="Arial"/>
               </a:defRPr>
             </a:lvl1pPr>
           </a:lstStyle>
@@ -2415,23 +2528,23 @@
         </p:nvSpPr>
         <p:spPr>
           <a:xfrm>
-            <a:off x="1371600" y="5357135"/>
-            <a:ext cx="9966961" cy="313394"/>
-          </a:xfrm>
-          <a:prstGeom prst="rect">
-            <a:avLst/>
-          </a:prstGeom>
-          <a:ln w="12700">
-            <a:miter lim="400000"/>
-          </a:ln>
-          <a:extLst>
-            <a:ext uri="{C572A759-6A51-4108-AA02-DFA0A04FC94B}">
-              <ma14:wrappingTextBoxFlag xmlns:ma14="http://schemas.microsoft.com/office/mac/drawingml/2011/main" val="1"/>
-            </a:ext>
-          </a:extLst>
-        </p:spPr>
-        <p:txBody>
-          <a:bodyPr lIns="45719" rIns="45719" anchor="ctr">
+            <a:off x="1371600" y="5357136"/>
+            <a:ext cx="9966961" cy="313391"/>
+          </a:xfrm>
+          <a:prstGeom prst="rect">
+            <a:avLst/>
+          </a:prstGeom>
+          <a:ln w="12700">
+            <a:miter lim="400000"/>
+          </a:ln>
+          <a:extLst>
+            <a:ext uri="{C572A759-6A51-4108-AA02-DFA0A04FC94B}">
+              <ma14:wrappingTextBoxFlag xmlns:ma14="http://schemas.microsoft.com/office/mac/drawingml/2011/main" val="1"/>
+            </a:ext>
+          </a:extLst>
+        </p:spPr>
+        <p:txBody>
+          <a:bodyPr lIns="45718" tIns="45718" rIns="45718" bIns="45718" anchor="ctr">
             <a:spAutoFit/>
           </a:bodyPr>
           <a:lstStyle>
@@ -2440,6 +2553,10 @@
                 <a:solidFill>
                   <a:srgbClr val="0B0B0B"/>
                 </a:solidFill>
+                <a:latin typeface="+mn-lt"/>
+                <a:ea typeface="+mn-ea"/>
+                <a:cs typeface="+mn-cs"/>
+                <a:sym typeface="Arial"/>
               </a:defRPr>
             </a:lvl1pPr>
           </a:lstStyle>
@@ -2460,22 +2577,22 @@
         <p:spPr>
           <a:xfrm>
             <a:off x="1371600" y="5793184"/>
-            <a:ext cx="9966961" cy="264256"/>
-          </a:xfrm>
-          <a:prstGeom prst="rect">
-            <a:avLst/>
-          </a:prstGeom>
-          <a:ln w="12700">
-            <a:miter lim="400000"/>
-          </a:ln>
-          <a:extLst>
-            <a:ext uri="{C572A759-6A51-4108-AA02-DFA0A04FC94B}">
-              <ma14:wrappingTextBoxFlag xmlns:ma14="http://schemas.microsoft.com/office/mac/drawingml/2011/main" val="1"/>
-            </a:ext>
-          </a:extLst>
-        </p:spPr>
-        <p:txBody>
-          <a:bodyPr lIns="45719" rIns="45719" anchor="ctr">
+            <a:ext cx="9966961" cy="264254"/>
+          </a:xfrm>
+          <a:prstGeom prst="rect">
+            <a:avLst/>
+          </a:prstGeom>
+          <a:ln w="12700">
+            <a:miter lim="400000"/>
+          </a:ln>
+          <a:extLst>
+            <a:ext uri="{C572A759-6A51-4108-AA02-DFA0A04FC94B}">
+              <ma14:wrappingTextBoxFlag xmlns:ma14="http://schemas.microsoft.com/office/mac/drawingml/2011/main" val="1"/>
+            </a:ext>
+          </a:extLst>
+        </p:spPr>
+        <p:txBody>
+          <a:bodyPr lIns="45718" tIns="45718" rIns="45718" bIns="45718" anchor="ctr">
             <a:spAutoFit/>
           </a:bodyPr>
           <a:lstStyle>
@@ -2484,6 +2601,10 @@
                 <a:solidFill>
                   <a:srgbClr val="6B6A66"/>
                 </a:solidFill>
+                <a:latin typeface="+mn-lt"/>
+                <a:ea typeface="+mn-ea"/>
+                <a:cs typeface="+mn-cs"/>
+                <a:sym typeface="Arial"/>
               </a:defRPr>
             </a:lvl1pPr>
           </a:lstStyle>
@@ -2503,23 +2624,23 @@
         </p:nvSpPr>
         <p:spPr>
           <a:xfrm>
-            <a:off x="685800" y="6378747"/>
-            <a:ext cx="10424161" cy="226986"/>
-          </a:xfrm>
-          <a:prstGeom prst="rect">
-            <a:avLst/>
-          </a:prstGeom>
-          <a:ln w="12700">
-            <a:miter lim="400000"/>
-          </a:ln>
-          <a:extLst>
-            <a:ext uri="{C572A759-6A51-4108-AA02-DFA0A04FC94B}">
-              <ma14:wrappingTextBoxFlag xmlns:ma14="http://schemas.microsoft.com/office/mac/drawingml/2011/main" val="1"/>
-            </a:ext>
-          </a:extLst>
-        </p:spPr>
-        <p:txBody>
-          <a:bodyPr lIns="45719" rIns="45719" anchor="ctr">
+            <a:off x="685800" y="6131860"/>
+            <a:ext cx="10424161" cy="226984"/>
+          </a:xfrm>
+          <a:prstGeom prst="rect">
+            <a:avLst/>
+          </a:prstGeom>
+          <a:ln w="12700">
+            <a:miter lim="400000"/>
+          </a:ln>
+          <a:extLst>
+            <a:ext uri="{C572A759-6A51-4108-AA02-DFA0A04FC94B}">
+              <ma14:wrappingTextBoxFlag xmlns:ma14="http://schemas.microsoft.com/office/mac/drawingml/2011/main" val="1"/>
+            </a:ext>
+          </a:extLst>
+        </p:spPr>
+        <p:txBody>
+          <a:bodyPr lIns="45718" tIns="45718" rIns="45718" bIns="45718" anchor="ctr">
             <a:spAutoFit/>
           </a:bodyPr>
           <a:lstStyle>
@@ -2528,6 +2649,10 @@
                 <a:solidFill>
                   <a:srgbClr val="6B6A66"/>
                 </a:solidFill>
+                <a:latin typeface="+mn-lt"/>
+                <a:ea typeface="+mn-ea"/>
+                <a:cs typeface="+mn-cs"/>
+                <a:sym typeface="Arial"/>
               </a:defRPr>
             </a:lvl1pPr>
           </a:lstStyle>
@@ -2547,23 +2672,23 @@
         </p:nvSpPr>
         <p:spPr>
           <a:xfrm>
-            <a:off x="671588" y="6524705"/>
-            <a:ext cx="5394961" cy="214701"/>
-          </a:xfrm>
-          <a:prstGeom prst="rect">
-            <a:avLst/>
-          </a:prstGeom>
-          <a:ln w="12700">
-            <a:miter lim="400000"/>
-          </a:ln>
-          <a:extLst>
-            <a:ext uri="{C572A759-6A51-4108-AA02-DFA0A04FC94B}">
-              <ma14:wrappingTextBoxFlag xmlns:ma14="http://schemas.microsoft.com/office/mac/drawingml/2011/main" val="1"/>
-            </a:ext>
-          </a:extLst>
-        </p:spPr>
-        <p:txBody>
-          <a:bodyPr lIns="45719" rIns="45719" anchor="ctr">
+            <a:off x="671587" y="6524705"/>
+            <a:ext cx="5394962" cy="214700"/>
+          </a:xfrm>
+          <a:prstGeom prst="rect">
+            <a:avLst/>
+          </a:prstGeom>
+          <a:ln w="12700">
+            <a:miter lim="400000"/>
+          </a:ln>
+          <a:extLst>
+            <a:ext uri="{C572A759-6A51-4108-AA02-DFA0A04FC94B}">
+              <ma14:wrappingTextBoxFlag xmlns:ma14="http://schemas.microsoft.com/office/mac/drawingml/2011/main" val="1"/>
+            </a:ext>
+          </a:extLst>
+        </p:spPr>
+        <p:txBody>
+          <a:bodyPr lIns="45718" tIns="45718" rIns="45718" bIns="45718" anchor="ctr">
             <a:spAutoFit/>
           </a:bodyPr>
           <a:lstStyle>
@@ -2572,6 +2697,10 @@
                 <a:solidFill>
                   <a:srgbClr val="6B6A66"/>
                 </a:solidFill>
+                <a:latin typeface="+mn-lt"/>
+                <a:ea typeface="+mn-ea"/>
+                <a:cs typeface="+mn-cs"/>
+                <a:sym typeface="Arial"/>
               </a:defRPr>
             </a:lvl1pPr>
           </a:lstStyle>
@@ -2591,23 +2720,23 @@
         </p:nvSpPr>
         <p:spPr>
           <a:xfrm>
-            <a:off x="11201400" y="6448897"/>
-            <a:ext cx="457201" cy="214702"/>
-          </a:xfrm>
-          <a:prstGeom prst="rect">
-            <a:avLst/>
-          </a:prstGeom>
-          <a:ln w="12700">
-            <a:miter lim="400000"/>
-          </a:ln>
-          <a:extLst>
-            <a:ext uri="{C572A759-6A51-4108-AA02-DFA0A04FC94B}">
-              <ma14:wrappingTextBoxFlag xmlns:ma14="http://schemas.microsoft.com/office/mac/drawingml/2011/main" val="1"/>
-            </a:ext>
-          </a:extLst>
-        </p:spPr>
-        <p:txBody>
-          <a:bodyPr lIns="45719" rIns="45719" anchor="ctr">
+            <a:off x="11201399" y="6448898"/>
+            <a:ext cx="457203" cy="214699"/>
+          </a:xfrm>
+          <a:prstGeom prst="rect">
+            <a:avLst/>
+          </a:prstGeom>
+          <a:ln w="12700">
+            <a:miter lim="400000"/>
+          </a:ln>
+          <a:extLst>
+            <a:ext uri="{C572A759-6A51-4108-AA02-DFA0A04FC94B}">
+              <ma14:wrappingTextBoxFlag xmlns:ma14="http://schemas.microsoft.com/office/mac/drawingml/2011/main" val="1"/>
+            </a:ext>
+          </a:extLst>
+        </p:spPr>
+        <p:txBody>
+          <a:bodyPr lIns="45718" tIns="45718" rIns="45718" bIns="45718" anchor="ctr">
             <a:spAutoFit/>
           </a:bodyPr>
           <a:lstStyle>
@@ -2616,6 +2745,10 @@
                 <a:solidFill>
                   <a:srgbClr val="6B6A66"/>
                 </a:solidFill>
+                <a:latin typeface="+mn-lt"/>
+                <a:ea typeface="+mn-ea"/>
+                <a:cs typeface="+mn-cs"/>
+                <a:sym typeface="Arial"/>
               </a:defRPr>
             </a:lvl1pPr>
           </a:lstStyle>
@@ -2662,22 +2795,22 @@
         <p:spPr>
           <a:xfrm>
             <a:off x="685800" y="507952"/>
-            <a:ext cx="10881361" cy="264256"/>
-          </a:xfrm>
-          <a:prstGeom prst="rect">
-            <a:avLst/>
-          </a:prstGeom>
-          <a:ln w="12700">
-            <a:miter lim="400000"/>
-          </a:ln>
-          <a:extLst>
-            <a:ext uri="{C572A759-6A51-4108-AA02-DFA0A04FC94B}">
-              <ma14:wrappingTextBoxFlag xmlns:ma14="http://schemas.microsoft.com/office/mac/drawingml/2011/main" val="1"/>
-            </a:ext>
-          </a:extLst>
-        </p:spPr>
-        <p:txBody>
-          <a:bodyPr lIns="45719" rIns="45719" anchor="ctr">
+            <a:ext cx="10881361" cy="264254"/>
+          </a:xfrm>
+          <a:prstGeom prst="rect">
+            <a:avLst/>
+          </a:prstGeom>
+          <a:ln w="12700">
+            <a:miter lim="400000"/>
+          </a:ln>
+          <a:extLst>
+            <a:ext uri="{C572A759-6A51-4108-AA02-DFA0A04FC94B}">
+              <ma14:wrappingTextBoxFlag xmlns:ma14="http://schemas.microsoft.com/office/mac/drawingml/2011/main" val="1"/>
+            </a:ext>
+          </a:extLst>
+        </p:spPr>
+        <p:txBody>
+          <a:bodyPr lIns="45718" tIns="45718" rIns="45718" bIns="45718" anchor="ctr">
             <a:spAutoFit/>
           </a:bodyPr>
           <a:lstStyle>
@@ -2686,6 +2819,10 @@
                 <a:solidFill>
                   <a:srgbClr val="2A78D6"/>
                 </a:solidFill>
+                <a:latin typeface="+mn-lt"/>
+                <a:ea typeface="+mn-ea"/>
+                <a:cs typeface="+mn-cs"/>
+                <a:sym typeface="Arial"/>
               </a:defRPr>
             </a:lvl1pPr>
           </a:lstStyle>
@@ -2705,23 +2842,23 @@
         </p:nvSpPr>
         <p:spPr>
           <a:xfrm>
-            <a:off x="685800" y="945616"/>
-            <a:ext cx="10881361" cy="486208"/>
-          </a:xfrm>
-          <a:prstGeom prst="rect">
-            <a:avLst/>
-          </a:prstGeom>
-          <a:ln w="12700">
-            <a:miter lim="400000"/>
-          </a:ln>
-          <a:extLst>
-            <a:ext uri="{C572A759-6A51-4108-AA02-DFA0A04FC94B}">
-              <ma14:wrappingTextBoxFlag xmlns:ma14="http://schemas.microsoft.com/office/mac/drawingml/2011/main" val="1"/>
-            </a:ext>
-          </a:extLst>
-        </p:spPr>
-        <p:txBody>
-          <a:bodyPr lIns="45719" rIns="45719" anchor="ctr">
+            <a:off x="685800" y="945617"/>
+            <a:ext cx="10881361" cy="486205"/>
+          </a:xfrm>
+          <a:prstGeom prst="rect">
+            <a:avLst/>
+          </a:prstGeom>
+          <a:ln w="12700">
+            <a:miter lim="400000"/>
+          </a:ln>
+          <a:extLst>
+            <a:ext uri="{C572A759-6A51-4108-AA02-DFA0A04FC94B}">
+              <ma14:wrappingTextBoxFlag xmlns:ma14="http://schemas.microsoft.com/office/mac/drawingml/2011/main" val="1"/>
+            </a:ext>
+          </a:extLst>
+        </p:spPr>
+        <p:txBody>
+          <a:bodyPr lIns="45718" tIns="45718" rIns="45718" bIns="45718" anchor="ctr">
             <a:spAutoFit/>
           </a:bodyPr>
           <a:lstStyle>
@@ -2730,6 +2867,10 @@
                 <a:solidFill>
                   <a:srgbClr val="0B0B0B"/>
                 </a:solidFill>
+                <a:latin typeface="+mn-lt"/>
+                <a:ea typeface="+mn-ea"/>
+                <a:cs typeface="+mn-cs"/>
+                <a:sym typeface="Arial"/>
               </a:defRPr>
             </a:lvl1pPr>
           </a:lstStyle>
@@ -2750,7 +2891,7 @@
         <p:spPr>
           <a:xfrm>
             <a:off x="640080" y="1828800"/>
-            <a:ext cx="3429001" cy="3017521"/>
+            <a:ext cx="3429002" cy="3017522"/>
           </a:xfrm>
           <a:prstGeom prst="roundRect">
             <a:avLst>
@@ -2767,10 +2908,17 @@
           </a:ln>
         </p:spPr>
         <p:txBody>
-          <a:bodyPr lIns="45719" rIns="45719"/>
+          <a:bodyPr lIns="45718" tIns="45718" rIns="45718" bIns="45718"/>
           <a:lstStyle/>
           <a:p>
-            <a:pPr/>
+            <a:pPr>
+              <a:defRPr>
+                <a:latin typeface="+mn-lt"/>
+                <a:ea typeface="+mn-ea"/>
+                <a:cs typeface="+mn-cs"/>
+                <a:sym typeface="Arial"/>
+              </a:defRPr>
+            </a:pPr>
           </a:p>
         </p:txBody>
       </p:sp>
@@ -2782,23 +2930,23 @@
         </p:nvSpPr>
         <p:spPr>
           <a:xfrm>
-            <a:off x="960119" y="2150247"/>
-            <a:ext cx="2834642" cy="362947"/>
-          </a:xfrm>
-          <a:prstGeom prst="rect">
-            <a:avLst/>
-          </a:prstGeom>
-          <a:ln w="12700">
-            <a:miter lim="400000"/>
-          </a:ln>
-          <a:extLst>
-            <a:ext uri="{C572A759-6A51-4108-AA02-DFA0A04FC94B}">
-              <ma14:wrappingTextBoxFlag xmlns:ma14="http://schemas.microsoft.com/office/mac/drawingml/2011/main" val="1"/>
-            </a:ext>
-          </a:extLst>
-        </p:spPr>
-        <p:txBody>
-          <a:bodyPr lIns="45719" rIns="45719" anchor="ctr">
+            <a:off x="960118" y="2150248"/>
+            <a:ext cx="2834644" cy="362944"/>
+          </a:xfrm>
+          <a:prstGeom prst="rect">
+            <a:avLst/>
+          </a:prstGeom>
+          <a:ln w="12700">
+            <a:miter lim="400000"/>
+          </a:ln>
+          <a:extLst>
+            <a:ext uri="{C572A759-6A51-4108-AA02-DFA0A04FC94B}">
+              <ma14:wrappingTextBoxFlag xmlns:ma14="http://schemas.microsoft.com/office/mac/drawingml/2011/main" val="1"/>
+            </a:ext>
+          </a:extLst>
+        </p:spPr>
+        <p:txBody>
+          <a:bodyPr lIns="45718" tIns="45718" rIns="45718" bIns="45718" anchor="ctr">
             <a:spAutoFit/>
           </a:bodyPr>
           <a:lstStyle>
@@ -2807,6 +2955,10 @@
                 <a:solidFill>
                   <a:srgbClr val="2A78D6"/>
                 </a:solidFill>
+                <a:latin typeface="+mn-lt"/>
+                <a:ea typeface="+mn-ea"/>
+                <a:cs typeface="+mn-cs"/>
+                <a:sym typeface="Arial"/>
               </a:defRPr>
             </a:lvl1pPr>
           </a:lstStyle>
@@ -2826,23 +2978,23 @@
         </p:nvSpPr>
         <p:spPr>
           <a:xfrm>
-            <a:off x="960119" y="3208387"/>
-            <a:ext cx="2834642" cy="898425"/>
-          </a:xfrm>
-          <a:prstGeom prst="rect">
-            <a:avLst/>
-          </a:prstGeom>
-          <a:ln w="12700">
-            <a:miter lim="400000"/>
-          </a:ln>
-          <a:extLst>
-            <a:ext uri="{C572A759-6A51-4108-AA02-DFA0A04FC94B}">
-              <ma14:wrappingTextBoxFlag xmlns:ma14="http://schemas.microsoft.com/office/mac/drawingml/2011/main" val="1"/>
-            </a:ext>
-          </a:extLst>
-        </p:spPr>
-        <p:txBody>
-          <a:bodyPr lIns="45719" rIns="45719" anchor="ctr">
+            <a:off x="960118" y="3208387"/>
+            <a:ext cx="2834644" cy="898423"/>
+          </a:xfrm>
+          <a:prstGeom prst="rect">
+            <a:avLst/>
+          </a:prstGeom>
+          <a:ln w="12700">
+            <a:miter lim="400000"/>
+          </a:ln>
+          <a:extLst>
+            <a:ext uri="{C572A759-6A51-4108-AA02-DFA0A04FC94B}">
+              <ma14:wrappingTextBoxFlag xmlns:ma14="http://schemas.microsoft.com/office/mac/drawingml/2011/main" val="1"/>
+            </a:ext>
+          </a:extLst>
+        </p:spPr>
+        <p:txBody>
+          <a:bodyPr lIns="45718" tIns="45718" rIns="45718" bIns="45718" anchor="ctr">
             <a:spAutoFit/>
           </a:bodyPr>
           <a:lstStyle>
@@ -2851,6 +3003,10 @@
                 <a:solidFill>
                   <a:srgbClr val="6B6A66"/>
                 </a:solidFill>
+                <a:latin typeface="+mn-lt"/>
+                <a:ea typeface="+mn-ea"/>
+                <a:cs typeface="+mn-cs"/>
+                <a:sym typeface="Arial"/>
               </a:defRPr>
             </a:lvl1pPr>
           </a:lstStyle>
@@ -2871,7 +3027,7 @@
         <p:spPr>
           <a:xfrm>
             <a:off x="4343400" y="1828800"/>
-            <a:ext cx="3429000" cy="3017521"/>
+            <a:ext cx="3429000" cy="3017522"/>
           </a:xfrm>
           <a:prstGeom prst="roundRect">
             <a:avLst>
@@ -2888,10 +3044,17 @@
           </a:ln>
         </p:spPr>
         <p:txBody>
-          <a:bodyPr lIns="45719" rIns="45719"/>
+          <a:bodyPr lIns="45718" tIns="45718" rIns="45718" bIns="45718"/>
           <a:lstStyle/>
           <a:p>
-            <a:pPr/>
+            <a:pPr>
+              <a:defRPr>
+                <a:latin typeface="+mn-lt"/>
+                <a:ea typeface="+mn-ea"/>
+                <a:cs typeface="+mn-cs"/>
+                <a:sym typeface="Arial"/>
+              </a:defRPr>
+            </a:pPr>
           </a:p>
         </p:txBody>
       </p:sp>
@@ -2903,23 +3066,23 @@
         </p:nvSpPr>
         <p:spPr>
           <a:xfrm>
-            <a:off x="4663440" y="2150247"/>
-            <a:ext cx="2834641" cy="362947"/>
-          </a:xfrm>
-          <a:prstGeom prst="rect">
-            <a:avLst/>
-          </a:prstGeom>
-          <a:ln w="12700">
-            <a:miter lim="400000"/>
-          </a:ln>
-          <a:extLst>
-            <a:ext uri="{C572A759-6A51-4108-AA02-DFA0A04FC94B}">
-              <ma14:wrappingTextBoxFlag xmlns:ma14="http://schemas.microsoft.com/office/mac/drawingml/2011/main" val="1"/>
-            </a:ext>
-          </a:extLst>
-        </p:spPr>
-        <p:txBody>
-          <a:bodyPr lIns="45719" rIns="45719" anchor="ctr">
+            <a:off x="4663440" y="2150248"/>
+            <a:ext cx="2834642" cy="362944"/>
+          </a:xfrm>
+          <a:prstGeom prst="rect">
+            <a:avLst/>
+          </a:prstGeom>
+          <a:ln w="12700">
+            <a:miter lim="400000"/>
+          </a:ln>
+          <a:extLst>
+            <a:ext uri="{C572A759-6A51-4108-AA02-DFA0A04FC94B}">
+              <ma14:wrappingTextBoxFlag xmlns:ma14="http://schemas.microsoft.com/office/mac/drawingml/2011/main" val="1"/>
+            </a:ext>
+          </a:extLst>
+        </p:spPr>
+        <p:txBody>
+          <a:bodyPr lIns="45718" tIns="45718" rIns="45718" bIns="45718" anchor="ctr">
             <a:spAutoFit/>
           </a:bodyPr>
           <a:lstStyle>
@@ -2928,6 +3091,10 @@
                 <a:solidFill>
                   <a:srgbClr val="1BAF7A"/>
                 </a:solidFill>
+                <a:latin typeface="+mn-lt"/>
+                <a:ea typeface="+mn-ea"/>
+                <a:cs typeface="+mn-cs"/>
+                <a:sym typeface="Arial"/>
               </a:defRPr>
             </a:lvl1pPr>
           </a:lstStyle>
@@ -2948,22 +3115,22 @@
         <p:spPr>
           <a:xfrm>
             <a:off x="4663440" y="3106787"/>
-            <a:ext cx="2834641" cy="1101625"/>
-          </a:xfrm>
-          <a:prstGeom prst="rect">
-            <a:avLst/>
-          </a:prstGeom>
-          <a:ln w="12700">
-            <a:miter lim="400000"/>
-          </a:ln>
-          <a:extLst>
-            <a:ext uri="{C572A759-6A51-4108-AA02-DFA0A04FC94B}">
-              <ma14:wrappingTextBoxFlag xmlns:ma14="http://schemas.microsoft.com/office/mac/drawingml/2011/main" val="1"/>
-            </a:ext>
-          </a:extLst>
-        </p:spPr>
-        <p:txBody>
-          <a:bodyPr lIns="45719" rIns="45719" anchor="ctr">
+            <a:ext cx="2834642" cy="1101623"/>
+          </a:xfrm>
+          <a:prstGeom prst="rect">
+            <a:avLst/>
+          </a:prstGeom>
+          <a:ln w="12700">
+            <a:miter lim="400000"/>
+          </a:ln>
+          <a:extLst>
+            <a:ext uri="{C572A759-6A51-4108-AA02-DFA0A04FC94B}">
+              <ma14:wrappingTextBoxFlag xmlns:ma14="http://schemas.microsoft.com/office/mac/drawingml/2011/main" val="1"/>
+            </a:ext>
+          </a:extLst>
+        </p:spPr>
+        <p:txBody>
+          <a:bodyPr lIns="45718" tIns="45718" rIns="45718" bIns="45718" anchor="ctr">
             <a:spAutoFit/>
           </a:bodyPr>
           <a:lstStyle>
@@ -2972,6 +3139,10 @@
                 <a:solidFill>
                   <a:srgbClr val="6B6A66"/>
                 </a:solidFill>
+                <a:latin typeface="+mn-lt"/>
+                <a:ea typeface="+mn-ea"/>
+                <a:cs typeface="+mn-cs"/>
+                <a:sym typeface="Arial"/>
               </a:defRPr>
             </a:lvl1pPr>
           </a:lstStyle>
@@ -2991,8 +3162,8 @@
         </p:nvSpPr>
         <p:spPr>
           <a:xfrm>
-            <a:off x="8046719" y="1828800"/>
-            <a:ext cx="3429001" cy="3017521"/>
+            <a:off x="8046718" y="1828800"/>
+            <a:ext cx="3429003" cy="3017522"/>
           </a:xfrm>
           <a:prstGeom prst="roundRect">
             <a:avLst>
@@ -3009,10 +3180,17 @@
           </a:ln>
         </p:spPr>
         <p:txBody>
-          <a:bodyPr lIns="45719" rIns="45719"/>
+          <a:bodyPr lIns="45718" tIns="45718" rIns="45718" bIns="45718"/>
           <a:lstStyle/>
           <a:p>
-            <a:pPr/>
+            <a:pPr>
+              <a:defRPr>
+                <a:latin typeface="+mn-lt"/>
+                <a:ea typeface="+mn-ea"/>
+                <a:cs typeface="+mn-cs"/>
+                <a:sym typeface="Arial"/>
+              </a:defRPr>
+            </a:pPr>
           </a:p>
         </p:txBody>
       </p:sp>
@@ -3024,23 +3202,23 @@
         </p:nvSpPr>
         <p:spPr>
           <a:xfrm>
-            <a:off x="8366760" y="2150247"/>
-            <a:ext cx="2834641" cy="362947"/>
-          </a:xfrm>
-          <a:prstGeom prst="rect">
-            <a:avLst/>
-          </a:prstGeom>
-          <a:ln w="12700">
-            <a:miter lim="400000"/>
-          </a:ln>
-          <a:extLst>
-            <a:ext uri="{C572A759-6A51-4108-AA02-DFA0A04FC94B}">
-              <ma14:wrappingTextBoxFlag xmlns:ma14="http://schemas.microsoft.com/office/mac/drawingml/2011/main" val="1"/>
-            </a:ext>
-          </a:extLst>
-        </p:spPr>
-        <p:txBody>
-          <a:bodyPr lIns="45719" rIns="45719" anchor="ctr">
+            <a:off x="8366759" y="2150248"/>
+            <a:ext cx="2834642" cy="362944"/>
+          </a:xfrm>
+          <a:prstGeom prst="rect">
+            <a:avLst/>
+          </a:prstGeom>
+          <a:ln w="12700">
+            <a:miter lim="400000"/>
+          </a:ln>
+          <a:extLst>
+            <a:ext uri="{C572A759-6A51-4108-AA02-DFA0A04FC94B}">
+              <ma14:wrappingTextBoxFlag xmlns:ma14="http://schemas.microsoft.com/office/mac/drawingml/2011/main" val="1"/>
+            </a:ext>
+          </a:extLst>
+        </p:spPr>
+        <p:txBody>
+          <a:bodyPr lIns="45718" tIns="45718" rIns="45718" bIns="45718" anchor="ctr">
             <a:spAutoFit/>
           </a:bodyPr>
           <a:lstStyle>
@@ -3049,6 +3227,10 @@
                 <a:solidFill>
                   <a:srgbClr val="EB6834"/>
                 </a:solidFill>
+                <a:latin typeface="+mn-lt"/>
+                <a:ea typeface="+mn-ea"/>
+                <a:cs typeface="+mn-cs"/>
+                <a:sym typeface="Arial"/>
               </a:defRPr>
             </a:lvl1pPr>
           </a:lstStyle>
@@ -3068,23 +3250,23 @@
         </p:nvSpPr>
         <p:spPr>
           <a:xfrm>
-            <a:off x="8366760" y="3208387"/>
-            <a:ext cx="2834641" cy="898425"/>
-          </a:xfrm>
-          <a:prstGeom prst="rect">
-            <a:avLst/>
-          </a:prstGeom>
-          <a:ln w="12700">
-            <a:miter lim="400000"/>
-          </a:ln>
-          <a:extLst>
-            <a:ext uri="{C572A759-6A51-4108-AA02-DFA0A04FC94B}">
-              <ma14:wrappingTextBoxFlag xmlns:ma14="http://schemas.microsoft.com/office/mac/drawingml/2011/main" val="1"/>
-            </a:ext>
-          </a:extLst>
-        </p:spPr>
-        <p:txBody>
-          <a:bodyPr lIns="45719" rIns="45719" anchor="ctr">
+            <a:off x="8366759" y="3005188"/>
+            <a:ext cx="2834642" cy="1304823"/>
+          </a:xfrm>
+          <a:prstGeom prst="rect">
+            <a:avLst/>
+          </a:prstGeom>
+          <a:ln w="12700">
+            <a:miter lim="400000"/>
+          </a:ln>
+          <a:extLst>
+            <a:ext uri="{C572A759-6A51-4108-AA02-DFA0A04FC94B}">
+              <ma14:wrappingTextBoxFlag xmlns:ma14="http://schemas.microsoft.com/office/mac/drawingml/2011/main" val="1"/>
+            </a:ext>
+          </a:extLst>
+        </p:spPr>
+        <p:txBody>
+          <a:bodyPr lIns="45718" tIns="45718" rIns="45718" bIns="45718" anchor="ctr">
             <a:spAutoFit/>
           </a:bodyPr>
           <a:lstStyle>
@@ -3093,13 +3275,17 @@
                 <a:solidFill>
                   <a:srgbClr val="6B6A66"/>
                 </a:solidFill>
-              </a:defRPr>
-            </a:lvl1pPr>
-          </a:lstStyle>
-          <a:p>
-            <a:pPr/>
-            <a:r>
-              <a:t>Blockchain consent and audit layer for cross-border data. Flutter offline-first field app. Climate and mobility data for nowcasting.</a:t>
+                <a:latin typeface="+mn-lt"/>
+                <a:ea typeface="+mn-ea"/>
+                <a:cs typeface="+mn-cs"/>
+                <a:sym typeface="Arial"/>
+              </a:defRPr>
+            </a:lvl1pPr>
+          </a:lstStyle>
+          <a:p>
+            <a:pPr/>
+            <a:r>
+              <a:t>Blockchain consent and audit layer for cross-border data. Flutter offline-first field app. Mobility and soil data for nowcasting. Climate (NASA POWER) already integrated.</a:t>
             </a:r>
           </a:p>
         </p:txBody>
@@ -3112,23 +3298,23 @@
         </p:nvSpPr>
         <p:spPr>
           <a:xfrm>
-            <a:off x="685800" y="6448897"/>
-            <a:ext cx="5394961" cy="214702"/>
-          </a:xfrm>
-          <a:prstGeom prst="rect">
-            <a:avLst/>
-          </a:prstGeom>
-          <a:ln w="12700">
-            <a:miter lim="400000"/>
-          </a:ln>
-          <a:extLst>
-            <a:ext uri="{C572A759-6A51-4108-AA02-DFA0A04FC94B}">
-              <ma14:wrappingTextBoxFlag xmlns:ma14="http://schemas.microsoft.com/office/mac/drawingml/2011/main" val="1"/>
-            </a:ext>
-          </a:extLst>
-        </p:spPr>
-        <p:txBody>
-          <a:bodyPr lIns="45719" rIns="45719" anchor="ctr">
+            <a:off x="685799" y="6448898"/>
+            <a:ext cx="5394963" cy="214699"/>
+          </a:xfrm>
+          <a:prstGeom prst="rect">
+            <a:avLst/>
+          </a:prstGeom>
+          <a:ln w="12700">
+            <a:miter lim="400000"/>
+          </a:ln>
+          <a:extLst>
+            <a:ext uri="{C572A759-6A51-4108-AA02-DFA0A04FC94B}">
+              <ma14:wrappingTextBoxFlag xmlns:ma14="http://schemas.microsoft.com/office/mac/drawingml/2011/main" val="1"/>
+            </a:ext>
+          </a:extLst>
+        </p:spPr>
+        <p:txBody>
+          <a:bodyPr lIns="45718" tIns="45718" rIns="45718" bIns="45718" anchor="ctr">
             <a:spAutoFit/>
           </a:bodyPr>
           <a:lstStyle>
@@ -3137,6 +3323,10 @@
                 <a:solidFill>
                   <a:srgbClr val="6B6A66"/>
                 </a:solidFill>
+                <a:latin typeface="+mn-lt"/>
+                <a:ea typeface="+mn-ea"/>
+                <a:cs typeface="+mn-cs"/>
+                <a:sym typeface="Arial"/>
               </a:defRPr>
             </a:lvl1pPr>
           </a:lstStyle>
@@ -3156,23 +3346,23 @@
         </p:nvSpPr>
         <p:spPr>
           <a:xfrm>
-            <a:off x="11201400" y="6448897"/>
-            <a:ext cx="457201" cy="214702"/>
-          </a:xfrm>
-          <a:prstGeom prst="rect">
-            <a:avLst/>
-          </a:prstGeom>
-          <a:ln w="12700">
-            <a:miter lim="400000"/>
-          </a:ln>
-          <a:extLst>
-            <a:ext uri="{C572A759-6A51-4108-AA02-DFA0A04FC94B}">
-              <ma14:wrappingTextBoxFlag xmlns:ma14="http://schemas.microsoft.com/office/mac/drawingml/2011/main" val="1"/>
-            </a:ext>
-          </a:extLst>
-        </p:spPr>
-        <p:txBody>
-          <a:bodyPr lIns="45719" rIns="45719" anchor="ctr">
+            <a:off x="11201399" y="6448898"/>
+            <a:ext cx="457203" cy="214699"/>
+          </a:xfrm>
+          <a:prstGeom prst="rect">
+            <a:avLst/>
+          </a:prstGeom>
+          <a:ln w="12700">
+            <a:miter lim="400000"/>
+          </a:ln>
+          <a:extLst>
+            <a:ext uri="{C572A759-6A51-4108-AA02-DFA0A04FC94B}">
+              <ma14:wrappingTextBoxFlag xmlns:ma14="http://schemas.microsoft.com/office/mac/drawingml/2011/main" val="1"/>
+            </a:ext>
+          </a:extLst>
+        </p:spPr>
+        <p:txBody>
+          <a:bodyPr lIns="45718" tIns="45718" rIns="45718" bIns="45718" anchor="ctr">
             <a:spAutoFit/>
           </a:bodyPr>
           <a:lstStyle>
@@ -3181,6 +3371,10 @@
                 <a:solidFill>
                   <a:srgbClr val="6B6A66"/>
                 </a:solidFill>
+                <a:latin typeface="+mn-lt"/>
+                <a:ea typeface="+mn-ea"/>
+                <a:cs typeface="+mn-cs"/>
+                <a:sym typeface="Arial"/>
               </a:defRPr>
             </a:lvl1pPr>
           </a:lstStyle>
@@ -3234,22 +3428,22 @@
         <p:spPr>
           <a:xfrm>
             <a:off x="685800" y="507952"/>
-            <a:ext cx="10881361" cy="264256"/>
-          </a:xfrm>
-          <a:prstGeom prst="rect">
-            <a:avLst/>
-          </a:prstGeom>
-          <a:ln w="12700">
-            <a:miter lim="400000"/>
-          </a:ln>
-          <a:extLst>
-            <a:ext uri="{C572A759-6A51-4108-AA02-DFA0A04FC94B}">
-              <ma14:wrappingTextBoxFlag xmlns:ma14="http://schemas.microsoft.com/office/mac/drawingml/2011/main" val="1"/>
-            </a:ext>
-          </a:extLst>
-        </p:spPr>
-        <p:txBody>
-          <a:bodyPr lIns="45719" rIns="45719" anchor="ctr">
+            <a:ext cx="10881361" cy="264254"/>
+          </a:xfrm>
+          <a:prstGeom prst="rect">
+            <a:avLst/>
+          </a:prstGeom>
+          <a:ln w="12700">
+            <a:miter lim="400000"/>
+          </a:ln>
+          <a:extLst>
+            <a:ext uri="{C572A759-6A51-4108-AA02-DFA0A04FC94B}">
+              <ma14:wrappingTextBoxFlag xmlns:ma14="http://schemas.microsoft.com/office/mac/drawingml/2011/main" val="1"/>
+            </a:ext>
+          </a:extLst>
+        </p:spPr>
+        <p:txBody>
+          <a:bodyPr lIns="45718" tIns="45718" rIns="45718" bIns="45718" anchor="ctr">
             <a:spAutoFit/>
           </a:bodyPr>
           <a:lstStyle>
@@ -3258,6 +3452,10 @@
                 <a:solidFill>
                   <a:srgbClr val="CDE2FB"/>
                 </a:solidFill>
+                <a:latin typeface="+mn-lt"/>
+                <a:ea typeface="+mn-ea"/>
+                <a:cs typeface="+mn-cs"/>
+                <a:sym typeface="Arial"/>
               </a:defRPr>
             </a:lvl1pPr>
           </a:lstStyle>
@@ -3277,23 +3475,23 @@
         </p:nvSpPr>
         <p:spPr>
           <a:xfrm>
-            <a:off x="685800" y="703868"/>
-            <a:ext cx="9509761" cy="1655439"/>
-          </a:xfrm>
-          <a:prstGeom prst="rect">
-            <a:avLst/>
-          </a:prstGeom>
-          <a:ln w="12700">
-            <a:miter lim="400000"/>
-          </a:ln>
-          <a:extLst>
-            <a:ext uri="{C572A759-6A51-4108-AA02-DFA0A04FC94B}">
-              <ma14:wrappingTextBoxFlag xmlns:ma14="http://schemas.microsoft.com/office/mac/drawingml/2011/main" val="1"/>
-            </a:ext>
-          </a:extLst>
-        </p:spPr>
-        <p:txBody>
-          <a:bodyPr lIns="45719" rIns="45719" anchor="ctr">
+            <a:off x="685800" y="703869"/>
+            <a:ext cx="9509761" cy="1655436"/>
+          </a:xfrm>
+          <a:prstGeom prst="rect">
+            <a:avLst/>
+          </a:prstGeom>
+          <a:ln w="12700">
+            <a:miter lim="400000"/>
+          </a:ln>
+          <a:extLst>
+            <a:ext uri="{C572A759-6A51-4108-AA02-DFA0A04FC94B}">
+              <ma14:wrappingTextBoxFlag xmlns:ma14="http://schemas.microsoft.com/office/mac/drawingml/2011/main" val="1"/>
+            </a:ext>
+          </a:extLst>
+        </p:spPr>
+        <p:txBody>
+          <a:bodyPr lIns="45718" tIns="45718" rIns="45718" bIns="45718" anchor="ctr">
             <a:spAutoFit/>
           </a:bodyPr>
           <a:lstStyle/>
@@ -3303,6 +3501,10 @@
                 <a:solidFill>
                   <a:srgbClr val="FFFFFF"/>
                 </a:solidFill>
+                <a:latin typeface="+mn-lt"/>
+                <a:ea typeface="+mn-ea"/>
+                <a:cs typeface="+mn-cs"/>
+                <a:sym typeface="Arial"/>
               </a:defRPr>
             </a:pPr>
             <a:r>
@@ -3324,8 +3526,8 @@
         </p:nvSpPr>
         <p:spPr>
           <a:xfrm>
-            <a:off x="2865674" y="2559904"/>
-            <a:ext cx="854857" cy="1828801"/>
+            <a:off x="2865673" y="2559904"/>
+            <a:ext cx="854858" cy="1828801"/>
           </a:xfrm>
           <a:prstGeom prst="roundRect">
             <a:avLst>
@@ -3343,10 +3545,17 @@
           </a:ln>
         </p:spPr>
         <p:txBody>
-          <a:bodyPr lIns="45719" rIns="45719"/>
+          <a:bodyPr lIns="45718" tIns="45718" rIns="45718" bIns="45718"/>
           <a:lstStyle/>
           <a:p>
-            <a:pPr/>
+            <a:pPr>
+              <a:defRPr>
+                <a:latin typeface="+mn-lt"/>
+                <a:ea typeface="+mn-ea"/>
+                <a:cs typeface="+mn-cs"/>
+                <a:sym typeface="Arial"/>
+              </a:defRPr>
+            </a:pPr>
           </a:p>
         </p:txBody>
       </p:sp>
@@ -3358,23 +3567,23 @@
         </p:nvSpPr>
         <p:spPr>
           <a:xfrm>
-            <a:off x="2628900" y="4482317"/>
-            <a:ext cx="1508761" cy="264255"/>
-          </a:xfrm>
-          <a:prstGeom prst="rect">
-            <a:avLst/>
-          </a:prstGeom>
-          <a:ln w="12700">
-            <a:miter lim="400000"/>
-          </a:ln>
-          <a:extLst>
-            <a:ext uri="{C572A759-6A51-4108-AA02-DFA0A04FC94B}">
-              <ma14:wrappingTextBoxFlag xmlns:ma14="http://schemas.microsoft.com/office/mac/drawingml/2011/main" val="1"/>
-            </a:ext>
-          </a:extLst>
-        </p:spPr>
-        <p:txBody>
-          <a:bodyPr lIns="45719" rIns="45719" anchor="b">
+            <a:off x="2628899" y="4482318"/>
+            <a:ext cx="1508763" cy="264253"/>
+          </a:xfrm>
+          <a:prstGeom prst="rect">
+            <a:avLst/>
+          </a:prstGeom>
+          <a:ln w="12700">
+            <a:miter lim="400000"/>
+          </a:ln>
+          <a:extLst>
+            <a:ext uri="{C572A759-6A51-4108-AA02-DFA0A04FC94B}">
+              <ma14:wrappingTextBoxFlag xmlns:ma14="http://schemas.microsoft.com/office/mac/drawingml/2011/main" val="1"/>
+            </a:ext>
+          </a:extLst>
+        </p:spPr>
+        <p:txBody>
+          <a:bodyPr lIns="45718" tIns="45718" rIns="45718" bIns="45718" anchor="b">
             <a:spAutoFit/>
           </a:bodyPr>
           <a:lstStyle>
@@ -3383,6 +3592,10 @@
                 <a:solidFill>
                   <a:srgbClr val="D7E3F5"/>
                 </a:solidFill>
+                <a:latin typeface="+mn-lt"/>
+                <a:ea typeface="+mn-ea"/>
+                <a:cs typeface="+mn-cs"/>
+                <a:sym typeface="Arial"/>
               </a:defRPr>
             </a:lvl1pPr>
           </a:lstStyle>
@@ -3403,7 +3616,7 @@
         <p:spPr>
           <a:xfrm>
             <a:off x="903075" y="2414432"/>
-            <a:ext cx="1407409" cy="1828801"/>
+            <a:ext cx="1407409" cy="1828802"/>
           </a:xfrm>
           <a:prstGeom prst="roundRect">
             <a:avLst>
@@ -3421,10 +3634,17 @@
           </a:ln>
         </p:spPr>
         <p:txBody>
-          <a:bodyPr lIns="45719" rIns="45719"/>
+          <a:bodyPr lIns="45718" tIns="45718" rIns="45718" bIns="45718"/>
           <a:lstStyle/>
           <a:p>
-            <a:pPr/>
+            <a:pPr>
+              <a:defRPr>
+                <a:latin typeface="+mn-lt"/>
+                <a:ea typeface="+mn-ea"/>
+                <a:cs typeface="+mn-cs"/>
+                <a:sym typeface="Arial"/>
+              </a:defRPr>
+            </a:pPr>
           </a:p>
         </p:txBody>
       </p:sp>
@@ -3437,22 +3657,22 @@
         <p:spPr>
           <a:xfrm>
             <a:off x="852399" y="4298359"/>
-            <a:ext cx="1508761" cy="404786"/>
-          </a:xfrm>
-          <a:prstGeom prst="rect">
-            <a:avLst/>
-          </a:prstGeom>
-          <a:ln w="12700">
-            <a:miter lim="400000"/>
-          </a:ln>
-          <a:extLst>
-            <a:ext uri="{C572A759-6A51-4108-AA02-DFA0A04FC94B}">
-              <ma14:wrappingTextBoxFlag xmlns:ma14="http://schemas.microsoft.com/office/mac/drawingml/2011/main" val="1"/>
-            </a:ext>
-          </a:extLst>
-        </p:spPr>
-        <p:txBody>
-          <a:bodyPr lIns="45719" rIns="45719" anchor="b">
+            <a:ext cx="1508762" cy="404785"/>
+          </a:xfrm>
+          <a:prstGeom prst="rect">
+            <a:avLst/>
+          </a:prstGeom>
+          <a:ln w="12700">
+            <a:miter lim="400000"/>
+          </a:ln>
+          <a:extLst>
+            <a:ext uri="{C572A759-6A51-4108-AA02-DFA0A04FC94B}">
+              <ma14:wrappingTextBoxFlag xmlns:ma14="http://schemas.microsoft.com/office/mac/drawingml/2011/main" val="1"/>
+            </a:ext>
+          </a:extLst>
+        </p:spPr>
+        <p:txBody>
+          <a:bodyPr lIns="45718" tIns="45718" rIns="45718" bIns="45718" anchor="b">
             <a:spAutoFit/>
           </a:bodyPr>
           <a:lstStyle/>
@@ -3462,6 +3682,10 @@
                 <a:solidFill>
                   <a:srgbClr val="D7E3F5"/>
                 </a:solidFill>
+                <a:latin typeface="+mn-lt"/>
+                <a:ea typeface="+mn-ea"/>
+                <a:cs typeface="+mn-cs"/>
+                <a:sym typeface="Arial"/>
               </a:defRPr>
             </a:pPr>
             <a:r>
@@ -3470,18 +3694,17 @@
           </a:p>
           <a:p>
             <a:pPr algn="ctr">
-              <a:defRPr b="1" sz="1200">
-                <a:solidFill>
-                  <a:srgbClr val="D7E3F5"/>
-                </a:solidFill>
+              <a:defRPr sz="1000">
+                <a:solidFill>
+                  <a:srgbClr val="9FB6D6"/>
+                </a:solidFill>
+                <a:latin typeface="+mn-lt"/>
+                <a:ea typeface="+mn-ea"/>
+                <a:cs typeface="+mn-cs"/>
+                <a:sym typeface="Arial"/>
               </a:defRPr>
             </a:pPr>
             <a:r>
-              <a:rPr b="0" sz="1000">
-                <a:solidFill>
-                  <a:srgbClr val="9FB6D6"/>
-                </a:solidFill>
-              </a:rPr>
               <a:t>Leader</a:t>
             </a:r>
           </a:p>
@@ -3496,22 +3719,22 @@
         <p:spPr>
           <a:xfrm>
             <a:off x="685800" y="5142990"/>
-            <a:ext cx="9052561" cy="412500"/>
-          </a:xfrm>
-          <a:prstGeom prst="rect">
-            <a:avLst/>
-          </a:prstGeom>
-          <a:ln w="12700">
-            <a:miter lim="400000"/>
-          </a:ln>
-          <a:extLst>
-            <a:ext uri="{C572A759-6A51-4108-AA02-DFA0A04FC94B}">
-              <ma14:wrappingTextBoxFlag xmlns:ma14="http://schemas.microsoft.com/office/mac/drawingml/2011/main" val="1"/>
-            </a:ext>
-          </a:extLst>
-        </p:spPr>
-        <p:txBody>
-          <a:bodyPr lIns="45719" rIns="45719" anchor="ctr">
+            <a:ext cx="9052561" cy="412499"/>
+          </a:xfrm>
+          <a:prstGeom prst="rect">
+            <a:avLst/>
+          </a:prstGeom>
+          <a:ln w="12700">
+            <a:miter lim="400000"/>
+          </a:ln>
+          <a:extLst>
+            <a:ext uri="{C572A759-6A51-4108-AA02-DFA0A04FC94B}">
+              <ma14:wrappingTextBoxFlag xmlns:ma14="http://schemas.microsoft.com/office/mac/drawingml/2011/main" val="1"/>
+            </a:ext>
+          </a:extLst>
+        </p:spPr>
+        <p:txBody>
+          <a:bodyPr lIns="45718" tIns="45718" rIns="45718" bIns="45718" anchor="ctr">
             <a:spAutoFit/>
           </a:bodyPr>
           <a:lstStyle/>
@@ -3521,6 +3744,10 @@
                 <a:solidFill>
                   <a:srgbClr val="CDE2FB"/>
                 </a:solidFill>
+                <a:latin typeface="+mn-lt"/>
+                <a:ea typeface="+mn-ea"/>
+                <a:cs typeface="+mn-cs"/>
+                <a:sym typeface="Arial"/>
               </a:defRPr>
             </a:pPr>
             <a:r>
@@ -3545,23 +3772,23 @@
         </p:nvSpPr>
         <p:spPr>
           <a:xfrm>
-            <a:off x="685800" y="6448897"/>
-            <a:ext cx="5394961" cy="214702"/>
-          </a:xfrm>
-          <a:prstGeom prst="rect">
-            <a:avLst/>
-          </a:prstGeom>
-          <a:ln w="12700">
-            <a:miter lim="400000"/>
-          </a:ln>
-          <a:extLst>
-            <a:ext uri="{C572A759-6A51-4108-AA02-DFA0A04FC94B}">
-              <ma14:wrappingTextBoxFlag xmlns:ma14="http://schemas.microsoft.com/office/mac/drawingml/2011/main" val="1"/>
-            </a:ext>
-          </a:extLst>
-        </p:spPr>
-        <p:txBody>
-          <a:bodyPr lIns="45719" rIns="45719" anchor="ctr">
+            <a:off x="685799" y="6448898"/>
+            <a:ext cx="5394963" cy="214699"/>
+          </a:xfrm>
+          <a:prstGeom prst="rect">
+            <a:avLst/>
+          </a:prstGeom>
+          <a:ln w="12700">
+            <a:miter lim="400000"/>
+          </a:ln>
+          <a:extLst>
+            <a:ext uri="{C572A759-6A51-4108-AA02-DFA0A04FC94B}">
+              <ma14:wrappingTextBoxFlag xmlns:ma14="http://schemas.microsoft.com/office/mac/drawingml/2011/main" val="1"/>
+            </a:ext>
+          </a:extLst>
+        </p:spPr>
+        <p:txBody>
+          <a:bodyPr lIns="45718" tIns="45718" rIns="45718" bIns="45718" anchor="ctr">
             <a:spAutoFit/>
           </a:bodyPr>
           <a:lstStyle>
@@ -3570,6 +3797,10 @@
                 <a:solidFill>
                   <a:srgbClr val="6B6A66"/>
                 </a:solidFill>
+                <a:latin typeface="+mn-lt"/>
+                <a:ea typeface="+mn-ea"/>
+                <a:cs typeface="+mn-cs"/>
+                <a:sym typeface="Arial"/>
               </a:defRPr>
             </a:lvl1pPr>
           </a:lstStyle>
@@ -3589,23 +3820,23 @@
         </p:nvSpPr>
         <p:spPr>
           <a:xfrm>
-            <a:off x="11201400" y="6448897"/>
-            <a:ext cx="457201" cy="214702"/>
-          </a:xfrm>
-          <a:prstGeom prst="rect">
-            <a:avLst/>
-          </a:prstGeom>
-          <a:ln w="12700">
-            <a:miter lim="400000"/>
-          </a:ln>
-          <a:extLst>
-            <a:ext uri="{C572A759-6A51-4108-AA02-DFA0A04FC94B}">
-              <ma14:wrappingTextBoxFlag xmlns:ma14="http://schemas.microsoft.com/office/mac/drawingml/2011/main" val="1"/>
-            </a:ext>
-          </a:extLst>
-        </p:spPr>
-        <p:txBody>
-          <a:bodyPr lIns="45719" rIns="45719" anchor="ctr">
+            <a:off x="11201399" y="6448898"/>
+            <a:ext cx="457203" cy="214699"/>
+          </a:xfrm>
+          <a:prstGeom prst="rect">
+            <a:avLst/>
+          </a:prstGeom>
+          <a:ln w="12700">
+            <a:miter lim="400000"/>
+          </a:ln>
+          <a:extLst>
+            <a:ext uri="{C572A759-6A51-4108-AA02-DFA0A04FC94B}">
+              <ma14:wrappingTextBoxFlag xmlns:ma14="http://schemas.microsoft.com/office/mac/drawingml/2011/main" val="1"/>
+            </a:ext>
+          </a:extLst>
+        </p:spPr>
+        <p:txBody>
+          <a:bodyPr lIns="45718" tIns="45718" rIns="45718" bIns="45718" anchor="ctr">
             <a:spAutoFit/>
           </a:bodyPr>
           <a:lstStyle>
@@ -3614,6 +3845,10 @@
                 <a:solidFill>
                   <a:srgbClr val="6B6A66"/>
                 </a:solidFill>
+                <a:latin typeface="+mn-lt"/>
+                <a:ea typeface="+mn-ea"/>
+                <a:cs typeface="+mn-cs"/>
+                <a:sym typeface="Arial"/>
               </a:defRPr>
             </a:lvl1pPr>
           </a:lstStyle>
@@ -3643,8 +3878,8 @@
         </p:blipFill>
         <p:spPr>
           <a:xfrm>
-            <a:off x="941213" y="2441411"/>
-            <a:ext cx="1331133" cy="1774844"/>
+            <a:off x="941212" y="2441411"/>
+            <a:ext cx="1331134" cy="1774845"/>
           </a:xfrm>
           <a:prstGeom prst="rect">
             <a:avLst/>
@@ -3672,8 +3907,8 @@
         </p:blipFill>
         <p:spPr>
           <a:xfrm>
-            <a:off x="2887906" y="2551074"/>
-            <a:ext cx="810393" cy="1755852"/>
+            <a:off x="2887906" y="2551073"/>
+            <a:ext cx="810394" cy="1755853"/>
           </a:xfrm>
           <a:prstGeom prst="rect">
             <a:avLst/>
@@ -3718,22 +3953,22 @@
         <p:spPr>
           <a:xfrm>
             <a:off x="685800" y="507952"/>
-            <a:ext cx="10881361" cy="264256"/>
-          </a:xfrm>
-          <a:prstGeom prst="rect">
-            <a:avLst/>
-          </a:prstGeom>
-          <a:ln w="12700">
-            <a:miter lim="400000"/>
-          </a:ln>
-          <a:extLst>
-            <a:ext uri="{C572A759-6A51-4108-AA02-DFA0A04FC94B}">
-              <ma14:wrappingTextBoxFlag xmlns:ma14="http://schemas.microsoft.com/office/mac/drawingml/2011/main" val="1"/>
-            </a:ext>
-          </a:extLst>
-        </p:spPr>
-        <p:txBody>
-          <a:bodyPr lIns="45719" rIns="45719" anchor="ctr">
+            <a:ext cx="10881361" cy="264254"/>
+          </a:xfrm>
+          <a:prstGeom prst="rect">
+            <a:avLst/>
+          </a:prstGeom>
+          <a:ln w="12700">
+            <a:miter lim="400000"/>
+          </a:ln>
+          <a:extLst>
+            <a:ext uri="{C572A759-6A51-4108-AA02-DFA0A04FC94B}">
+              <ma14:wrappingTextBoxFlag xmlns:ma14="http://schemas.microsoft.com/office/mac/drawingml/2011/main" val="1"/>
+            </a:ext>
+          </a:extLst>
+        </p:spPr>
+        <p:txBody>
+          <a:bodyPr lIns="45718" tIns="45718" rIns="45718" bIns="45718" anchor="ctr">
             <a:spAutoFit/>
           </a:bodyPr>
           <a:lstStyle>
@@ -3742,6 +3977,10 @@
                 <a:solidFill>
                   <a:srgbClr val="2A78D6"/>
                 </a:solidFill>
+                <a:latin typeface="+mn-lt"/>
+                <a:ea typeface="+mn-ea"/>
+                <a:cs typeface="+mn-cs"/>
+                <a:sym typeface="Arial"/>
               </a:defRPr>
             </a:lvl1pPr>
           </a:lstStyle>
@@ -3762,22 +4001,22 @@
         <p:spPr>
           <a:xfrm>
             <a:off x="685800" y="991752"/>
-            <a:ext cx="10424161" cy="942576"/>
-          </a:xfrm>
-          <a:prstGeom prst="rect">
-            <a:avLst/>
-          </a:prstGeom>
-          <a:ln w="12700">
-            <a:miter lim="400000"/>
-          </a:ln>
-          <a:extLst>
-            <a:ext uri="{C572A759-6A51-4108-AA02-DFA0A04FC94B}">
-              <ma14:wrappingTextBoxFlag xmlns:ma14="http://schemas.microsoft.com/office/mac/drawingml/2011/main" val="1"/>
-            </a:ext>
-          </a:extLst>
-        </p:spPr>
-        <p:txBody>
-          <a:bodyPr lIns="45719" rIns="45719" anchor="ctr">
+            <a:ext cx="10424161" cy="942575"/>
+          </a:xfrm>
+          <a:prstGeom prst="rect">
+            <a:avLst/>
+          </a:prstGeom>
+          <a:ln w="12700">
+            <a:miter lim="400000"/>
+          </a:ln>
+          <a:extLst>
+            <a:ext uri="{C572A759-6A51-4108-AA02-DFA0A04FC94B}">
+              <ma14:wrappingTextBoxFlag xmlns:ma14="http://schemas.microsoft.com/office/mac/drawingml/2011/main" val="1"/>
+            </a:ext>
+          </a:extLst>
+        </p:spPr>
+        <p:txBody>
+          <a:bodyPr lIns="45718" tIns="45718" rIns="45718" bIns="45718" anchor="ctr">
             <a:spAutoFit/>
           </a:bodyPr>
           <a:lstStyle/>
@@ -3787,6 +4026,10 @@
                 <a:solidFill>
                   <a:srgbClr val="0B0B0B"/>
                 </a:solidFill>
+                <a:latin typeface="+mn-lt"/>
+                <a:ea typeface="+mn-ea"/>
+                <a:cs typeface="+mn-cs"/>
+                <a:sym typeface="Arial"/>
               </a:defRPr>
             </a:pPr>
             <a:r>
@@ -3799,6 +4042,10 @@
                 <a:solidFill>
                   <a:srgbClr val="0B0B0B"/>
                 </a:solidFill>
+                <a:latin typeface="+mn-lt"/>
+                <a:ea typeface="+mn-ea"/>
+                <a:cs typeface="+mn-cs"/>
+                <a:sym typeface="Arial"/>
               </a:defRPr>
             </a:pPr>
             <a:r>
@@ -3815,23 +4062,23 @@
         </p:nvSpPr>
         <p:spPr>
           <a:xfrm>
-            <a:off x="685799" y="2680757"/>
-            <a:ext cx="3383282" cy="856406"/>
-          </a:xfrm>
-          <a:prstGeom prst="rect">
-            <a:avLst/>
-          </a:prstGeom>
-          <a:ln w="12700">
-            <a:miter lim="400000"/>
-          </a:ln>
-          <a:extLst>
-            <a:ext uri="{C572A759-6A51-4108-AA02-DFA0A04FC94B}">
-              <ma14:wrappingTextBoxFlag xmlns:ma14="http://schemas.microsoft.com/office/mac/drawingml/2011/main" val="1"/>
-            </a:ext>
-          </a:extLst>
-        </p:spPr>
-        <p:txBody>
-          <a:bodyPr lIns="45719" rIns="45719" anchor="ctr">
+            <a:off x="685798" y="2680757"/>
+            <a:ext cx="3383283" cy="856404"/>
+          </a:xfrm>
+          <a:prstGeom prst="rect">
+            <a:avLst/>
+          </a:prstGeom>
+          <a:ln w="12700">
+            <a:miter lim="400000"/>
+          </a:ln>
+          <a:extLst>
+            <a:ext uri="{C572A759-6A51-4108-AA02-DFA0A04FC94B}">
+              <ma14:wrappingTextBoxFlag xmlns:ma14="http://schemas.microsoft.com/office/mac/drawingml/2011/main" val="1"/>
+            </a:ext>
+          </a:extLst>
+        </p:spPr>
+        <p:txBody>
+          <a:bodyPr lIns="45718" tIns="45718" rIns="45718" bIns="45718" anchor="ctr">
             <a:spAutoFit/>
           </a:bodyPr>
           <a:lstStyle>
@@ -3840,6 +4087,10 @@
                 <a:solidFill>
                   <a:srgbClr val="2A78D6"/>
                 </a:solidFill>
+                <a:latin typeface="+mn-lt"/>
+                <a:ea typeface="+mn-ea"/>
+                <a:cs typeface="+mn-cs"/>
+                <a:sym typeface="Arial"/>
               </a:defRPr>
             </a:lvl1pPr>
           </a:lstStyle>
@@ -3859,23 +4110,23 @@
         </p:nvSpPr>
         <p:spPr>
           <a:xfrm>
-            <a:off x="685800" y="3835560"/>
-            <a:ext cx="3291840" cy="467040"/>
-          </a:xfrm>
-          <a:prstGeom prst="rect">
-            <a:avLst/>
-          </a:prstGeom>
-          <a:ln w="12700">
-            <a:miter lim="400000"/>
-          </a:ln>
-          <a:extLst>
-            <a:ext uri="{C572A759-6A51-4108-AA02-DFA0A04FC94B}">
-              <ma14:wrappingTextBoxFlag xmlns:ma14="http://schemas.microsoft.com/office/mac/drawingml/2011/main" val="1"/>
-            </a:ext>
-          </a:extLst>
-        </p:spPr>
-        <p:txBody>
-          <a:bodyPr lIns="45719" rIns="45719" anchor="ctr">
+            <a:off x="685799" y="3835561"/>
+            <a:ext cx="3291842" cy="467037"/>
+          </a:xfrm>
+          <a:prstGeom prst="rect">
+            <a:avLst/>
+          </a:prstGeom>
+          <a:ln w="12700">
+            <a:miter lim="400000"/>
+          </a:ln>
+          <a:extLst>
+            <a:ext uri="{C572A759-6A51-4108-AA02-DFA0A04FC94B}">
+              <ma14:wrappingTextBoxFlag xmlns:ma14="http://schemas.microsoft.com/office/mac/drawingml/2011/main" val="1"/>
+            </a:ext>
+          </a:extLst>
+        </p:spPr>
+        <p:txBody>
+          <a:bodyPr lIns="45718" tIns="45718" rIns="45718" bIns="45718" anchor="ctr">
             <a:spAutoFit/>
           </a:bodyPr>
           <a:lstStyle>
@@ -3884,6 +4135,10 @@
                 <a:solidFill>
                   <a:srgbClr val="6B6A66"/>
                 </a:solidFill>
+                <a:latin typeface="+mn-lt"/>
+                <a:ea typeface="+mn-ea"/>
+                <a:cs typeface="+mn-cs"/>
+                <a:sym typeface="Arial"/>
               </a:defRPr>
             </a:lvl1pPr>
           </a:lstStyle>
@@ -3904,22 +4159,22 @@
         <p:spPr>
           <a:xfrm>
             <a:off x="4434840" y="2680757"/>
-            <a:ext cx="3383281" cy="856406"/>
-          </a:xfrm>
-          <a:prstGeom prst="rect">
-            <a:avLst/>
-          </a:prstGeom>
-          <a:ln w="12700">
-            <a:miter lim="400000"/>
-          </a:ln>
-          <a:extLst>
-            <a:ext uri="{C572A759-6A51-4108-AA02-DFA0A04FC94B}">
-              <ma14:wrappingTextBoxFlag xmlns:ma14="http://schemas.microsoft.com/office/mac/drawingml/2011/main" val="1"/>
-            </a:ext>
-          </a:extLst>
-        </p:spPr>
-        <p:txBody>
-          <a:bodyPr lIns="45719" rIns="45719" anchor="ctr">
+            <a:ext cx="3383282" cy="856404"/>
+          </a:xfrm>
+          <a:prstGeom prst="rect">
+            <a:avLst/>
+          </a:prstGeom>
+          <a:ln w="12700">
+            <a:miter lim="400000"/>
+          </a:ln>
+          <a:extLst>
+            <a:ext uri="{C572A759-6A51-4108-AA02-DFA0A04FC94B}">
+              <ma14:wrappingTextBoxFlag xmlns:ma14="http://schemas.microsoft.com/office/mac/drawingml/2011/main" val="1"/>
+            </a:ext>
+          </a:extLst>
+        </p:spPr>
+        <p:txBody>
+          <a:bodyPr lIns="45718" tIns="45718" rIns="45718" bIns="45718" anchor="ctr">
             <a:spAutoFit/>
           </a:bodyPr>
           <a:lstStyle>
@@ -3928,6 +4183,10 @@
                 <a:solidFill>
                   <a:srgbClr val="EB6834"/>
                 </a:solidFill>
+                <a:latin typeface="+mn-lt"/>
+                <a:ea typeface="+mn-ea"/>
+                <a:cs typeface="+mn-cs"/>
+                <a:sym typeface="Arial"/>
               </a:defRPr>
             </a:lvl1pPr>
           </a:lstStyle>
@@ -3947,23 +4206,23 @@
         </p:nvSpPr>
         <p:spPr>
           <a:xfrm>
-            <a:off x="4434840" y="3835560"/>
-            <a:ext cx="3291841" cy="467040"/>
-          </a:xfrm>
-          <a:prstGeom prst="rect">
-            <a:avLst/>
-          </a:prstGeom>
-          <a:ln w="12700">
-            <a:miter lim="400000"/>
-          </a:ln>
-          <a:extLst>
-            <a:ext uri="{C572A759-6A51-4108-AA02-DFA0A04FC94B}">
-              <ma14:wrappingTextBoxFlag xmlns:ma14="http://schemas.microsoft.com/office/mac/drawingml/2011/main" val="1"/>
-            </a:ext>
-          </a:extLst>
-        </p:spPr>
-        <p:txBody>
-          <a:bodyPr lIns="45719" rIns="45719" anchor="ctr">
+            <a:off x="4434840" y="3835561"/>
+            <a:ext cx="3291842" cy="467037"/>
+          </a:xfrm>
+          <a:prstGeom prst="rect">
+            <a:avLst/>
+          </a:prstGeom>
+          <a:ln w="12700">
+            <a:miter lim="400000"/>
+          </a:ln>
+          <a:extLst>
+            <a:ext uri="{C572A759-6A51-4108-AA02-DFA0A04FC94B}">
+              <ma14:wrappingTextBoxFlag xmlns:ma14="http://schemas.microsoft.com/office/mac/drawingml/2011/main" val="1"/>
+            </a:ext>
+          </a:extLst>
+        </p:spPr>
+        <p:txBody>
+          <a:bodyPr lIns="45718" tIns="45718" rIns="45718" bIns="45718" anchor="ctr">
             <a:spAutoFit/>
           </a:bodyPr>
           <a:lstStyle>
@@ -3972,6 +4231,10 @@
                 <a:solidFill>
                   <a:srgbClr val="6B6A66"/>
                 </a:solidFill>
+                <a:latin typeface="+mn-lt"/>
+                <a:ea typeface="+mn-ea"/>
+                <a:cs typeface="+mn-cs"/>
+                <a:sym typeface="Arial"/>
               </a:defRPr>
             </a:lvl1pPr>
           </a:lstStyle>
@@ -3991,23 +4254,23 @@
         </p:nvSpPr>
         <p:spPr>
           <a:xfrm>
-            <a:off x="8183879" y="2680757"/>
-            <a:ext cx="3383281" cy="856406"/>
-          </a:xfrm>
-          <a:prstGeom prst="rect">
-            <a:avLst/>
-          </a:prstGeom>
-          <a:ln w="12700">
-            <a:miter lim="400000"/>
-          </a:ln>
-          <a:extLst>
-            <a:ext uri="{C572A759-6A51-4108-AA02-DFA0A04FC94B}">
-              <ma14:wrappingTextBoxFlag xmlns:ma14="http://schemas.microsoft.com/office/mac/drawingml/2011/main" val="1"/>
-            </a:ext>
-          </a:extLst>
-        </p:spPr>
-        <p:txBody>
-          <a:bodyPr lIns="45719" rIns="45719" anchor="ctr">
+            <a:off x="8183878" y="2680757"/>
+            <a:ext cx="3383282" cy="856404"/>
+          </a:xfrm>
+          <a:prstGeom prst="rect">
+            <a:avLst/>
+          </a:prstGeom>
+          <a:ln w="12700">
+            <a:miter lim="400000"/>
+          </a:ln>
+          <a:extLst>
+            <a:ext uri="{C572A759-6A51-4108-AA02-DFA0A04FC94B}">
+              <ma14:wrappingTextBoxFlag xmlns:ma14="http://schemas.microsoft.com/office/mac/drawingml/2011/main" val="1"/>
+            </a:ext>
+          </a:extLst>
+        </p:spPr>
+        <p:txBody>
+          <a:bodyPr lIns="45718" tIns="45718" rIns="45718" bIns="45718" anchor="ctr">
             <a:spAutoFit/>
           </a:bodyPr>
           <a:lstStyle>
@@ -4016,6 +4279,10 @@
                 <a:solidFill>
                   <a:srgbClr val="2A78D6"/>
                 </a:solidFill>
+                <a:latin typeface="+mn-lt"/>
+                <a:ea typeface="+mn-ea"/>
+                <a:cs typeface="+mn-cs"/>
+                <a:sym typeface="Arial"/>
               </a:defRPr>
             </a:lvl1pPr>
           </a:lstStyle>
@@ -4035,23 +4302,23 @@
         </p:nvSpPr>
         <p:spPr>
           <a:xfrm>
-            <a:off x="8183879" y="3835560"/>
-            <a:ext cx="3291841" cy="467040"/>
-          </a:xfrm>
-          <a:prstGeom prst="rect">
-            <a:avLst/>
-          </a:prstGeom>
-          <a:ln w="12700">
-            <a:miter lim="400000"/>
-          </a:ln>
-          <a:extLst>
-            <a:ext uri="{C572A759-6A51-4108-AA02-DFA0A04FC94B}">
-              <ma14:wrappingTextBoxFlag xmlns:ma14="http://schemas.microsoft.com/office/mac/drawingml/2011/main" val="1"/>
-            </a:ext>
-          </a:extLst>
-        </p:spPr>
-        <p:txBody>
-          <a:bodyPr lIns="45719" rIns="45719" anchor="ctr">
+            <a:off x="8183878" y="3835561"/>
+            <a:ext cx="3291842" cy="467037"/>
+          </a:xfrm>
+          <a:prstGeom prst="rect">
+            <a:avLst/>
+          </a:prstGeom>
+          <a:ln w="12700">
+            <a:miter lim="400000"/>
+          </a:ln>
+          <a:extLst>
+            <a:ext uri="{C572A759-6A51-4108-AA02-DFA0A04FC94B}">
+              <ma14:wrappingTextBoxFlag xmlns:ma14="http://schemas.microsoft.com/office/mac/drawingml/2011/main" val="1"/>
+            </a:ext>
+          </a:extLst>
+        </p:spPr>
+        <p:txBody>
+          <a:bodyPr lIns="45718" tIns="45718" rIns="45718" bIns="45718" anchor="ctr">
             <a:spAutoFit/>
           </a:bodyPr>
           <a:lstStyle>
@@ -4060,6 +4327,10 @@
                 <a:solidFill>
                   <a:srgbClr val="6B6A66"/>
                 </a:solidFill>
+                <a:latin typeface="+mn-lt"/>
+                <a:ea typeface="+mn-ea"/>
+                <a:cs typeface="+mn-cs"/>
+                <a:sym typeface="Arial"/>
               </a:defRPr>
             </a:lvl1pPr>
           </a:lstStyle>
@@ -4079,23 +4350,23 @@
         </p:nvSpPr>
         <p:spPr>
           <a:xfrm>
-            <a:off x="685800" y="5269159"/>
-            <a:ext cx="10424161" cy="617362"/>
-          </a:xfrm>
-          <a:prstGeom prst="rect">
-            <a:avLst/>
-          </a:prstGeom>
-          <a:ln w="12700">
-            <a:miter lim="400000"/>
-          </a:ln>
-          <a:extLst>
-            <a:ext uri="{C572A759-6A51-4108-AA02-DFA0A04FC94B}">
-              <ma14:wrappingTextBoxFlag xmlns:ma14="http://schemas.microsoft.com/office/mac/drawingml/2011/main" val="1"/>
-            </a:ext>
-          </a:extLst>
-        </p:spPr>
-        <p:txBody>
-          <a:bodyPr lIns="45719" rIns="45719" anchor="ctr">
+            <a:off x="685800" y="5269160"/>
+            <a:ext cx="10424161" cy="617360"/>
+          </a:xfrm>
+          <a:prstGeom prst="rect">
+            <a:avLst/>
+          </a:prstGeom>
+          <a:ln w="12700">
+            <a:miter lim="400000"/>
+          </a:ln>
+          <a:extLst>
+            <a:ext uri="{C572A759-6A51-4108-AA02-DFA0A04FC94B}">
+              <ma14:wrappingTextBoxFlag xmlns:ma14="http://schemas.microsoft.com/office/mac/drawingml/2011/main" val="1"/>
+            </a:ext>
+          </a:extLst>
+        </p:spPr>
+        <p:txBody>
+          <a:bodyPr lIns="45718" tIns="45718" rIns="45718" bIns="45718" anchor="ctr">
             <a:spAutoFit/>
           </a:bodyPr>
           <a:lstStyle>
@@ -4104,6 +4375,10 @@
                 <a:solidFill>
                   <a:srgbClr val="0B0B0B"/>
                 </a:solidFill>
+                <a:latin typeface="+mn-lt"/>
+                <a:ea typeface="+mn-ea"/>
+                <a:cs typeface="+mn-cs"/>
+                <a:sym typeface="Arial"/>
               </a:defRPr>
             </a:lvl1pPr>
           </a:lstStyle>
@@ -4123,23 +4398,23 @@
         </p:nvSpPr>
         <p:spPr>
           <a:xfrm>
-            <a:off x="685800" y="6448897"/>
-            <a:ext cx="5394961" cy="214702"/>
-          </a:xfrm>
-          <a:prstGeom prst="rect">
-            <a:avLst/>
-          </a:prstGeom>
-          <a:ln w="12700">
-            <a:miter lim="400000"/>
-          </a:ln>
-          <a:extLst>
-            <a:ext uri="{C572A759-6A51-4108-AA02-DFA0A04FC94B}">
-              <ma14:wrappingTextBoxFlag xmlns:ma14="http://schemas.microsoft.com/office/mac/drawingml/2011/main" val="1"/>
-            </a:ext>
-          </a:extLst>
-        </p:spPr>
-        <p:txBody>
-          <a:bodyPr lIns="45719" rIns="45719" anchor="ctr">
+            <a:off x="685799" y="6448898"/>
+            <a:ext cx="5394963" cy="214699"/>
+          </a:xfrm>
+          <a:prstGeom prst="rect">
+            <a:avLst/>
+          </a:prstGeom>
+          <a:ln w="12700">
+            <a:miter lim="400000"/>
+          </a:ln>
+          <a:extLst>
+            <a:ext uri="{C572A759-6A51-4108-AA02-DFA0A04FC94B}">
+              <ma14:wrappingTextBoxFlag xmlns:ma14="http://schemas.microsoft.com/office/mac/drawingml/2011/main" val="1"/>
+            </a:ext>
+          </a:extLst>
+        </p:spPr>
+        <p:txBody>
+          <a:bodyPr lIns="45718" tIns="45718" rIns="45718" bIns="45718" anchor="ctr">
             <a:spAutoFit/>
           </a:bodyPr>
           <a:lstStyle>
@@ -4148,6 +4423,10 @@
                 <a:solidFill>
                   <a:srgbClr val="6B6A66"/>
                 </a:solidFill>
+                <a:latin typeface="+mn-lt"/>
+                <a:ea typeface="+mn-ea"/>
+                <a:cs typeface="+mn-cs"/>
+                <a:sym typeface="Arial"/>
               </a:defRPr>
             </a:lvl1pPr>
           </a:lstStyle>
@@ -4167,23 +4446,23 @@
         </p:nvSpPr>
         <p:spPr>
           <a:xfrm>
-            <a:off x="11201400" y="6448897"/>
-            <a:ext cx="457201" cy="214702"/>
-          </a:xfrm>
-          <a:prstGeom prst="rect">
-            <a:avLst/>
-          </a:prstGeom>
-          <a:ln w="12700">
-            <a:miter lim="400000"/>
-          </a:ln>
-          <a:extLst>
-            <a:ext uri="{C572A759-6A51-4108-AA02-DFA0A04FC94B}">
-              <ma14:wrappingTextBoxFlag xmlns:ma14="http://schemas.microsoft.com/office/mac/drawingml/2011/main" val="1"/>
-            </a:ext>
-          </a:extLst>
-        </p:spPr>
-        <p:txBody>
-          <a:bodyPr lIns="45719" rIns="45719" anchor="ctr">
+            <a:off x="11201399" y="6448898"/>
+            <a:ext cx="457203" cy="214699"/>
+          </a:xfrm>
+          <a:prstGeom prst="rect">
+            <a:avLst/>
+          </a:prstGeom>
+          <a:ln w="12700">
+            <a:miter lim="400000"/>
+          </a:ln>
+          <a:extLst>
+            <a:ext uri="{C572A759-6A51-4108-AA02-DFA0A04FC94B}">
+              <ma14:wrappingTextBoxFlag xmlns:ma14="http://schemas.microsoft.com/office/mac/drawingml/2011/main" val="1"/>
+            </a:ext>
+          </a:extLst>
+        </p:spPr>
+        <p:txBody>
+          <a:bodyPr lIns="45718" tIns="45718" rIns="45718" bIns="45718" anchor="ctr">
             <a:spAutoFit/>
           </a:bodyPr>
           <a:lstStyle>
@@ -4192,6 +4471,10 @@
                 <a:solidFill>
                   <a:srgbClr val="6B6A66"/>
                 </a:solidFill>
+                <a:latin typeface="+mn-lt"/>
+                <a:ea typeface="+mn-ea"/>
+                <a:cs typeface="+mn-cs"/>
+                <a:sym typeface="Arial"/>
               </a:defRPr>
             </a:lvl1pPr>
           </a:lstStyle>
@@ -4238,22 +4521,22 @@
         <p:spPr>
           <a:xfrm>
             <a:off x="685800" y="507952"/>
-            <a:ext cx="10881361" cy="264256"/>
-          </a:xfrm>
-          <a:prstGeom prst="rect">
-            <a:avLst/>
-          </a:prstGeom>
-          <a:ln w="12700">
-            <a:miter lim="400000"/>
-          </a:ln>
-          <a:extLst>
-            <a:ext uri="{C572A759-6A51-4108-AA02-DFA0A04FC94B}">
-              <ma14:wrappingTextBoxFlag xmlns:ma14="http://schemas.microsoft.com/office/mac/drawingml/2011/main" val="1"/>
-            </a:ext>
-          </a:extLst>
-        </p:spPr>
-        <p:txBody>
-          <a:bodyPr lIns="45719" rIns="45719" anchor="ctr">
+            <a:ext cx="10881361" cy="264254"/>
+          </a:xfrm>
+          <a:prstGeom prst="rect">
+            <a:avLst/>
+          </a:prstGeom>
+          <a:ln w="12700">
+            <a:miter lim="400000"/>
+          </a:ln>
+          <a:extLst>
+            <a:ext uri="{C572A759-6A51-4108-AA02-DFA0A04FC94B}">
+              <ma14:wrappingTextBoxFlag xmlns:ma14="http://schemas.microsoft.com/office/mac/drawingml/2011/main" val="1"/>
+            </a:ext>
+          </a:extLst>
+        </p:spPr>
+        <p:txBody>
+          <a:bodyPr lIns="45718" tIns="45718" rIns="45718" bIns="45718" anchor="ctr">
             <a:spAutoFit/>
           </a:bodyPr>
           <a:lstStyle>
@@ -4262,6 +4545,10 @@
                 <a:solidFill>
                   <a:srgbClr val="2A78D6"/>
                 </a:solidFill>
+                <a:latin typeface="+mn-lt"/>
+                <a:ea typeface="+mn-ea"/>
+                <a:cs typeface="+mn-cs"/>
+                <a:sym typeface="Arial"/>
               </a:defRPr>
             </a:lvl1pPr>
           </a:lstStyle>
@@ -4282,22 +4569,22 @@
         <p:spPr>
           <a:xfrm>
             <a:off x="685800" y="933332"/>
-            <a:ext cx="10881361" cy="510776"/>
-          </a:xfrm>
-          <a:prstGeom prst="rect">
-            <a:avLst/>
-          </a:prstGeom>
-          <a:ln w="12700">
-            <a:miter lim="400000"/>
-          </a:ln>
-          <a:extLst>
-            <a:ext uri="{C572A759-6A51-4108-AA02-DFA0A04FC94B}">
-              <ma14:wrappingTextBoxFlag xmlns:ma14="http://schemas.microsoft.com/office/mac/drawingml/2011/main" val="1"/>
-            </a:ext>
-          </a:extLst>
-        </p:spPr>
-        <p:txBody>
-          <a:bodyPr lIns="45719" rIns="45719" anchor="ctr">
+            <a:ext cx="10881361" cy="510775"/>
+          </a:xfrm>
+          <a:prstGeom prst="rect">
+            <a:avLst/>
+          </a:prstGeom>
+          <a:ln w="12700">
+            <a:miter lim="400000"/>
+          </a:ln>
+          <a:extLst>
+            <a:ext uri="{C572A759-6A51-4108-AA02-DFA0A04FC94B}">
+              <ma14:wrappingTextBoxFlag xmlns:ma14="http://schemas.microsoft.com/office/mac/drawingml/2011/main" val="1"/>
+            </a:ext>
+          </a:extLst>
+        </p:spPr>
+        <p:txBody>
+          <a:bodyPr lIns="45718" tIns="45718" rIns="45718" bIns="45718" anchor="ctr">
             <a:spAutoFit/>
           </a:bodyPr>
           <a:lstStyle>
@@ -4306,6 +4593,10 @@
                 <a:solidFill>
                   <a:srgbClr val="0B0B0B"/>
                 </a:solidFill>
+                <a:latin typeface="+mn-lt"/>
+                <a:ea typeface="+mn-ea"/>
+                <a:cs typeface="+mn-cs"/>
+                <a:sym typeface="Arial"/>
               </a:defRPr>
             </a:lvl1pPr>
           </a:lstStyle>
@@ -4326,7 +4617,7 @@
         <p:spPr>
           <a:xfrm>
             <a:off x="640080" y="1828800"/>
-            <a:ext cx="3429001" cy="2743200"/>
+            <a:ext cx="3429002" cy="2743200"/>
           </a:xfrm>
           <a:prstGeom prst="roundRect">
             <a:avLst>
@@ -4343,10 +4634,17 @@
           </a:ln>
         </p:spPr>
         <p:txBody>
-          <a:bodyPr lIns="45719" rIns="45719"/>
+          <a:bodyPr lIns="45718" tIns="45718" rIns="45718" bIns="45718"/>
           <a:lstStyle/>
           <a:p>
-            <a:pPr/>
+            <a:pPr>
+              <a:defRPr>
+                <a:latin typeface="+mn-lt"/>
+                <a:ea typeface="+mn-ea"/>
+                <a:cs typeface="+mn-cs"/>
+                <a:sym typeface="Arial"/>
+              </a:defRPr>
+            </a:pPr>
           </a:p>
         </p:txBody>
       </p:sp>
@@ -4359,7 +4657,7 @@
         <p:spPr>
           <a:xfrm>
             <a:off x="914400" y="2103120"/>
-            <a:ext cx="1371600" cy="384049"/>
+            <a:ext cx="1371600" cy="384050"/>
           </a:xfrm>
           <a:prstGeom prst="roundRect">
             <a:avLst>
@@ -4374,10 +4672,17 @@
           </a:ln>
         </p:spPr>
         <p:txBody>
-          <a:bodyPr lIns="45719" rIns="45719"/>
+          <a:bodyPr lIns="45718" tIns="45718" rIns="45718" bIns="45718"/>
           <a:lstStyle/>
           <a:p>
-            <a:pPr/>
+            <a:pPr>
+              <a:defRPr>
+                <a:latin typeface="+mn-lt"/>
+                <a:ea typeface="+mn-ea"/>
+                <a:cs typeface="+mn-cs"/>
+                <a:sym typeface="Arial"/>
+              </a:defRPr>
+            </a:pPr>
           </a:p>
         </p:txBody>
       </p:sp>
@@ -4390,22 +4695,22 @@
         <p:spPr>
           <a:xfrm>
             <a:off x="960119" y="2156874"/>
-            <a:ext cx="1280162" cy="276540"/>
-          </a:xfrm>
-          <a:prstGeom prst="rect">
-            <a:avLst/>
-          </a:prstGeom>
-          <a:ln w="12700">
-            <a:miter lim="400000"/>
-          </a:ln>
-          <a:extLst>
-            <a:ext uri="{C572A759-6A51-4108-AA02-DFA0A04FC94B}">
-              <ma14:wrappingTextBoxFlag xmlns:ma14="http://schemas.microsoft.com/office/mac/drawingml/2011/main" val="1"/>
-            </a:ext>
-          </a:extLst>
-        </p:spPr>
-        <p:txBody>
-          <a:bodyPr lIns="45719" rIns="45719" anchor="ctr">
+            <a:ext cx="1280162" cy="276538"/>
+          </a:xfrm>
+          <a:prstGeom prst="rect">
+            <a:avLst/>
+          </a:prstGeom>
+          <a:ln w="12700">
+            <a:miter lim="400000"/>
+          </a:ln>
+          <a:extLst>
+            <a:ext uri="{C572A759-6A51-4108-AA02-DFA0A04FC94B}">
+              <ma14:wrappingTextBoxFlag xmlns:ma14="http://schemas.microsoft.com/office/mac/drawingml/2011/main" val="1"/>
+            </a:ext>
+          </a:extLst>
+        </p:spPr>
+        <p:txBody>
+          <a:bodyPr lIns="45718" tIns="45718" rIns="45718" bIns="45718" anchor="ctr">
             <a:spAutoFit/>
           </a:bodyPr>
           <a:lstStyle>
@@ -4414,6 +4719,10 @@
                 <a:solidFill>
                   <a:srgbClr val="0D366B"/>
                 </a:solidFill>
+                <a:latin typeface="+mn-lt"/>
+                <a:ea typeface="+mn-ea"/>
+                <a:cs typeface="+mn-cs"/>
+                <a:sym typeface="Arial"/>
               </a:defRPr>
             </a:lvl1pPr>
           </a:lstStyle>
@@ -4433,23 +4742,23 @@
         </p:nvSpPr>
         <p:spPr>
           <a:xfrm>
-            <a:off x="960119" y="2613589"/>
-            <a:ext cx="2834642" cy="350662"/>
-          </a:xfrm>
-          <a:prstGeom prst="rect">
-            <a:avLst/>
-          </a:prstGeom>
-          <a:ln w="12700">
-            <a:miter lim="400000"/>
-          </a:ln>
-          <a:extLst>
-            <a:ext uri="{C572A759-6A51-4108-AA02-DFA0A04FC94B}">
-              <ma14:wrappingTextBoxFlag xmlns:ma14="http://schemas.microsoft.com/office/mac/drawingml/2011/main" val="1"/>
-            </a:ext>
-          </a:extLst>
-        </p:spPr>
-        <p:txBody>
-          <a:bodyPr lIns="45719" rIns="45719" anchor="ctr">
+            <a:off x="960118" y="2613589"/>
+            <a:ext cx="2834644" cy="350661"/>
+          </a:xfrm>
+          <a:prstGeom prst="rect">
+            <a:avLst/>
+          </a:prstGeom>
+          <a:ln w="12700">
+            <a:miter lim="400000"/>
+          </a:ln>
+          <a:extLst>
+            <a:ext uri="{C572A759-6A51-4108-AA02-DFA0A04FC94B}">
+              <ma14:wrappingTextBoxFlag xmlns:ma14="http://schemas.microsoft.com/office/mac/drawingml/2011/main" val="1"/>
+            </a:ext>
+          </a:extLst>
+        </p:spPr>
+        <p:txBody>
+          <a:bodyPr lIns="45718" tIns="45718" rIns="45718" bIns="45718" anchor="ctr">
             <a:spAutoFit/>
           </a:bodyPr>
           <a:lstStyle>
@@ -4458,6 +4767,10 @@
                 <a:solidFill>
                   <a:srgbClr val="0B0B0B"/>
                 </a:solidFill>
+                <a:latin typeface="+mn-lt"/>
+                <a:ea typeface="+mn-ea"/>
+                <a:cs typeface="+mn-cs"/>
+                <a:sym typeface="Arial"/>
               </a:defRPr>
             </a:lvl1pPr>
           </a:lstStyle>
@@ -4477,23 +4790,23 @@
         </p:nvSpPr>
         <p:spPr>
           <a:xfrm>
-            <a:off x="960119" y="3229770"/>
-            <a:ext cx="2834642" cy="1038540"/>
-          </a:xfrm>
-          <a:prstGeom prst="rect">
-            <a:avLst/>
-          </a:prstGeom>
-          <a:ln w="12700">
-            <a:miter lim="400000"/>
-          </a:ln>
-          <a:extLst>
-            <a:ext uri="{C572A759-6A51-4108-AA02-DFA0A04FC94B}">
-              <ma14:wrappingTextBoxFlag xmlns:ma14="http://schemas.microsoft.com/office/mac/drawingml/2011/main" val="1"/>
-            </a:ext>
-          </a:extLst>
-        </p:spPr>
-        <p:txBody>
-          <a:bodyPr lIns="45719" rIns="45719" anchor="ctr">
+            <a:off x="960118" y="3229770"/>
+            <a:ext cx="2834644" cy="1038538"/>
+          </a:xfrm>
+          <a:prstGeom prst="rect">
+            <a:avLst/>
+          </a:prstGeom>
+          <a:ln w="12700">
+            <a:miter lim="400000"/>
+          </a:ln>
+          <a:extLst>
+            <a:ext uri="{C572A759-6A51-4108-AA02-DFA0A04FC94B}">
+              <ma14:wrappingTextBoxFlag xmlns:ma14="http://schemas.microsoft.com/office/mac/drawingml/2011/main" val="1"/>
+            </a:ext>
+          </a:extLst>
+        </p:spPr>
+        <p:txBody>
+          <a:bodyPr lIns="45718" tIns="45718" rIns="45718" bIns="45718" anchor="ctr">
             <a:spAutoFit/>
           </a:bodyPr>
           <a:lstStyle>
@@ -4502,13 +4815,17 @@
                 <a:solidFill>
                   <a:srgbClr val="6B6A66"/>
                 </a:solidFill>
-              </a:defRPr>
-            </a:lvl1pPr>
-          </a:lstStyle>
-          <a:p>
-            <a:pPr/>
-            <a:r>
-              <a:t>Predicts a country's life expectancy from the levers a health ministry controls: staffing, immunization, spend, disease burden, nutrition, sanitation.</a:t>
+                <a:latin typeface="+mn-lt"/>
+                <a:ea typeface="+mn-ea"/>
+                <a:cs typeface="+mn-cs"/>
+                <a:sym typeface="Arial"/>
+              </a:defRPr>
+            </a:lvl1pPr>
+          </a:lstStyle>
+          <a:p>
+            <a:pPr/>
+            <a:r>
+              <a:t>Predicts a country's life expectancy from the levers a health ministry controls: staffing, immunization, spend, disease burden, nutrition, sanitation, agriculture, and climate.</a:t>
             </a:r>
           </a:p>
         </p:txBody>
@@ -4539,10 +4856,17 @@
           </a:ln>
         </p:spPr>
         <p:txBody>
-          <a:bodyPr lIns="45719" rIns="45719"/>
+          <a:bodyPr lIns="45718" tIns="45718" rIns="45718" bIns="45718"/>
           <a:lstStyle/>
           <a:p>
-            <a:pPr/>
+            <a:pPr>
+              <a:defRPr>
+                <a:latin typeface="+mn-lt"/>
+                <a:ea typeface="+mn-ea"/>
+                <a:cs typeface="+mn-cs"/>
+                <a:sym typeface="Arial"/>
+              </a:defRPr>
+            </a:pPr>
           </a:p>
         </p:txBody>
       </p:sp>
@@ -4555,7 +4879,7 @@
         <p:spPr>
           <a:xfrm>
             <a:off x="4617720" y="2103120"/>
-            <a:ext cx="1371601" cy="384049"/>
+            <a:ext cx="1371602" cy="384050"/>
           </a:xfrm>
           <a:prstGeom prst="roundRect">
             <a:avLst>
@@ -4570,10 +4894,17 @@
           </a:ln>
         </p:spPr>
         <p:txBody>
-          <a:bodyPr lIns="45719" rIns="45719"/>
+          <a:bodyPr lIns="45718" tIns="45718" rIns="45718" bIns="45718"/>
           <a:lstStyle/>
           <a:p>
-            <a:pPr/>
+            <a:pPr>
+              <a:defRPr>
+                <a:latin typeface="+mn-lt"/>
+                <a:ea typeface="+mn-ea"/>
+                <a:cs typeface="+mn-cs"/>
+                <a:sym typeface="Arial"/>
+              </a:defRPr>
+            </a:pPr>
           </a:p>
         </p:txBody>
       </p:sp>
@@ -4586,22 +4917,22 @@
         <p:spPr>
           <a:xfrm>
             <a:off x="4663440" y="2156874"/>
-            <a:ext cx="1280161" cy="276540"/>
-          </a:xfrm>
-          <a:prstGeom prst="rect">
-            <a:avLst/>
-          </a:prstGeom>
-          <a:ln w="12700">
-            <a:miter lim="400000"/>
-          </a:ln>
-          <a:extLst>
-            <a:ext uri="{C572A759-6A51-4108-AA02-DFA0A04FC94B}">
-              <ma14:wrappingTextBoxFlag xmlns:ma14="http://schemas.microsoft.com/office/mac/drawingml/2011/main" val="1"/>
-            </a:ext>
-          </a:extLst>
-        </p:spPr>
-        <p:txBody>
-          <a:bodyPr lIns="45719" rIns="45719" anchor="ctr">
+            <a:ext cx="1280162" cy="276538"/>
+          </a:xfrm>
+          <a:prstGeom prst="rect">
+            <a:avLst/>
+          </a:prstGeom>
+          <a:ln w="12700">
+            <a:miter lim="400000"/>
+          </a:ln>
+          <a:extLst>
+            <a:ext uri="{C572A759-6A51-4108-AA02-DFA0A04FC94B}">
+              <ma14:wrappingTextBoxFlag xmlns:ma14="http://schemas.microsoft.com/office/mac/drawingml/2011/main" val="1"/>
+            </a:ext>
+          </a:extLst>
+        </p:spPr>
+        <p:txBody>
+          <a:bodyPr lIns="45718" tIns="45718" rIns="45718" bIns="45718" anchor="ctr">
             <a:spAutoFit/>
           </a:bodyPr>
           <a:lstStyle>
@@ -4610,6 +4941,10 @@
                 <a:solidFill>
                   <a:srgbClr val="0D366B"/>
                 </a:solidFill>
+                <a:latin typeface="+mn-lt"/>
+                <a:ea typeface="+mn-ea"/>
+                <a:cs typeface="+mn-cs"/>
+                <a:sym typeface="Arial"/>
               </a:defRPr>
             </a:lvl1pPr>
           </a:lstStyle>
@@ -4630,22 +4965,22 @@
         <p:spPr>
           <a:xfrm>
             <a:off x="4663440" y="2613589"/>
-            <a:ext cx="2834641" cy="350662"/>
-          </a:xfrm>
-          <a:prstGeom prst="rect">
-            <a:avLst/>
-          </a:prstGeom>
-          <a:ln w="12700">
-            <a:miter lim="400000"/>
-          </a:ln>
-          <a:extLst>
-            <a:ext uri="{C572A759-6A51-4108-AA02-DFA0A04FC94B}">
-              <ma14:wrappingTextBoxFlag xmlns:ma14="http://schemas.microsoft.com/office/mac/drawingml/2011/main" val="1"/>
-            </a:ext>
-          </a:extLst>
-        </p:spPr>
-        <p:txBody>
-          <a:bodyPr lIns="45719" rIns="45719" anchor="ctr">
+            <a:ext cx="2834642" cy="350661"/>
+          </a:xfrm>
+          <a:prstGeom prst="rect">
+            <a:avLst/>
+          </a:prstGeom>
+          <a:ln w="12700">
+            <a:miter lim="400000"/>
+          </a:ln>
+          <a:extLst>
+            <a:ext uri="{C572A759-6A51-4108-AA02-DFA0A04FC94B}">
+              <ma14:wrappingTextBoxFlag xmlns:ma14="http://schemas.microsoft.com/office/mac/drawingml/2011/main" val="1"/>
+            </a:ext>
+          </a:extLst>
+        </p:spPr>
+        <p:txBody>
+          <a:bodyPr lIns="45718" tIns="45718" rIns="45718" bIns="45718" anchor="ctr">
             <a:spAutoFit/>
           </a:bodyPr>
           <a:lstStyle>
@@ -4654,6 +4989,10 @@
                 <a:solidFill>
                   <a:srgbClr val="0B0B0B"/>
                 </a:solidFill>
+                <a:latin typeface="+mn-lt"/>
+                <a:ea typeface="+mn-ea"/>
+                <a:cs typeface="+mn-cs"/>
+                <a:sym typeface="Arial"/>
               </a:defRPr>
             </a:lvl1pPr>
           </a:lstStyle>
@@ -4674,22 +5013,22 @@
         <p:spPr>
           <a:xfrm>
             <a:off x="4663440" y="3325020"/>
-            <a:ext cx="2834641" cy="848040"/>
-          </a:xfrm>
-          <a:prstGeom prst="rect">
-            <a:avLst/>
-          </a:prstGeom>
-          <a:ln w="12700">
-            <a:miter lim="400000"/>
-          </a:ln>
-          <a:extLst>
-            <a:ext uri="{C572A759-6A51-4108-AA02-DFA0A04FC94B}">
-              <ma14:wrappingTextBoxFlag xmlns:ma14="http://schemas.microsoft.com/office/mac/drawingml/2011/main" val="1"/>
-            </a:ext>
-          </a:extLst>
-        </p:spPr>
-        <p:txBody>
-          <a:bodyPr lIns="45719" rIns="45719" anchor="ctr">
+            <a:ext cx="2834642" cy="848038"/>
+          </a:xfrm>
+          <a:prstGeom prst="rect">
+            <a:avLst/>
+          </a:prstGeom>
+          <a:ln w="12700">
+            <a:miter lim="400000"/>
+          </a:ln>
+          <a:extLst>
+            <a:ext uri="{C572A759-6A51-4108-AA02-DFA0A04FC94B}">
+              <ma14:wrappingTextBoxFlag xmlns:ma14="http://schemas.microsoft.com/office/mac/drawingml/2011/main" val="1"/>
+            </a:ext>
+          </a:extLst>
+        </p:spPr>
+        <p:txBody>
+          <a:bodyPr lIns="45718" tIns="45718" rIns="45718" bIns="45718" anchor="ctr">
             <a:spAutoFit/>
           </a:bodyPr>
           <a:lstStyle>
@@ -4698,6 +5037,10 @@
                 <a:solidFill>
                   <a:srgbClr val="6B6A66"/>
                 </a:solidFill>
+                <a:latin typeface="+mn-lt"/>
+                <a:ea typeface="+mn-ea"/>
+                <a:cs typeface="+mn-cs"/>
+                <a:sym typeface="Arial"/>
               </a:defRPr>
             </a:lvl1pPr>
           </a:lstStyle>
@@ -4717,8 +5060,8 @@
         </p:nvSpPr>
         <p:spPr>
           <a:xfrm>
-            <a:off x="8046719" y="1828800"/>
-            <a:ext cx="3429001" cy="2743200"/>
+            <a:off x="8046718" y="1828800"/>
+            <a:ext cx="3429003" cy="2743200"/>
           </a:xfrm>
           <a:prstGeom prst="roundRect">
             <a:avLst>
@@ -4735,10 +5078,17 @@
           </a:ln>
         </p:spPr>
         <p:txBody>
-          <a:bodyPr lIns="45719" rIns="45719"/>
+          <a:bodyPr lIns="45718" tIns="45718" rIns="45718" bIns="45718"/>
           <a:lstStyle/>
           <a:p>
-            <a:pPr/>
+            <a:pPr>
+              <a:defRPr>
+                <a:latin typeface="+mn-lt"/>
+                <a:ea typeface="+mn-ea"/>
+                <a:cs typeface="+mn-cs"/>
+                <a:sym typeface="Arial"/>
+              </a:defRPr>
+            </a:pPr>
           </a:p>
         </p:txBody>
       </p:sp>
@@ -4751,7 +5101,7 @@
         <p:spPr>
           <a:xfrm>
             <a:off x="8321040" y="2103120"/>
-            <a:ext cx="1371601" cy="384049"/>
+            <a:ext cx="1371602" cy="384050"/>
           </a:xfrm>
           <a:prstGeom prst="roundRect">
             <a:avLst>
@@ -4766,10 +5116,17 @@
           </a:ln>
         </p:spPr>
         <p:txBody>
-          <a:bodyPr lIns="45719" rIns="45719"/>
+          <a:bodyPr lIns="45718" tIns="45718" rIns="45718" bIns="45718"/>
           <a:lstStyle/>
           <a:p>
-            <a:pPr/>
+            <a:pPr>
+              <a:defRPr>
+                <a:latin typeface="+mn-lt"/>
+                <a:ea typeface="+mn-ea"/>
+                <a:cs typeface="+mn-cs"/>
+                <a:sym typeface="Arial"/>
+              </a:defRPr>
+            </a:pPr>
           </a:p>
         </p:txBody>
       </p:sp>
@@ -4781,23 +5138,23 @@
         </p:nvSpPr>
         <p:spPr>
           <a:xfrm>
-            <a:off x="8366760" y="2156874"/>
-            <a:ext cx="1280161" cy="276540"/>
-          </a:xfrm>
-          <a:prstGeom prst="rect">
-            <a:avLst/>
-          </a:prstGeom>
-          <a:ln w="12700">
-            <a:miter lim="400000"/>
-          </a:ln>
-          <a:extLst>
-            <a:ext uri="{C572A759-6A51-4108-AA02-DFA0A04FC94B}">
-              <ma14:wrappingTextBoxFlag xmlns:ma14="http://schemas.microsoft.com/office/mac/drawingml/2011/main" val="1"/>
-            </a:ext>
-          </a:extLst>
-        </p:spPr>
-        <p:txBody>
-          <a:bodyPr lIns="45719" rIns="45719" anchor="ctr">
+            <a:off x="8366759" y="2156874"/>
+            <a:ext cx="1280162" cy="276538"/>
+          </a:xfrm>
+          <a:prstGeom prst="rect">
+            <a:avLst/>
+          </a:prstGeom>
+          <a:ln w="12700">
+            <a:miter lim="400000"/>
+          </a:ln>
+          <a:extLst>
+            <a:ext uri="{C572A759-6A51-4108-AA02-DFA0A04FC94B}">
+              <ma14:wrappingTextBoxFlag xmlns:ma14="http://schemas.microsoft.com/office/mac/drawingml/2011/main" val="1"/>
+            </a:ext>
+          </a:extLst>
+        </p:spPr>
+        <p:txBody>
+          <a:bodyPr lIns="45718" tIns="45718" rIns="45718" bIns="45718" anchor="ctr">
             <a:spAutoFit/>
           </a:bodyPr>
           <a:lstStyle>
@@ -4806,6 +5163,10 @@
                 <a:solidFill>
                   <a:srgbClr val="0D366B"/>
                 </a:solidFill>
+                <a:latin typeface="+mn-lt"/>
+                <a:ea typeface="+mn-ea"/>
+                <a:cs typeface="+mn-cs"/>
+                <a:sym typeface="Arial"/>
               </a:defRPr>
             </a:lvl1pPr>
           </a:lstStyle>
@@ -4825,23 +5186,23 @@
         </p:nvSpPr>
         <p:spPr>
           <a:xfrm>
-            <a:off x="8366760" y="2613589"/>
-            <a:ext cx="2834641" cy="350662"/>
-          </a:xfrm>
-          <a:prstGeom prst="rect">
-            <a:avLst/>
-          </a:prstGeom>
-          <a:ln w="12700">
-            <a:miter lim="400000"/>
-          </a:ln>
-          <a:extLst>
-            <a:ext uri="{C572A759-6A51-4108-AA02-DFA0A04FC94B}">
-              <ma14:wrappingTextBoxFlag xmlns:ma14="http://schemas.microsoft.com/office/mac/drawingml/2011/main" val="1"/>
-            </a:ext>
-          </a:extLst>
-        </p:spPr>
-        <p:txBody>
-          <a:bodyPr lIns="45719" rIns="45719" anchor="ctr">
+            <a:off x="8366759" y="2613589"/>
+            <a:ext cx="2834642" cy="350661"/>
+          </a:xfrm>
+          <a:prstGeom prst="rect">
+            <a:avLst/>
+          </a:prstGeom>
+          <a:ln w="12700">
+            <a:miter lim="400000"/>
+          </a:ln>
+          <a:extLst>
+            <a:ext uri="{C572A759-6A51-4108-AA02-DFA0A04FC94B}">
+              <ma14:wrappingTextBoxFlag xmlns:ma14="http://schemas.microsoft.com/office/mac/drawingml/2011/main" val="1"/>
+            </a:ext>
+          </a:extLst>
+        </p:spPr>
+        <p:txBody>
+          <a:bodyPr lIns="45718" tIns="45718" rIns="45718" bIns="45718" anchor="ctr">
             <a:spAutoFit/>
           </a:bodyPr>
           <a:lstStyle>
@@ -4850,6 +5211,10 @@
                 <a:solidFill>
                   <a:srgbClr val="0B0B0B"/>
                 </a:solidFill>
+                <a:latin typeface="+mn-lt"/>
+                <a:ea typeface="+mn-ea"/>
+                <a:cs typeface="+mn-cs"/>
+                <a:sym typeface="Arial"/>
               </a:defRPr>
             </a:lvl1pPr>
           </a:lstStyle>
@@ -4869,23 +5234,23 @@
         </p:nvSpPr>
         <p:spPr>
           <a:xfrm>
-            <a:off x="8366760" y="3325020"/>
-            <a:ext cx="2834641" cy="848040"/>
-          </a:xfrm>
-          <a:prstGeom prst="rect">
-            <a:avLst/>
-          </a:prstGeom>
-          <a:ln w="12700">
-            <a:miter lim="400000"/>
-          </a:ln>
-          <a:extLst>
-            <a:ext uri="{C572A759-6A51-4108-AA02-DFA0A04FC94B}">
-              <ma14:wrappingTextBoxFlag xmlns:ma14="http://schemas.microsoft.com/office/mac/drawingml/2011/main" val="1"/>
-            </a:ext>
-          </a:extLst>
-        </p:spPr>
-        <p:txBody>
-          <a:bodyPr lIns="45719" rIns="45719" anchor="ctr">
+            <a:off x="8366759" y="3325020"/>
+            <a:ext cx="2834642" cy="848038"/>
+          </a:xfrm>
+          <a:prstGeom prst="rect">
+            <a:avLst/>
+          </a:prstGeom>
+          <a:ln w="12700">
+            <a:miter lim="400000"/>
+          </a:ln>
+          <a:extLst>
+            <a:ext uri="{C572A759-6A51-4108-AA02-DFA0A04FC94B}">
+              <ma14:wrappingTextBoxFlag xmlns:ma14="http://schemas.microsoft.com/office/mac/drawingml/2011/main" val="1"/>
+            </a:ext>
+          </a:extLst>
+        </p:spPr>
+        <p:txBody>
+          <a:bodyPr lIns="45718" tIns="45718" rIns="45718" bIns="45718" anchor="ctr">
             <a:spAutoFit/>
           </a:bodyPr>
           <a:lstStyle>
@@ -4894,6 +5259,10 @@
                 <a:solidFill>
                   <a:srgbClr val="6B6A66"/>
                 </a:solidFill>
+                <a:latin typeface="+mn-lt"/>
+                <a:ea typeface="+mn-ea"/>
+                <a:cs typeface="+mn-cs"/>
+                <a:sym typeface="Arial"/>
               </a:defRPr>
             </a:lvl1pPr>
           </a:lstStyle>
@@ -4914,22 +5283,22 @@
         <p:spPr>
           <a:xfrm>
             <a:off x="685800" y="4982370"/>
-            <a:ext cx="10424161" cy="276540"/>
-          </a:xfrm>
-          <a:prstGeom prst="rect">
-            <a:avLst/>
-          </a:prstGeom>
-          <a:ln w="12700">
-            <a:miter lim="400000"/>
-          </a:ln>
-          <a:extLst>
-            <a:ext uri="{C572A759-6A51-4108-AA02-DFA0A04FC94B}">
-              <ma14:wrappingTextBoxFlag xmlns:ma14="http://schemas.microsoft.com/office/mac/drawingml/2011/main" val="1"/>
-            </a:ext>
-          </a:extLst>
-        </p:spPr>
-        <p:txBody>
-          <a:bodyPr lIns="45719" rIns="45719" anchor="ctr">
+            <a:ext cx="10424161" cy="276538"/>
+          </a:xfrm>
+          <a:prstGeom prst="rect">
+            <a:avLst/>
+          </a:prstGeom>
+          <a:ln w="12700">
+            <a:miter lim="400000"/>
+          </a:ln>
+          <a:extLst>
+            <a:ext uri="{C572A759-6A51-4108-AA02-DFA0A04FC94B}">
+              <ma14:wrappingTextBoxFlag xmlns:ma14="http://schemas.microsoft.com/office/mac/drawingml/2011/main" val="1"/>
+            </a:ext>
+          </a:extLst>
+        </p:spPr>
+        <p:txBody>
+          <a:bodyPr lIns="45718" tIns="45718" rIns="45718" bIns="45718" anchor="ctr">
             <a:spAutoFit/>
           </a:bodyPr>
           <a:lstStyle>
@@ -4938,6 +5307,10 @@
                 <a:solidFill>
                   <a:srgbClr val="6B6A66"/>
                 </a:solidFill>
+                <a:latin typeface="+mn-lt"/>
+                <a:ea typeface="+mn-ea"/>
+                <a:cs typeface="+mn-cs"/>
+                <a:sym typeface="Arial"/>
               </a:defRPr>
             </a:lvl1pPr>
           </a:lstStyle>
@@ -4957,23 +5330,23 @@
         </p:nvSpPr>
         <p:spPr>
           <a:xfrm>
-            <a:off x="685800" y="6448897"/>
-            <a:ext cx="5394961" cy="214702"/>
-          </a:xfrm>
-          <a:prstGeom prst="rect">
-            <a:avLst/>
-          </a:prstGeom>
-          <a:ln w="12700">
-            <a:miter lim="400000"/>
-          </a:ln>
-          <a:extLst>
-            <a:ext uri="{C572A759-6A51-4108-AA02-DFA0A04FC94B}">
-              <ma14:wrappingTextBoxFlag xmlns:ma14="http://schemas.microsoft.com/office/mac/drawingml/2011/main" val="1"/>
-            </a:ext>
-          </a:extLst>
-        </p:spPr>
-        <p:txBody>
-          <a:bodyPr lIns="45719" rIns="45719" anchor="ctr">
+            <a:off x="685799" y="6448898"/>
+            <a:ext cx="5394963" cy="214699"/>
+          </a:xfrm>
+          <a:prstGeom prst="rect">
+            <a:avLst/>
+          </a:prstGeom>
+          <a:ln w="12700">
+            <a:miter lim="400000"/>
+          </a:ln>
+          <a:extLst>
+            <a:ext uri="{C572A759-6A51-4108-AA02-DFA0A04FC94B}">
+              <ma14:wrappingTextBoxFlag xmlns:ma14="http://schemas.microsoft.com/office/mac/drawingml/2011/main" val="1"/>
+            </a:ext>
+          </a:extLst>
+        </p:spPr>
+        <p:txBody>
+          <a:bodyPr lIns="45718" tIns="45718" rIns="45718" bIns="45718" anchor="ctr">
             <a:spAutoFit/>
           </a:bodyPr>
           <a:lstStyle>
@@ -4982,6 +5355,10 @@
                 <a:solidFill>
                   <a:srgbClr val="6B6A66"/>
                 </a:solidFill>
+                <a:latin typeface="+mn-lt"/>
+                <a:ea typeface="+mn-ea"/>
+                <a:cs typeface="+mn-cs"/>
+                <a:sym typeface="Arial"/>
               </a:defRPr>
             </a:lvl1pPr>
           </a:lstStyle>
@@ -5001,23 +5378,23 @@
         </p:nvSpPr>
         <p:spPr>
           <a:xfrm>
-            <a:off x="11201400" y="6448897"/>
-            <a:ext cx="457201" cy="214702"/>
-          </a:xfrm>
-          <a:prstGeom prst="rect">
-            <a:avLst/>
-          </a:prstGeom>
-          <a:ln w="12700">
-            <a:miter lim="400000"/>
-          </a:ln>
-          <a:extLst>
-            <a:ext uri="{C572A759-6A51-4108-AA02-DFA0A04FC94B}">
-              <ma14:wrappingTextBoxFlag xmlns:ma14="http://schemas.microsoft.com/office/mac/drawingml/2011/main" val="1"/>
-            </a:ext>
-          </a:extLst>
-        </p:spPr>
-        <p:txBody>
-          <a:bodyPr lIns="45719" rIns="45719" anchor="ctr">
+            <a:off x="11201399" y="6448898"/>
+            <a:ext cx="457203" cy="214699"/>
+          </a:xfrm>
+          <a:prstGeom prst="rect">
+            <a:avLst/>
+          </a:prstGeom>
+          <a:ln w="12700">
+            <a:miter lim="400000"/>
+          </a:ln>
+          <a:extLst>
+            <a:ext uri="{C572A759-6A51-4108-AA02-DFA0A04FC94B}">
+              <ma14:wrappingTextBoxFlag xmlns:ma14="http://schemas.microsoft.com/office/mac/drawingml/2011/main" val="1"/>
+            </a:ext>
+          </a:extLst>
+        </p:spPr>
+        <p:txBody>
+          <a:bodyPr lIns="45718" tIns="45718" rIns="45718" bIns="45718" anchor="ctr">
             <a:spAutoFit/>
           </a:bodyPr>
           <a:lstStyle>
@@ -5026,6 +5403,10 @@
                 <a:solidFill>
                   <a:srgbClr val="6B6A66"/>
                 </a:solidFill>
+                <a:latin typeface="+mn-lt"/>
+                <a:ea typeface="+mn-ea"/>
+                <a:cs typeface="+mn-cs"/>
+                <a:sym typeface="Arial"/>
               </a:defRPr>
             </a:lvl1pPr>
           </a:lstStyle>
@@ -5072,22 +5453,22 @@
         <p:spPr>
           <a:xfrm>
             <a:off x="685800" y="507952"/>
-            <a:ext cx="10881361" cy="264256"/>
-          </a:xfrm>
-          <a:prstGeom prst="rect">
-            <a:avLst/>
-          </a:prstGeom>
-          <a:ln w="12700">
-            <a:miter lim="400000"/>
-          </a:ln>
-          <a:extLst>
-            <a:ext uri="{C572A759-6A51-4108-AA02-DFA0A04FC94B}">
-              <ma14:wrappingTextBoxFlag xmlns:ma14="http://schemas.microsoft.com/office/mac/drawingml/2011/main" val="1"/>
-            </a:ext>
-          </a:extLst>
-        </p:spPr>
-        <p:txBody>
-          <a:bodyPr lIns="45719" rIns="45719" anchor="ctr">
+            <a:ext cx="10881361" cy="264254"/>
+          </a:xfrm>
+          <a:prstGeom prst="rect">
+            <a:avLst/>
+          </a:prstGeom>
+          <a:ln w="12700">
+            <a:miter lim="400000"/>
+          </a:ln>
+          <a:extLst>
+            <a:ext uri="{C572A759-6A51-4108-AA02-DFA0A04FC94B}">
+              <ma14:wrappingTextBoxFlag xmlns:ma14="http://schemas.microsoft.com/office/mac/drawingml/2011/main" val="1"/>
+            </a:ext>
+          </a:extLst>
+        </p:spPr>
+        <p:txBody>
+          <a:bodyPr lIns="45718" tIns="45718" rIns="45718" bIns="45718" anchor="ctr">
             <a:spAutoFit/>
           </a:bodyPr>
           <a:lstStyle>
@@ -5096,6 +5477,10 @@
                 <a:solidFill>
                   <a:srgbClr val="2A78D6"/>
                 </a:solidFill>
+                <a:latin typeface="+mn-lt"/>
+                <a:ea typeface="+mn-ea"/>
+                <a:cs typeface="+mn-cs"/>
+                <a:sym typeface="Arial"/>
               </a:defRPr>
             </a:lvl1pPr>
           </a:lstStyle>
@@ -5115,23 +5500,23 @@
         </p:nvSpPr>
         <p:spPr>
           <a:xfrm>
-            <a:off x="685800" y="945616"/>
-            <a:ext cx="10881361" cy="486208"/>
-          </a:xfrm>
-          <a:prstGeom prst="rect">
-            <a:avLst/>
-          </a:prstGeom>
-          <a:ln w="12700">
-            <a:miter lim="400000"/>
-          </a:ln>
-          <a:extLst>
-            <a:ext uri="{C572A759-6A51-4108-AA02-DFA0A04FC94B}">
-              <ma14:wrappingTextBoxFlag xmlns:ma14="http://schemas.microsoft.com/office/mac/drawingml/2011/main" val="1"/>
-            </a:ext>
-          </a:extLst>
-        </p:spPr>
-        <p:txBody>
-          <a:bodyPr lIns="45719" rIns="45719" anchor="ctr">
+            <a:off x="685800" y="945617"/>
+            <a:ext cx="10881361" cy="486205"/>
+          </a:xfrm>
+          <a:prstGeom prst="rect">
+            <a:avLst/>
+          </a:prstGeom>
+          <a:ln w="12700">
+            <a:miter lim="400000"/>
+          </a:ln>
+          <a:extLst>
+            <a:ext uri="{C572A759-6A51-4108-AA02-DFA0A04FC94B}">
+              <ma14:wrappingTextBoxFlag xmlns:ma14="http://schemas.microsoft.com/office/mac/drawingml/2011/main" val="1"/>
+            </a:ext>
+          </a:extLst>
+        </p:spPr>
+        <p:txBody>
+          <a:bodyPr lIns="45718" tIns="45718" rIns="45718" bIns="45718" anchor="ctr">
             <a:spAutoFit/>
           </a:bodyPr>
           <a:lstStyle>
@@ -5140,6 +5525,10 @@
                 <a:solidFill>
                   <a:srgbClr val="0B0B0B"/>
                 </a:solidFill>
+                <a:latin typeface="+mn-lt"/>
+                <a:ea typeface="+mn-ea"/>
+                <a:cs typeface="+mn-cs"/>
+                <a:sym typeface="Arial"/>
               </a:defRPr>
             </a:lvl1pPr>
           </a:lstStyle>
@@ -5160,7 +5549,7 @@
         <p:spPr>
           <a:xfrm>
             <a:off x="640080" y="1828800"/>
-            <a:ext cx="2560321" cy="3108961"/>
+            <a:ext cx="2560322" cy="3108962"/>
           </a:xfrm>
           <a:prstGeom prst="roundRect">
             <a:avLst>
@@ -5177,10 +5566,17 @@
           </a:ln>
         </p:spPr>
         <p:txBody>
-          <a:bodyPr lIns="45719" rIns="45719"/>
+          <a:bodyPr lIns="45718" tIns="45718" rIns="45718" bIns="45718"/>
           <a:lstStyle/>
           <a:p>
-            <a:pPr/>
+            <a:pPr>
+              <a:defRPr>
+                <a:latin typeface="+mn-lt"/>
+                <a:ea typeface="+mn-ea"/>
+                <a:cs typeface="+mn-cs"/>
+                <a:sym typeface="Arial"/>
+              </a:defRPr>
+            </a:pPr>
           </a:p>
         </p:txBody>
       </p:sp>
@@ -5193,22 +5589,22 @@
         <p:spPr>
           <a:xfrm>
             <a:off x="914399" y="2069080"/>
-            <a:ext cx="2103122" cy="708160"/>
-          </a:xfrm>
-          <a:prstGeom prst="rect">
-            <a:avLst/>
-          </a:prstGeom>
-          <a:ln w="12700">
-            <a:miter lim="400000"/>
-          </a:ln>
-          <a:extLst>
-            <a:ext uri="{C572A759-6A51-4108-AA02-DFA0A04FC94B}">
-              <ma14:wrappingTextBoxFlag xmlns:ma14="http://schemas.microsoft.com/office/mac/drawingml/2011/main" val="1"/>
-            </a:ext>
-          </a:extLst>
-        </p:spPr>
-        <p:txBody>
-          <a:bodyPr lIns="45719" rIns="45719" anchor="ctr">
+            <a:ext cx="2103123" cy="708158"/>
+          </a:xfrm>
+          <a:prstGeom prst="rect">
+            <a:avLst/>
+          </a:prstGeom>
+          <a:ln w="12700">
+            <a:miter lim="400000"/>
+          </a:ln>
+          <a:extLst>
+            <a:ext uri="{C572A759-6A51-4108-AA02-DFA0A04FC94B}">
+              <ma14:wrappingTextBoxFlag xmlns:ma14="http://schemas.microsoft.com/office/mac/drawingml/2011/main" val="1"/>
+            </a:ext>
+          </a:extLst>
+        </p:spPr>
+        <p:txBody>
+          <a:bodyPr lIns="45718" tIns="45718" rIns="45718" bIns="45718" anchor="ctr">
             <a:spAutoFit/>
           </a:bodyPr>
           <a:lstStyle>
@@ -5217,13 +5613,17 @@
                 <a:solidFill>
                   <a:srgbClr val="2A78D6"/>
                 </a:solidFill>
-              </a:defRPr>
-            </a:lvl1pPr>
-          </a:lstStyle>
-          <a:p>
-            <a:pPr/>
-            <a:r>
-              <a:t>18</a:t>
+                <a:latin typeface="+mn-lt"/>
+                <a:ea typeface="+mn-ea"/>
+                <a:cs typeface="+mn-cs"/>
+                <a:sym typeface="Arial"/>
+              </a:defRPr>
+            </a:lvl1pPr>
+          </a:lstStyle>
+          <a:p>
+            <a:pPr/>
+            <a:r>
+              <a:t>20</a:t>
             </a:r>
           </a:p>
         </p:txBody>
@@ -5236,23 +5636,23 @@
         </p:nvSpPr>
         <p:spPr>
           <a:xfrm>
-            <a:off x="914399" y="2958406"/>
-            <a:ext cx="2103122" cy="301108"/>
-          </a:xfrm>
-          <a:prstGeom prst="rect">
-            <a:avLst/>
-          </a:prstGeom>
-          <a:ln w="12700">
-            <a:miter lim="400000"/>
-          </a:ln>
-          <a:extLst>
-            <a:ext uri="{C572A759-6A51-4108-AA02-DFA0A04FC94B}">
-              <ma14:wrappingTextBoxFlag xmlns:ma14="http://schemas.microsoft.com/office/mac/drawingml/2011/main" val="1"/>
-            </a:ext>
-          </a:extLst>
-        </p:spPr>
-        <p:txBody>
-          <a:bodyPr lIns="45719" rIns="45719" anchor="ctr">
+            <a:off x="914399" y="2742507"/>
+            <a:ext cx="2103123" cy="732906"/>
+          </a:xfrm>
+          <a:prstGeom prst="rect">
+            <a:avLst/>
+          </a:prstGeom>
+          <a:ln w="12700">
+            <a:miter lim="400000"/>
+          </a:ln>
+          <a:extLst>
+            <a:ext uri="{C572A759-6A51-4108-AA02-DFA0A04FC94B}">
+              <ma14:wrappingTextBoxFlag xmlns:ma14="http://schemas.microsoft.com/office/mac/drawingml/2011/main" val="1"/>
+            </a:ext>
+          </a:extLst>
+        </p:spPr>
+        <p:txBody>
+          <a:bodyPr lIns="45718" tIns="45718" rIns="45718" bIns="45718" anchor="ctr">
             <a:spAutoFit/>
           </a:bodyPr>
           <a:lstStyle>
@@ -5261,13 +5661,17 @@
                 <a:solidFill>
                   <a:srgbClr val="0B0B0B"/>
                 </a:solidFill>
-              </a:defRPr>
-            </a:lvl1pPr>
-          </a:lstStyle>
-          <a:p>
-            <a:pPr/>
-            <a:r>
-              <a:t>datasets harmonized</a:t>
+                <a:latin typeface="+mn-lt"/>
+                <a:ea typeface="+mn-ea"/>
+                <a:cs typeface="+mn-cs"/>
+                <a:sym typeface="Arial"/>
+              </a:defRPr>
+            </a:lvl1pPr>
+          </a:lstStyle>
+          <a:p>
+            <a:pPr/>
+            <a:r>
+              <a:t>datasets harmonized (18 ASEAN + 2 external)</a:t>
             </a:r>
           </a:p>
         </p:txBody>
@@ -5281,22 +5685,22 @@
         <p:spPr>
           <a:xfrm>
             <a:off x="914399" y="3670252"/>
-            <a:ext cx="2103122" cy="797656"/>
-          </a:xfrm>
-          <a:prstGeom prst="rect">
-            <a:avLst/>
-          </a:prstGeom>
-          <a:ln w="12700">
-            <a:miter lim="400000"/>
-          </a:ln>
-          <a:extLst>
-            <a:ext uri="{C572A759-6A51-4108-AA02-DFA0A04FC94B}">
-              <ma14:wrappingTextBoxFlag xmlns:ma14="http://schemas.microsoft.com/office/mac/drawingml/2011/main" val="1"/>
-            </a:ext>
-          </a:extLst>
-        </p:spPr>
-        <p:txBody>
-          <a:bodyPr lIns="45719" rIns="45719" anchor="ctr">
+            <a:ext cx="2103123" cy="797654"/>
+          </a:xfrm>
+          <a:prstGeom prst="rect">
+            <a:avLst/>
+          </a:prstGeom>
+          <a:ln w="12700">
+            <a:miter lim="400000"/>
+          </a:ln>
+          <a:extLst>
+            <a:ext uri="{C572A759-6A51-4108-AA02-DFA0A04FC94B}">
+              <ma14:wrappingTextBoxFlag xmlns:ma14="http://schemas.microsoft.com/office/mac/drawingml/2011/main" val="1"/>
+            </a:ext>
+          </a:extLst>
+        </p:spPr>
+        <p:txBody>
+          <a:bodyPr lIns="45718" tIns="45718" rIns="45718" bIns="45718" anchor="ctr">
             <a:spAutoFit/>
           </a:bodyPr>
           <a:lstStyle>
@@ -5305,6 +5709,10 @@
                 <a:solidFill>
                   <a:srgbClr val="6B6A66"/>
                 </a:solidFill>
+                <a:latin typeface="+mn-lt"/>
+                <a:ea typeface="+mn-ea"/>
+                <a:cs typeface="+mn-cs"/>
+                <a:sym typeface="Arial"/>
               </a:defRPr>
             </a:lvl1pPr>
           </a:lstStyle>
@@ -5325,7 +5733,7 @@
         <p:spPr>
           <a:xfrm>
             <a:off x="3429000" y="1828800"/>
-            <a:ext cx="2560321" cy="3108961"/>
+            <a:ext cx="2560322" cy="3108962"/>
           </a:xfrm>
           <a:prstGeom prst="roundRect">
             <a:avLst>
@@ -5342,10 +5750,17 @@
           </a:ln>
         </p:spPr>
         <p:txBody>
-          <a:bodyPr lIns="45719" rIns="45719"/>
+          <a:bodyPr lIns="45718" tIns="45718" rIns="45718" bIns="45718"/>
           <a:lstStyle/>
           <a:p>
-            <a:pPr/>
+            <a:pPr>
+              <a:defRPr>
+                <a:latin typeface="+mn-lt"/>
+                <a:ea typeface="+mn-ea"/>
+                <a:cs typeface="+mn-cs"/>
+                <a:sym typeface="Arial"/>
+              </a:defRPr>
+            </a:pPr>
           </a:p>
         </p:txBody>
       </p:sp>
@@ -5357,23 +5772,23 @@
         </p:nvSpPr>
         <p:spPr>
           <a:xfrm>
-            <a:off x="3703319" y="2069080"/>
-            <a:ext cx="2103122" cy="708160"/>
-          </a:xfrm>
-          <a:prstGeom prst="rect">
-            <a:avLst/>
-          </a:prstGeom>
-          <a:ln w="12700">
-            <a:miter lim="400000"/>
-          </a:ln>
-          <a:extLst>
-            <a:ext uri="{C572A759-6A51-4108-AA02-DFA0A04FC94B}">
-              <ma14:wrappingTextBoxFlag xmlns:ma14="http://schemas.microsoft.com/office/mac/drawingml/2011/main" val="1"/>
-            </a:ext>
-          </a:extLst>
-        </p:spPr>
-        <p:txBody>
-          <a:bodyPr lIns="45719" rIns="45719" anchor="ctr">
+            <a:off x="3703318" y="2069080"/>
+            <a:ext cx="2103123" cy="708158"/>
+          </a:xfrm>
+          <a:prstGeom prst="rect">
+            <a:avLst/>
+          </a:prstGeom>
+          <a:ln w="12700">
+            <a:miter lim="400000"/>
+          </a:ln>
+          <a:extLst>
+            <a:ext uri="{C572A759-6A51-4108-AA02-DFA0A04FC94B}">
+              <ma14:wrappingTextBoxFlag xmlns:ma14="http://schemas.microsoft.com/office/mac/drawingml/2011/main" val="1"/>
+            </a:ext>
+          </a:extLst>
+        </p:spPr>
+        <p:txBody>
+          <a:bodyPr lIns="45718" tIns="45718" rIns="45718" bIns="45718" anchor="ctr">
             <a:spAutoFit/>
           </a:bodyPr>
           <a:lstStyle>
@@ -5382,6 +5797,10 @@
                 <a:solidFill>
                   <a:srgbClr val="2A78D6"/>
                 </a:solidFill>
+                <a:latin typeface="+mn-lt"/>
+                <a:ea typeface="+mn-ea"/>
+                <a:cs typeface="+mn-cs"/>
+                <a:sym typeface="Arial"/>
               </a:defRPr>
             </a:lvl1pPr>
           </a:lstStyle>
@@ -5401,23 +5820,23 @@
         </p:nvSpPr>
         <p:spPr>
           <a:xfrm>
-            <a:off x="3703319" y="2850456"/>
-            <a:ext cx="2103122" cy="517008"/>
-          </a:xfrm>
-          <a:prstGeom prst="rect">
-            <a:avLst/>
-          </a:prstGeom>
-          <a:ln w="12700">
-            <a:miter lim="400000"/>
-          </a:ln>
-          <a:extLst>
-            <a:ext uri="{C572A759-6A51-4108-AA02-DFA0A04FC94B}">
-              <ma14:wrappingTextBoxFlag xmlns:ma14="http://schemas.microsoft.com/office/mac/drawingml/2011/main" val="1"/>
-            </a:ext>
-          </a:extLst>
-        </p:spPr>
-        <p:txBody>
-          <a:bodyPr lIns="45719" rIns="45719" anchor="ctr">
+            <a:off x="3703318" y="2850457"/>
+            <a:ext cx="2103123" cy="517006"/>
+          </a:xfrm>
+          <a:prstGeom prst="rect">
+            <a:avLst/>
+          </a:prstGeom>
+          <a:ln w="12700">
+            <a:miter lim="400000"/>
+          </a:ln>
+          <a:extLst>
+            <a:ext uri="{C572A759-6A51-4108-AA02-DFA0A04FC94B}">
+              <ma14:wrappingTextBoxFlag xmlns:ma14="http://schemas.microsoft.com/office/mac/drawingml/2011/main" val="1"/>
+            </a:ext>
+          </a:extLst>
+        </p:spPr>
+        <p:txBody>
+          <a:bodyPr lIns="45718" tIns="45718" rIns="45718" bIns="45718" anchor="ctr">
             <a:spAutoFit/>
           </a:bodyPr>
           <a:lstStyle>
@@ -5426,6 +5845,10 @@
                 <a:solidFill>
                   <a:srgbClr val="0B0B0B"/>
                 </a:solidFill>
+                <a:latin typeface="+mn-lt"/>
+                <a:ea typeface="+mn-ea"/>
+                <a:cs typeface="+mn-cs"/>
+                <a:sym typeface="Arial"/>
               </a:defRPr>
             </a:lvl1pPr>
           </a:lstStyle>
@@ -5445,23 +5868,23 @@
         </p:nvSpPr>
         <p:spPr>
           <a:xfrm>
-            <a:off x="3703319" y="3759152"/>
-            <a:ext cx="2103122" cy="619856"/>
-          </a:xfrm>
-          <a:prstGeom prst="rect">
-            <a:avLst/>
-          </a:prstGeom>
-          <a:ln w="12700">
-            <a:miter lim="400000"/>
-          </a:ln>
-          <a:extLst>
-            <a:ext uri="{C572A759-6A51-4108-AA02-DFA0A04FC94B}">
-              <ma14:wrappingTextBoxFlag xmlns:ma14="http://schemas.microsoft.com/office/mac/drawingml/2011/main" val="1"/>
-            </a:ext>
-          </a:extLst>
-        </p:spPr>
-        <p:txBody>
-          <a:bodyPr lIns="45719" rIns="45719" anchor="ctr">
+            <a:off x="3703318" y="3759152"/>
+            <a:ext cx="2103123" cy="619854"/>
+          </a:xfrm>
+          <a:prstGeom prst="rect">
+            <a:avLst/>
+          </a:prstGeom>
+          <a:ln w="12700">
+            <a:miter lim="400000"/>
+          </a:ln>
+          <a:extLst>
+            <a:ext uri="{C572A759-6A51-4108-AA02-DFA0A04FC94B}">
+              <ma14:wrappingTextBoxFlag xmlns:ma14="http://schemas.microsoft.com/office/mac/drawingml/2011/main" val="1"/>
+            </a:ext>
+          </a:extLst>
+        </p:spPr>
+        <p:txBody>
+          <a:bodyPr lIns="45718" tIns="45718" rIns="45718" bIns="45718" anchor="ctr">
             <a:spAutoFit/>
           </a:bodyPr>
           <a:lstStyle>
@@ -5470,6 +5893,10 @@
                 <a:solidFill>
                   <a:srgbClr val="6B6A66"/>
                 </a:solidFill>
+                <a:latin typeface="+mn-lt"/>
+                <a:ea typeface="+mn-ea"/>
+                <a:cs typeface="+mn-cs"/>
+                <a:sym typeface="Arial"/>
               </a:defRPr>
             </a:lvl1pPr>
           </a:lstStyle>
@@ -5490,7 +5917,7 @@
         <p:spPr>
           <a:xfrm>
             <a:off x="6217920" y="1828800"/>
-            <a:ext cx="2560321" cy="3108961"/>
+            <a:ext cx="2560322" cy="3108962"/>
           </a:xfrm>
           <a:prstGeom prst="roundRect">
             <a:avLst>
@@ -5507,10 +5934,17 @@
           </a:ln>
         </p:spPr>
         <p:txBody>
-          <a:bodyPr lIns="45719" rIns="45719"/>
+          <a:bodyPr lIns="45718" tIns="45718" rIns="45718" bIns="45718"/>
           <a:lstStyle/>
           <a:p>
-            <a:pPr/>
+            <a:pPr>
+              <a:defRPr>
+                <a:latin typeface="+mn-lt"/>
+                <a:ea typeface="+mn-ea"/>
+                <a:cs typeface="+mn-cs"/>
+                <a:sym typeface="Arial"/>
+              </a:defRPr>
+            </a:pPr>
           </a:p>
         </p:txBody>
       </p:sp>
@@ -5523,22 +5957,22 @@
         <p:spPr>
           <a:xfrm>
             <a:off x="6492240" y="2069080"/>
-            <a:ext cx="2103121" cy="708160"/>
-          </a:xfrm>
-          <a:prstGeom prst="rect">
-            <a:avLst/>
-          </a:prstGeom>
-          <a:ln w="12700">
-            <a:miter lim="400000"/>
-          </a:ln>
-          <a:extLst>
-            <a:ext uri="{C572A759-6A51-4108-AA02-DFA0A04FC94B}">
-              <ma14:wrappingTextBoxFlag xmlns:ma14="http://schemas.microsoft.com/office/mac/drawingml/2011/main" val="1"/>
-            </a:ext>
-          </a:extLst>
-        </p:spPr>
-        <p:txBody>
-          <a:bodyPr lIns="45719" rIns="45719" anchor="ctr">
+            <a:ext cx="2103122" cy="708158"/>
+          </a:xfrm>
+          <a:prstGeom prst="rect">
+            <a:avLst/>
+          </a:prstGeom>
+          <a:ln w="12700">
+            <a:miter lim="400000"/>
+          </a:ln>
+          <a:extLst>
+            <a:ext uri="{C572A759-6A51-4108-AA02-DFA0A04FC94B}">
+              <ma14:wrappingTextBoxFlag xmlns:ma14="http://schemas.microsoft.com/office/mac/drawingml/2011/main" val="1"/>
+            </a:ext>
+          </a:extLst>
+        </p:spPr>
+        <p:txBody>
+          <a:bodyPr lIns="45718" tIns="45718" rIns="45718" bIns="45718" anchor="ctr">
             <a:spAutoFit/>
           </a:bodyPr>
           <a:lstStyle>
@@ -5547,13 +5981,17 @@
                 <a:solidFill>
                   <a:srgbClr val="EB6834"/>
                 </a:solidFill>
-              </a:defRPr>
-            </a:lvl1pPr>
-          </a:lstStyle>
-          <a:p>
-            <a:pPr/>
-            <a:r>
-              <a:t>8</a:t>
+                <a:latin typeface="+mn-lt"/>
+                <a:ea typeface="+mn-ea"/>
+                <a:cs typeface="+mn-cs"/>
+                <a:sym typeface="Arial"/>
+              </a:defRPr>
+            </a:lvl1pPr>
+          </a:lstStyle>
+          <a:p>
+            <a:pPr/>
+            <a:r>
+              <a:t>7</a:t>
             </a:r>
           </a:p>
         </p:txBody>
@@ -5566,23 +6004,23 @@
         </p:nvSpPr>
         <p:spPr>
           <a:xfrm>
-            <a:off x="6492240" y="2958406"/>
-            <a:ext cx="2103121" cy="301108"/>
-          </a:xfrm>
-          <a:prstGeom prst="rect">
-            <a:avLst/>
-          </a:prstGeom>
-          <a:ln w="12700">
-            <a:miter lim="400000"/>
-          </a:ln>
-          <a:extLst>
-            <a:ext uri="{C572A759-6A51-4108-AA02-DFA0A04FC94B}">
-              <ma14:wrappingTextBoxFlag xmlns:ma14="http://schemas.microsoft.com/office/mac/drawingml/2011/main" val="1"/>
-            </a:ext>
-          </a:extLst>
-        </p:spPr>
-        <p:txBody>
-          <a:bodyPr lIns="45719" rIns="45719" anchor="ctr">
+            <a:off x="6492240" y="2958407"/>
+            <a:ext cx="2103122" cy="301106"/>
+          </a:xfrm>
+          <a:prstGeom prst="rect">
+            <a:avLst/>
+          </a:prstGeom>
+          <a:ln w="12700">
+            <a:miter lim="400000"/>
+          </a:ln>
+          <a:extLst>
+            <a:ext uri="{C572A759-6A51-4108-AA02-DFA0A04FC94B}">
+              <ma14:wrappingTextBoxFlag xmlns:ma14="http://schemas.microsoft.com/office/mac/drawingml/2011/main" val="1"/>
+            </a:ext>
+          </a:extLst>
+        </p:spPr>
+        <p:txBody>
+          <a:bodyPr lIns="45718" tIns="45718" rIns="45718" bIns="45718" anchor="ctr">
             <a:spAutoFit/>
           </a:bodyPr>
           <a:lstStyle>
@@ -5591,6 +6029,10 @@
                 <a:solidFill>
                   <a:srgbClr val="0B0B0B"/>
                 </a:solidFill>
+                <a:latin typeface="+mn-lt"/>
+                <a:ea typeface="+mn-ea"/>
+                <a:cs typeface="+mn-cs"/>
+                <a:sym typeface="Arial"/>
               </a:defRPr>
             </a:lvl1pPr>
           </a:lstStyle>
@@ -5611,22 +6053,22 @@
         <p:spPr>
           <a:xfrm>
             <a:off x="6492240" y="3670252"/>
-            <a:ext cx="2103121" cy="797656"/>
-          </a:xfrm>
-          <a:prstGeom prst="rect">
-            <a:avLst/>
-          </a:prstGeom>
-          <a:ln w="12700">
-            <a:miter lim="400000"/>
-          </a:ln>
-          <a:extLst>
-            <a:ext uri="{C572A759-6A51-4108-AA02-DFA0A04FC94B}">
-              <ma14:wrappingTextBoxFlag xmlns:ma14="http://schemas.microsoft.com/office/mac/drawingml/2011/main" val="1"/>
-            </a:ext>
-          </a:extLst>
-        </p:spPr>
-        <p:txBody>
-          <a:bodyPr lIns="45719" rIns="45719" anchor="ctr">
+            <a:ext cx="2103122" cy="797654"/>
+          </a:xfrm>
+          <a:prstGeom prst="rect">
+            <a:avLst/>
+          </a:prstGeom>
+          <a:ln w="12700">
+            <a:miter lim="400000"/>
+          </a:ln>
+          <a:extLst>
+            <a:ext uri="{C572A759-6A51-4108-AA02-DFA0A04FC94B}">
+              <ma14:wrappingTextBoxFlag xmlns:ma14="http://schemas.microsoft.com/office/mac/drawingml/2011/main" val="1"/>
+            </a:ext>
+          </a:extLst>
+        </p:spPr>
+        <p:txBody>
+          <a:bodyPr lIns="45718" tIns="45718" rIns="45718" bIns="45718" anchor="ctr">
             <a:spAutoFit/>
           </a:bodyPr>
           <a:lstStyle>
@@ -5635,6 +6077,10 @@
                 <a:solidFill>
                   <a:srgbClr val="6B6A66"/>
                 </a:solidFill>
+                <a:latin typeface="+mn-lt"/>
+                <a:ea typeface="+mn-ea"/>
+                <a:cs typeface="+mn-cs"/>
+                <a:sym typeface="Arial"/>
               </a:defRPr>
             </a:lvl1pPr>
           </a:lstStyle>
@@ -5655,7 +6101,7 @@
         <p:spPr>
           <a:xfrm>
             <a:off x="9006840" y="1828800"/>
-            <a:ext cx="2560321" cy="3108961"/>
+            <a:ext cx="2560322" cy="3108962"/>
           </a:xfrm>
           <a:prstGeom prst="roundRect">
             <a:avLst>
@@ -5672,10 +6118,17 @@
           </a:ln>
         </p:spPr>
         <p:txBody>
-          <a:bodyPr lIns="45719" rIns="45719"/>
+          <a:bodyPr lIns="45718" tIns="45718" rIns="45718" bIns="45718"/>
           <a:lstStyle/>
           <a:p>
-            <a:pPr/>
+            <a:pPr>
+              <a:defRPr>
+                <a:latin typeface="+mn-lt"/>
+                <a:ea typeface="+mn-ea"/>
+                <a:cs typeface="+mn-cs"/>
+                <a:sym typeface="Arial"/>
+              </a:defRPr>
+            </a:pPr>
           </a:p>
         </p:txBody>
       </p:sp>
@@ -5687,23 +6140,23 @@
         </p:nvSpPr>
         <p:spPr>
           <a:xfrm>
-            <a:off x="9281160" y="2069080"/>
-            <a:ext cx="2103121" cy="708160"/>
-          </a:xfrm>
-          <a:prstGeom prst="rect">
-            <a:avLst/>
-          </a:prstGeom>
-          <a:ln w="12700">
-            <a:miter lim="400000"/>
-          </a:ln>
-          <a:extLst>
-            <a:ext uri="{C572A759-6A51-4108-AA02-DFA0A04FC94B}">
-              <ma14:wrappingTextBoxFlag xmlns:ma14="http://schemas.microsoft.com/office/mac/drawingml/2011/main" val="1"/>
-            </a:ext>
-          </a:extLst>
-        </p:spPr>
-        <p:txBody>
-          <a:bodyPr lIns="45719" rIns="45719" anchor="ctr">
+            <a:off x="9281159" y="2069080"/>
+            <a:ext cx="2103122" cy="708158"/>
+          </a:xfrm>
+          <a:prstGeom prst="rect">
+            <a:avLst/>
+          </a:prstGeom>
+          <a:ln w="12700">
+            <a:miter lim="400000"/>
+          </a:ln>
+          <a:extLst>
+            <a:ext uri="{C572A759-6A51-4108-AA02-DFA0A04FC94B}">
+              <ma14:wrappingTextBoxFlag xmlns:ma14="http://schemas.microsoft.com/office/mac/drawingml/2011/main" val="1"/>
+            </a:ext>
+          </a:extLst>
+        </p:spPr>
+        <p:txBody>
+          <a:bodyPr lIns="45718" tIns="45718" rIns="45718" bIns="45718" anchor="ctr">
             <a:spAutoFit/>
           </a:bodyPr>
           <a:lstStyle>
@@ -5712,6 +6165,10 @@
                 <a:solidFill>
                   <a:srgbClr val="2A78D6"/>
                 </a:solidFill>
+                <a:latin typeface="+mn-lt"/>
+                <a:ea typeface="+mn-ea"/>
+                <a:cs typeface="+mn-cs"/>
+                <a:sym typeface="Arial"/>
               </a:defRPr>
             </a:lvl1pPr>
           </a:lstStyle>
@@ -5731,23 +6188,23 @@
         </p:nvSpPr>
         <p:spPr>
           <a:xfrm>
-            <a:off x="9281160" y="2958406"/>
-            <a:ext cx="2103121" cy="301108"/>
-          </a:xfrm>
-          <a:prstGeom prst="rect">
-            <a:avLst/>
-          </a:prstGeom>
-          <a:ln w="12700">
-            <a:miter lim="400000"/>
-          </a:ln>
-          <a:extLst>
-            <a:ext uri="{C572A759-6A51-4108-AA02-DFA0A04FC94B}">
-              <ma14:wrappingTextBoxFlag xmlns:ma14="http://schemas.microsoft.com/office/mac/drawingml/2011/main" val="1"/>
-            </a:ext>
-          </a:extLst>
-        </p:spPr>
-        <p:txBody>
-          <a:bodyPr lIns="45719" rIns="45719" anchor="ctr">
+            <a:off x="9281159" y="2958407"/>
+            <a:ext cx="2103122" cy="301106"/>
+          </a:xfrm>
+          <a:prstGeom prst="rect">
+            <a:avLst/>
+          </a:prstGeom>
+          <a:ln w="12700">
+            <a:miter lim="400000"/>
+          </a:ln>
+          <a:extLst>
+            <a:ext uri="{C572A759-6A51-4108-AA02-DFA0A04FC94B}">
+              <ma14:wrappingTextBoxFlag xmlns:ma14="http://schemas.microsoft.com/office/mac/drawingml/2011/main" val="1"/>
+            </a:ext>
+          </a:extLst>
+        </p:spPr>
+        <p:txBody>
+          <a:bodyPr lIns="45718" tIns="45718" rIns="45718" bIns="45718" anchor="ctr">
             <a:spAutoFit/>
           </a:bodyPr>
           <a:lstStyle>
@@ -5756,6 +6213,10 @@
                 <a:solidFill>
                   <a:srgbClr val="0B0B0B"/>
                 </a:solidFill>
+                <a:latin typeface="+mn-lt"/>
+                <a:ea typeface="+mn-ea"/>
+                <a:cs typeface="+mn-cs"/>
+                <a:sym typeface="Arial"/>
               </a:defRPr>
             </a:lvl1pPr>
           </a:lstStyle>
@@ -5775,23 +6236,23 @@
         </p:nvSpPr>
         <p:spPr>
           <a:xfrm>
-            <a:off x="9281160" y="3759152"/>
-            <a:ext cx="2103121" cy="619856"/>
-          </a:xfrm>
-          <a:prstGeom prst="rect">
-            <a:avLst/>
-          </a:prstGeom>
-          <a:ln w="12700">
-            <a:miter lim="400000"/>
-          </a:ln>
-          <a:extLst>
-            <a:ext uri="{C572A759-6A51-4108-AA02-DFA0A04FC94B}">
-              <ma14:wrappingTextBoxFlag xmlns:ma14="http://schemas.microsoft.com/office/mac/drawingml/2011/main" val="1"/>
-            </a:ext>
-          </a:extLst>
-        </p:spPr>
-        <p:txBody>
-          <a:bodyPr lIns="45719" rIns="45719" anchor="ctr">
+            <a:off x="9281159" y="3759152"/>
+            <a:ext cx="2103122" cy="619854"/>
+          </a:xfrm>
+          <a:prstGeom prst="rect">
+            <a:avLst/>
+          </a:prstGeom>
+          <a:ln w="12700">
+            <a:miter lim="400000"/>
+          </a:ln>
+          <a:extLst>
+            <a:ext uri="{C572A759-6A51-4108-AA02-DFA0A04FC94B}">
+              <ma14:wrappingTextBoxFlag xmlns:ma14="http://schemas.microsoft.com/office/mac/drawingml/2011/main" val="1"/>
+            </a:ext>
+          </a:extLst>
+        </p:spPr>
+        <p:txBody>
+          <a:bodyPr lIns="45718" tIns="45718" rIns="45718" bIns="45718" anchor="ctr">
             <a:spAutoFit/>
           </a:bodyPr>
           <a:lstStyle>
@@ -5800,6 +6261,10 @@
                 <a:solidFill>
                   <a:srgbClr val="6B6A66"/>
                 </a:solidFill>
+                <a:latin typeface="+mn-lt"/>
+                <a:ea typeface="+mn-ea"/>
+                <a:cs typeface="+mn-cs"/>
+                <a:sym typeface="Arial"/>
               </a:defRPr>
             </a:lvl1pPr>
           </a:lstStyle>
@@ -5819,23 +6284,23 @@
         </p:nvSpPr>
         <p:spPr>
           <a:xfrm>
-            <a:off x="685800" y="6448897"/>
-            <a:ext cx="5394961" cy="214702"/>
-          </a:xfrm>
-          <a:prstGeom prst="rect">
-            <a:avLst/>
-          </a:prstGeom>
-          <a:ln w="12700">
-            <a:miter lim="400000"/>
-          </a:ln>
-          <a:extLst>
-            <a:ext uri="{C572A759-6A51-4108-AA02-DFA0A04FC94B}">
-              <ma14:wrappingTextBoxFlag xmlns:ma14="http://schemas.microsoft.com/office/mac/drawingml/2011/main" val="1"/>
-            </a:ext>
-          </a:extLst>
-        </p:spPr>
-        <p:txBody>
-          <a:bodyPr lIns="45719" rIns="45719" anchor="ctr">
+            <a:off x="685799" y="6448898"/>
+            <a:ext cx="5394963" cy="214699"/>
+          </a:xfrm>
+          <a:prstGeom prst="rect">
+            <a:avLst/>
+          </a:prstGeom>
+          <a:ln w="12700">
+            <a:miter lim="400000"/>
+          </a:ln>
+          <a:extLst>
+            <a:ext uri="{C572A759-6A51-4108-AA02-DFA0A04FC94B}">
+              <ma14:wrappingTextBoxFlag xmlns:ma14="http://schemas.microsoft.com/office/mac/drawingml/2011/main" val="1"/>
+            </a:ext>
+          </a:extLst>
+        </p:spPr>
+        <p:txBody>
+          <a:bodyPr lIns="45718" tIns="45718" rIns="45718" bIns="45718" anchor="ctr">
             <a:spAutoFit/>
           </a:bodyPr>
           <a:lstStyle>
@@ -5844,6 +6309,10 @@
                 <a:solidFill>
                   <a:srgbClr val="6B6A66"/>
                 </a:solidFill>
+                <a:latin typeface="+mn-lt"/>
+                <a:ea typeface="+mn-ea"/>
+                <a:cs typeface="+mn-cs"/>
+                <a:sym typeface="Arial"/>
               </a:defRPr>
             </a:lvl1pPr>
           </a:lstStyle>
@@ -5863,23 +6332,23 @@
         </p:nvSpPr>
         <p:spPr>
           <a:xfrm>
-            <a:off x="11201400" y="6448897"/>
-            <a:ext cx="457201" cy="214702"/>
-          </a:xfrm>
-          <a:prstGeom prst="rect">
-            <a:avLst/>
-          </a:prstGeom>
-          <a:ln w="12700">
-            <a:miter lim="400000"/>
-          </a:ln>
-          <a:extLst>
-            <a:ext uri="{C572A759-6A51-4108-AA02-DFA0A04FC94B}">
-              <ma14:wrappingTextBoxFlag xmlns:ma14="http://schemas.microsoft.com/office/mac/drawingml/2011/main" val="1"/>
-            </a:ext>
-          </a:extLst>
-        </p:spPr>
-        <p:txBody>
-          <a:bodyPr lIns="45719" rIns="45719" anchor="ctr">
+            <a:off x="11201399" y="6448898"/>
+            <a:ext cx="457203" cy="214699"/>
+          </a:xfrm>
+          <a:prstGeom prst="rect">
+            <a:avLst/>
+          </a:prstGeom>
+          <a:ln w="12700">
+            <a:miter lim="400000"/>
+          </a:ln>
+          <a:extLst>
+            <a:ext uri="{C572A759-6A51-4108-AA02-DFA0A04FC94B}">
+              <ma14:wrappingTextBoxFlag xmlns:ma14="http://schemas.microsoft.com/office/mac/drawingml/2011/main" val="1"/>
+            </a:ext>
+          </a:extLst>
+        </p:spPr>
+        <p:txBody>
+          <a:bodyPr lIns="45718" tIns="45718" rIns="45718" bIns="45718" anchor="ctr">
             <a:spAutoFit/>
           </a:bodyPr>
           <a:lstStyle>
@@ -5888,6 +6357,10 @@
                 <a:solidFill>
                   <a:srgbClr val="6B6A66"/>
                 </a:solidFill>
+                <a:latin typeface="+mn-lt"/>
+                <a:ea typeface="+mn-ea"/>
+                <a:cs typeface="+mn-cs"/>
+                <a:sym typeface="Arial"/>
               </a:defRPr>
             </a:lvl1pPr>
           </a:lstStyle>
@@ -5934,22 +6407,22 @@
         <p:spPr>
           <a:xfrm>
             <a:off x="685800" y="507952"/>
-            <a:ext cx="10881361" cy="264256"/>
-          </a:xfrm>
-          <a:prstGeom prst="rect">
-            <a:avLst/>
-          </a:prstGeom>
-          <a:ln w="12700">
-            <a:miter lim="400000"/>
-          </a:ln>
-          <a:extLst>
-            <a:ext uri="{C572A759-6A51-4108-AA02-DFA0A04FC94B}">
-              <ma14:wrappingTextBoxFlag xmlns:ma14="http://schemas.microsoft.com/office/mac/drawingml/2011/main" val="1"/>
-            </a:ext>
-          </a:extLst>
-        </p:spPr>
-        <p:txBody>
-          <a:bodyPr lIns="45719" rIns="45719" anchor="ctr">
+            <a:ext cx="10881361" cy="264254"/>
+          </a:xfrm>
+          <a:prstGeom prst="rect">
+            <a:avLst/>
+          </a:prstGeom>
+          <a:ln w="12700">
+            <a:miter lim="400000"/>
+          </a:ln>
+          <a:extLst>
+            <a:ext uri="{C572A759-6A51-4108-AA02-DFA0A04FC94B}">
+              <ma14:wrappingTextBoxFlag xmlns:ma14="http://schemas.microsoft.com/office/mac/drawingml/2011/main" val="1"/>
+            </a:ext>
+          </a:extLst>
+        </p:spPr>
+        <p:txBody>
+          <a:bodyPr lIns="45718" tIns="45718" rIns="45718" bIns="45718" anchor="ctr">
             <a:spAutoFit/>
           </a:bodyPr>
           <a:lstStyle>
@@ -5958,6 +6431,10 @@
                 <a:solidFill>
                   <a:srgbClr val="2A78D6"/>
                 </a:solidFill>
+                <a:latin typeface="+mn-lt"/>
+                <a:ea typeface="+mn-ea"/>
+                <a:cs typeface="+mn-cs"/>
+                <a:sym typeface="Arial"/>
               </a:defRPr>
             </a:lvl1pPr>
           </a:lstStyle>
@@ -5978,22 +6455,22 @@
         <p:spPr>
           <a:xfrm>
             <a:off x="685799" y="891861"/>
-            <a:ext cx="7406642" cy="868038"/>
-          </a:xfrm>
-          <a:prstGeom prst="rect">
-            <a:avLst/>
-          </a:prstGeom>
-          <a:ln w="12700">
-            <a:miter lim="400000"/>
-          </a:ln>
-          <a:extLst>
-            <a:ext uri="{C572A759-6A51-4108-AA02-DFA0A04FC94B}">
-              <ma14:wrappingTextBoxFlag xmlns:ma14="http://schemas.microsoft.com/office/mac/drawingml/2011/main" val="1"/>
-            </a:ext>
-          </a:extLst>
-        </p:spPr>
-        <p:txBody>
-          <a:bodyPr lIns="45719" rIns="45719" anchor="ctr">
+            <a:ext cx="7406641" cy="868037"/>
+          </a:xfrm>
+          <a:prstGeom prst="rect">
+            <a:avLst/>
+          </a:prstGeom>
+          <a:ln w="12700">
+            <a:miter lim="400000"/>
+          </a:ln>
+          <a:extLst>
+            <a:ext uri="{C572A759-6A51-4108-AA02-DFA0A04FC94B}">
+              <ma14:wrappingTextBoxFlag xmlns:ma14="http://schemas.microsoft.com/office/mac/drawingml/2011/main" val="1"/>
+            </a:ext>
+          </a:extLst>
+        </p:spPr>
+        <p:txBody>
+          <a:bodyPr lIns="45718" tIns="45718" rIns="45718" bIns="45718" anchor="ctr">
             <a:spAutoFit/>
           </a:bodyPr>
           <a:lstStyle>
@@ -6002,13 +6479,17 @@
                 <a:solidFill>
                   <a:srgbClr val="0B0B0B"/>
                 </a:solidFill>
-              </a:defRPr>
-            </a:lvl1pPr>
-          </a:lstStyle>
-          <a:p>
-            <a:pPr/>
-            <a:r>
-              <a:t>Sanitation, disease burden, and income drive life expectancy most</a:t>
+                <a:latin typeface="+mn-lt"/>
+                <a:ea typeface="+mn-ea"/>
+                <a:cs typeface="+mn-cs"/>
+                <a:sym typeface="Arial"/>
+              </a:defRPr>
+            </a:lvl1pPr>
+          </a:lstStyle>
+          <a:p>
+            <a:pPr/>
+            <a:r>
+              <a:t>Sanitation, disease burden, income, and climate drive life expectancy most</a:t>
             </a:r>
           </a:p>
         </p:txBody>
@@ -6031,8 +6512,8 @@
         </p:blipFill>
         <p:spPr>
           <a:xfrm>
-            <a:off x="640080" y="1920239"/>
-            <a:ext cx="6858001" cy="4114801"/>
+            <a:off x="640080" y="1920238"/>
+            <a:ext cx="6858001" cy="4114803"/>
           </a:xfrm>
           <a:prstGeom prst="rect">
             <a:avLst/>
@@ -6050,8 +6531,8 @@
         </p:nvSpPr>
         <p:spPr>
           <a:xfrm>
-            <a:off x="8229600" y="2011679"/>
-            <a:ext cx="3291841" cy="2011681"/>
+            <a:off x="8229600" y="2011678"/>
+            <a:ext cx="3291841" cy="2011683"/>
           </a:xfrm>
           <a:prstGeom prst="roundRect">
             <a:avLst>
@@ -6068,10 +6549,17 @@
           </a:ln>
         </p:spPr>
         <p:txBody>
-          <a:bodyPr lIns="45719" rIns="45719"/>
+          <a:bodyPr lIns="45718" tIns="45718" rIns="45718" bIns="45718"/>
           <a:lstStyle/>
           <a:p>
-            <a:pPr/>
+            <a:pPr>
+              <a:defRPr>
+                <a:latin typeface="+mn-lt"/>
+                <a:ea typeface="+mn-ea"/>
+                <a:cs typeface="+mn-cs"/>
+                <a:sym typeface="Arial"/>
+              </a:defRPr>
+            </a:pPr>
           </a:p>
         </p:txBody>
       </p:sp>
@@ -6083,23 +6571,23 @@
         </p:nvSpPr>
         <p:spPr>
           <a:xfrm>
-            <a:off x="8503919" y="2208251"/>
-            <a:ext cx="2834642" cy="338378"/>
-          </a:xfrm>
-          <a:prstGeom prst="rect">
-            <a:avLst/>
-          </a:prstGeom>
-          <a:ln w="12700">
-            <a:miter lim="400000"/>
-          </a:ln>
-          <a:extLst>
-            <a:ext uri="{C572A759-6A51-4108-AA02-DFA0A04FC94B}">
-              <ma14:wrappingTextBoxFlag xmlns:ma14="http://schemas.microsoft.com/office/mac/drawingml/2011/main" val="1"/>
-            </a:ext>
-          </a:extLst>
-        </p:spPr>
-        <p:txBody>
-          <a:bodyPr lIns="45719" rIns="45719" anchor="ctr">
+            <a:off x="8503918" y="2208252"/>
+            <a:ext cx="2834643" cy="338375"/>
+          </a:xfrm>
+          <a:prstGeom prst="rect">
+            <a:avLst/>
+          </a:prstGeom>
+          <a:ln w="12700">
+            <a:miter lim="400000"/>
+          </a:ln>
+          <a:extLst>
+            <a:ext uri="{C572A759-6A51-4108-AA02-DFA0A04FC94B}">
+              <ma14:wrappingTextBoxFlag xmlns:ma14="http://schemas.microsoft.com/office/mac/drawingml/2011/main" val="1"/>
+            </a:ext>
+          </a:extLst>
+        </p:spPr>
+        <p:txBody>
+          <a:bodyPr lIns="45718" tIns="45718" rIns="45718" bIns="45718" anchor="ctr">
             <a:spAutoFit/>
           </a:bodyPr>
           <a:lstStyle>
@@ -6108,6 +6596,10 @@
                 <a:solidFill>
                   <a:srgbClr val="0B0B0B"/>
                 </a:solidFill>
+                <a:latin typeface="+mn-lt"/>
+                <a:ea typeface="+mn-ea"/>
+                <a:cs typeface="+mn-cs"/>
+                <a:sym typeface="Arial"/>
               </a:defRPr>
             </a:lvl1pPr>
           </a:lstStyle>
@@ -6127,23 +6619,23 @@
         </p:nvSpPr>
         <p:spPr>
           <a:xfrm>
-            <a:off x="8503919" y="2822100"/>
-            <a:ext cx="2834642" cy="848040"/>
-          </a:xfrm>
-          <a:prstGeom prst="rect">
-            <a:avLst/>
-          </a:prstGeom>
-          <a:ln w="12700">
-            <a:miter lim="400000"/>
-          </a:ln>
-          <a:extLst>
-            <a:ext uri="{C572A759-6A51-4108-AA02-DFA0A04FC94B}">
-              <ma14:wrappingTextBoxFlag xmlns:ma14="http://schemas.microsoft.com/office/mac/drawingml/2011/main" val="1"/>
-            </a:ext>
-          </a:extLst>
-        </p:spPr>
-        <p:txBody>
-          <a:bodyPr lIns="45719" rIns="45719" anchor="ctr">
+            <a:off x="8503918" y="2631601"/>
+            <a:ext cx="2834643" cy="1229038"/>
+          </a:xfrm>
+          <a:prstGeom prst="rect">
+            <a:avLst/>
+          </a:prstGeom>
+          <a:ln w="12700">
+            <a:miter lim="400000"/>
+          </a:ln>
+          <a:extLst>
+            <a:ext uri="{C572A759-6A51-4108-AA02-DFA0A04FC94B}">
+              <ma14:wrappingTextBoxFlag xmlns:ma14="http://schemas.microsoft.com/office/mac/drawingml/2011/main" val="1"/>
+            </a:ext>
+          </a:extLst>
+        </p:spPr>
+        <p:txBody>
+          <a:bodyPr lIns="45718" tIns="45718" rIns="45718" bIns="45718" anchor="ctr">
             <a:spAutoFit/>
           </a:bodyPr>
           <a:lstStyle>
@@ -6152,13 +6644,17 @@
                 <a:solidFill>
                   <a:srgbClr val="6B6A66"/>
                 </a:solidFill>
-              </a:defRPr>
-            </a:lvl1pPr>
-          </a:lstStyle>
-          <a:p>
-            <a:pPr/>
-            <a:r>
-              <a:t>Basic sanitation access is the largest lever (~1.9 yrs), ahead of TB, HIV, and income. This ranking is the policy priority list.</a:t>
+                <a:latin typeface="+mn-lt"/>
+                <a:ea typeface="+mn-ea"/>
+                <a:cs typeface="+mn-cs"/>
+                <a:sym typeface="Arial"/>
+              </a:defRPr>
+            </a:lvl1pPr>
+          </a:lstStyle>
+          <a:p>
+            <a:pPr/>
+            <a:r>
+              <a:t>Basic sanitation access is the largest lever (~1.9 yrs), ahead of TB, HIV, income, and agriculture share. Climate factors add 0.5 years of signal. This ranking is the policy priority list.</a:t>
             </a:r>
           </a:p>
         </p:txBody>
@@ -6171,23 +6667,23 @@
         </p:nvSpPr>
         <p:spPr>
           <a:xfrm>
-            <a:off x="685800" y="6448897"/>
-            <a:ext cx="5394961" cy="214702"/>
-          </a:xfrm>
-          <a:prstGeom prst="rect">
-            <a:avLst/>
-          </a:prstGeom>
-          <a:ln w="12700">
-            <a:miter lim="400000"/>
-          </a:ln>
-          <a:extLst>
-            <a:ext uri="{C572A759-6A51-4108-AA02-DFA0A04FC94B}">
-              <ma14:wrappingTextBoxFlag xmlns:ma14="http://schemas.microsoft.com/office/mac/drawingml/2011/main" val="1"/>
-            </a:ext>
-          </a:extLst>
-        </p:spPr>
-        <p:txBody>
-          <a:bodyPr lIns="45719" rIns="45719" anchor="ctr">
+            <a:off x="685799" y="6448898"/>
+            <a:ext cx="5394963" cy="214699"/>
+          </a:xfrm>
+          <a:prstGeom prst="rect">
+            <a:avLst/>
+          </a:prstGeom>
+          <a:ln w="12700">
+            <a:miter lim="400000"/>
+          </a:ln>
+          <a:extLst>
+            <a:ext uri="{C572A759-6A51-4108-AA02-DFA0A04FC94B}">
+              <ma14:wrappingTextBoxFlag xmlns:ma14="http://schemas.microsoft.com/office/mac/drawingml/2011/main" val="1"/>
+            </a:ext>
+          </a:extLst>
+        </p:spPr>
+        <p:txBody>
+          <a:bodyPr lIns="45718" tIns="45718" rIns="45718" bIns="45718" anchor="ctr">
             <a:spAutoFit/>
           </a:bodyPr>
           <a:lstStyle>
@@ -6196,6 +6692,10 @@
                 <a:solidFill>
                   <a:srgbClr val="6B6A66"/>
                 </a:solidFill>
+                <a:latin typeface="+mn-lt"/>
+                <a:ea typeface="+mn-ea"/>
+                <a:cs typeface="+mn-cs"/>
+                <a:sym typeface="Arial"/>
               </a:defRPr>
             </a:lvl1pPr>
           </a:lstStyle>
@@ -6215,23 +6715,23 @@
         </p:nvSpPr>
         <p:spPr>
           <a:xfrm>
-            <a:off x="11201400" y="6448897"/>
-            <a:ext cx="457201" cy="214702"/>
-          </a:xfrm>
-          <a:prstGeom prst="rect">
-            <a:avLst/>
-          </a:prstGeom>
-          <a:ln w="12700">
-            <a:miter lim="400000"/>
-          </a:ln>
-          <a:extLst>
-            <a:ext uri="{C572A759-6A51-4108-AA02-DFA0A04FC94B}">
-              <ma14:wrappingTextBoxFlag xmlns:ma14="http://schemas.microsoft.com/office/mac/drawingml/2011/main" val="1"/>
-            </a:ext>
-          </a:extLst>
-        </p:spPr>
-        <p:txBody>
-          <a:bodyPr lIns="45719" rIns="45719" anchor="ctr">
+            <a:off x="11201399" y="6448898"/>
+            <a:ext cx="457203" cy="214699"/>
+          </a:xfrm>
+          <a:prstGeom prst="rect">
+            <a:avLst/>
+          </a:prstGeom>
+          <a:ln w="12700">
+            <a:miter lim="400000"/>
+          </a:ln>
+          <a:extLst>
+            <a:ext uri="{C572A759-6A51-4108-AA02-DFA0A04FC94B}">
+              <ma14:wrappingTextBoxFlag xmlns:ma14="http://schemas.microsoft.com/office/mac/drawingml/2011/main" val="1"/>
+            </a:ext>
+          </a:extLst>
+        </p:spPr>
+        <p:txBody>
+          <a:bodyPr lIns="45718" tIns="45718" rIns="45718" bIns="45718" anchor="ctr">
             <a:spAutoFit/>
           </a:bodyPr>
           <a:lstStyle>
@@ -6240,6 +6740,10 @@
                 <a:solidFill>
                   <a:srgbClr val="6B6A66"/>
                 </a:solidFill>
+                <a:latin typeface="+mn-lt"/>
+                <a:ea typeface="+mn-ea"/>
+                <a:cs typeface="+mn-cs"/>
+                <a:sym typeface="Arial"/>
               </a:defRPr>
             </a:lvl1pPr>
           </a:lstStyle>
@@ -6286,22 +6790,22 @@
         <p:spPr>
           <a:xfrm>
             <a:off x="685800" y="507952"/>
-            <a:ext cx="10881361" cy="264256"/>
-          </a:xfrm>
-          <a:prstGeom prst="rect">
-            <a:avLst/>
-          </a:prstGeom>
-          <a:ln w="12700">
-            <a:miter lim="400000"/>
-          </a:ln>
-          <a:extLst>
-            <a:ext uri="{C572A759-6A51-4108-AA02-DFA0A04FC94B}">
-              <ma14:wrappingTextBoxFlag xmlns:ma14="http://schemas.microsoft.com/office/mac/drawingml/2011/main" val="1"/>
-            </a:ext>
-          </a:extLst>
-        </p:spPr>
-        <p:txBody>
-          <a:bodyPr lIns="45719" rIns="45719" anchor="ctr">
+            <a:ext cx="10881361" cy="264254"/>
+          </a:xfrm>
+          <a:prstGeom prst="rect">
+            <a:avLst/>
+          </a:prstGeom>
+          <a:ln w="12700">
+            <a:miter lim="400000"/>
+          </a:ln>
+          <a:extLst>
+            <a:ext uri="{C572A759-6A51-4108-AA02-DFA0A04FC94B}">
+              <ma14:wrappingTextBoxFlag xmlns:ma14="http://schemas.microsoft.com/office/mac/drawingml/2011/main" val="1"/>
+            </a:ext>
+          </a:extLst>
+        </p:spPr>
+        <p:txBody>
+          <a:bodyPr lIns="45718" tIns="45718" rIns="45718" bIns="45718" anchor="ctr">
             <a:spAutoFit/>
           </a:bodyPr>
           <a:lstStyle>
@@ -6310,6 +6814,10 @@
                 <a:solidFill>
                   <a:srgbClr val="2A78D6"/>
                 </a:solidFill>
+                <a:latin typeface="+mn-lt"/>
+                <a:ea typeface="+mn-ea"/>
+                <a:cs typeface="+mn-cs"/>
+                <a:sym typeface="Arial"/>
               </a:defRPr>
             </a:lvl1pPr>
           </a:lstStyle>
@@ -6330,22 +6838,22 @@
         <p:spPr>
           <a:xfrm>
             <a:off x="685799" y="1088711"/>
-            <a:ext cx="7406642" cy="474338"/>
-          </a:xfrm>
-          <a:prstGeom prst="rect">
-            <a:avLst/>
-          </a:prstGeom>
-          <a:ln w="12700">
-            <a:miter lim="400000"/>
-          </a:ln>
-          <a:extLst>
-            <a:ext uri="{C572A759-6A51-4108-AA02-DFA0A04FC94B}">
-              <ma14:wrappingTextBoxFlag xmlns:ma14="http://schemas.microsoft.com/office/mac/drawingml/2011/main" val="1"/>
-            </a:ext>
-          </a:extLst>
-        </p:spPr>
-        <p:txBody>
-          <a:bodyPr lIns="45719" rIns="45719" anchor="ctr">
+            <a:ext cx="7406641" cy="474337"/>
+          </a:xfrm>
+          <a:prstGeom prst="rect">
+            <a:avLst/>
+          </a:prstGeom>
+          <a:ln w="12700">
+            <a:miter lim="400000"/>
+          </a:ln>
+          <a:extLst>
+            <a:ext uri="{C572A759-6A51-4108-AA02-DFA0A04FC94B}">
+              <ma14:wrappingTextBoxFlag xmlns:ma14="http://schemas.microsoft.com/office/mac/drawingml/2011/main" val="1"/>
+            </a:ext>
+          </a:extLst>
+        </p:spPr>
+        <p:txBody>
+          <a:bodyPr lIns="45718" tIns="45718" rIns="45718" bIns="45718" anchor="ctr">
             <a:spAutoFit/>
           </a:bodyPr>
           <a:lstStyle>
@@ -6354,6 +6862,10 @@
                 <a:solidFill>
                   <a:srgbClr val="0B0B0B"/>
                 </a:solidFill>
+                <a:latin typeface="+mn-lt"/>
+                <a:ea typeface="+mn-ea"/>
+                <a:cs typeface="+mn-cs"/>
+                <a:sym typeface="Arial"/>
               </a:defRPr>
             </a:lvl1pPr>
           </a:lstStyle>
@@ -6383,8 +6895,8 @@
         </p:blipFill>
         <p:spPr>
           <a:xfrm>
-            <a:off x="640080" y="1920239"/>
-            <a:ext cx="6858001" cy="4114801"/>
+            <a:off x="640080" y="1920238"/>
+            <a:ext cx="6858001" cy="4114803"/>
           </a:xfrm>
           <a:prstGeom prst="rect">
             <a:avLst/>
@@ -6402,8 +6914,8 @@
         </p:nvSpPr>
         <p:spPr>
           <a:xfrm>
-            <a:off x="8229600" y="2011679"/>
-            <a:ext cx="3291841" cy="2011681"/>
+            <a:off x="8229600" y="2011678"/>
+            <a:ext cx="3291841" cy="2011683"/>
           </a:xfrm>
           <a:prstGeom prst="roundRect">
             <a:avLst>
@@ -6420,10 +6932,17 @@
           </a:ln>
         </p:spPr>
         <p:txBody>
-          <a:bodyPr lIns="45719" rIns="45719"/>
+          <a:bodyPr lIns="45718" tIns="45718" rIns="45718" bIns="45718"/>
           <a:lstStyle/>
           <a:p>
-            <a:pPr/>
+            <a:pPr>
+              <a:defRPr>
+                <a:latin typeface="+mn-lt"/>
+                <a:ea typeface="+mn-ea"/>
+                <a:cs typeface="+mn-cs"/>
+                <a:sym typeface="Arial"/>
+              </a:defRPr>
+            </a:pPr>
           </a:p>
         </p:txBody>
       </p:sp>
@@ -6435,23 +6954,23 @@
         </p:nvSpPr>
         <p:spPr>
           <a:xfrm>
-            <a:off x="8503919" y="2208251"/>
-            <a:ext cx="2834642" cy="338378"/>
-          </a:xfrm>
-          <a:prstGeom prst="rect">
-            <a:avLst/>
-          </a:prstGeom>
-          <a:ln w="12700">
-            <a:miter lim="400000"/>
-          </a:ln>
-          <a:extLst>
-            <a:ext uri="{C572A759-6A51-4108-AA02-DFA0A04FC94B}">
-              <ma14:wrappingTextBoxFlag xmlns:ma14="http://schemas.microsoft.com/office/mac/drawingml/2011/main" val="1"/>
-            </a:ext>
-          </a:extLst>
-        </p:spPr>
-        <p:txBody>
-          <a:bodyPr lIns="45719" rIns="45719" anchor="ctr">
+            <a:off x="8503918" y="2208252"/>
+            <a:ext cx="2834643" cy="338375"/>
+          </a:xfrm>
+          <a:prstGeom prst="rect">
+            <a:avLst/>
+          </a:prstGeom>
+          <a:ln w="12700">
+            <a:miter lim="400000"/>
+          </a:ln>
+          <a:extLst>
+            <a:ext uri="{C572A759-6A51-4108-AA02-DFA0A04FC94B}">
+              <ma14:wrappingTextBoxFlag xmlns:ma14="http://schemas.microsoft.com/office/mac/drawingml/2011/main" val="1"/>
+            </a:ext>
+          </a:extLst>
+        </p:spPr>
+        <p:txBody>
+          <a:bodyPr lIns="45718" tIns="45718" rIns="45718" bIns="45718" anchor="ctr">
             <a:spAutoFit/>
           </a:bodyPr>
           <a:lstStyle>
@@ -6460,6 +6979,10 @@
                 <a:solidFill>
                   <a:srgbClr val="0B0B0B"/>
                 </a:solidFill>
+                <a:latin typeface="+mn-lt"/>
+                <a:ea typeface="+mn-ea"/>
+                <a:cs typeface="+mn-cs"/>
+                <a:sym typeface="Arial"/>
               </a:defRPr>
             </a:lvl1pPr>
           </a:lstStyle>
@@ -6479,23 +7002,23 @@
         </p:nvSpPr>
         <p:spPr>
           <a:xfrm>
-            <a:off x="8503919" y="2822100"/>
-            <a:ext cx="2834642" cy="848040"/>
-          </a:xfrm>
-          <a:prstGeom prst="rect">
-            <a:avLst/>
-          </a:prstGeom>
-          <a:ln w="12700">
-            <a:miter lim="400000"/>
-          </a:ln>
-          <a:extLst>
-            <a:ext uri="{C572A759-6A51-4108-AA02-DFA0A04FC94B}">
-              <ma14:wrappingTextBoxFlag xmlns:ma14="http://schemas.microsoft.com/office/mac/drawingml/2011/main" val="1"/>
-            </a:ext>
-          </a:extLst>
-        </p:spPr>
-        <p:txBody>
-          <a:bodyPr lIns="45719" rIns="45719" anchor="ctr">
+            <a:off x="8503918" y="2822101"/>
+            <a:ext cx="2834643" cy="848037"/>
+          </a:xfrm>
+          <a:prstGeom prst="rect">
+            <a:avLst/>
+          </a:prstGeom>
+          <a:ln w="12700">
+            <a:miter lim="400000"/>
+          </a:ln>
+          <a:extLst>
+            <a:ext uri="{C572A759-6A51-4108-AA02-DFA0A04FC94B}">
+              <ma14:wrappingTextBoxFlag xmlns:ma14="http://schemas.microsoft.com/office/mac/drawingml/2011/main" val="1"/>
+            </a:ext>
+          </a:extLst>
+        </p:spPr>
+        <p:txBody>
+          <a:bodyPr lIns="45718" tIns="45718" rIns="45718" bIns="45718" anchor="ctr">
             <a:spAutoFit/>
           </a:bodyPr>
           <a:lstStyle>
@@ -6504,6 +7027,10 @@
                 <a:solidFill>
                   <a:srgbClr val="6B6A66"/>
                 </a:solidFill>
+                <a:latin typeface="+mn-lt"/>
+                <a:ea typeface="+mn-ea"/>
+                <a:cs typeface="+mn-cs"/>
+                <a:sym typeface="Arial"/>
               </a:defRPr>
             </a:lvl1pPr>
           </a:lstStyle>
@@ -6523,23 +7050,23 @@
         </p:nvSpPr>
         <p:spPr>
           <a:xfrm>
-            <a:off x="685800" y="6448897"/>
-            <a:ext cx="5394961" cy="214702"/>
-          </a:xfrm>
-          <a:prstGeom prst="rect">
-            <a:avLst/>
-          </a:prstGeom>
-          <a:ln w="12700">
-            <a:miter lim="400000"/>
-          </a:ln>
-          <a:extLst>
-            <a:ext uri="{C572A759-6A51-4108-AA02-DFA0A04FC94B}">
-              <ma14:wrappingTextBoxFlag xmlns:ma14="http://schemas.microsoft.com/office/mac/drawingml/2011/main" val="1"/>
-            </a:ext>
-          </a:extLst>
-        </p:spPr>
-        <p:txBody>
-          <a:bodyPr lIns="45719" rIns="45719" anchor="ctr">
+            <a:off x="685799" y="6448898"/>
+            <a:ext cx="5394963" cy="214699"/>
+          </a:xfrm>
+          <a:prstGeom prst="rect">
+            <a:avLst/>
+          </a:prstGeom>
+          <a:ln w="12700">
+            <a:miter lim="400000"/>
+          </a:ln>
+          <a:extLst>
+            <a:ext uri="{C572A759-6A51-4108-AA02-DFA0A04FC94B}">
+              <ma14:wrappingTextBoxFlag xmlns:ma14="http://schemas.microsoft.com/office/mac/drawingml/2011/main" val="1"/>
+            </a:ext>
+          </a:extLst>
+        </p:spPr>
+        <p:txBody>
+          <a:bodyPr lIns="45718" tIns="45718" rIns="45718" bIns="45718" anchor="ctr">
             <a:spAutoFit/>
           </a:bodyPr>
           <a:lstStyle>
@@ -6548,6 +7075,10 @@
                 <a:solidFill>
                   <a:srgbClr val="6B6A66"/>
                 </a:solidFill>
+                <a:latin typeface="+mn-lt"/>
+                <a:ea typeface="+mn-ea"/>
+                <a:cs typeface="+mn-cs"/>
+                <a:sym typeface="Arial"/>
               </a:defRPr>
             </a:lvl1pPr>
           </a:lstStyle>
@@ -6567,23 +7098,23 @@
         </p:nvSpPr>
         <p:spPr>
           <a:xfrm>
-            <a:off x="11201400" y="6448897"/>
-            <a:ext cx="457201" cy="214702"/>
-          </a:xfrm>
-          <a:prstGeom prst="rect">
-            <a:avLst/>
-          </a:prstGeom>
-          <a:ln w="12700">
-            <a:miter lim="400000"/>
-          </a:ln>
-          <a:extLst>
-            <a:ext uri="{C572A759-6A51-4108-AA02-DFA0A04FC94B}">
-              <ma14:wrappingTextBoxFlag xmlns:ma14="http://schemas.microsoft.com/office/mac/drawingml/2011/main" val="1"/>
-            </a:ext>
-          </a:extLst>
-        </p:spPr>
-        <p:txBody>
-          <a:bodyPr lIns="45719" rIns="45719" anchor="ctr">
+            <a:off x="11201399" y="6448898"/>
+            <a:ext cx="457203" cy="214699"/>
+          </a:xfrm>
+          <a:prstGeom prst="rect">
+            <a:avLst/>
+          </a:prstGeom>
+          <a:ln w="12700">
+            <a:miter lim="400000"/>
+          </a:ln>
+          <a:extLst>
+            <a:ext uri="{C572A759-6A51-4108-AA02-DFA0A04FC94B}">
+              <ma14:wrappingTextBoxFlag xmlns:ma14="http://schemas.microsoft.com/office/mac/drawingml/2011/main" val="1"/>
+            </a:ext>
+          </a:extLst>
+        </p:spPr>
+        <p:txBody>
+          <a:bodyPr lIns="45718" tIns="45718" rIns="45718" bIns="45718" anchor="ctr">
             <a:spAutoFit/>
           </a:bodyPr>
           <a:lstStyle>
@@ -6592,6 +7123,10 @@
                 <a:solidFill>
                   <a:srgbClr val="6B6A66"/>
                 </a:solidFill>
+                <a:latin typeface="+mn-lt"/>
+                <a:ea typeface="+mn-ea"/>
+                <a:cs typeface="+mn-cs"/>
+                <a:sym typeface="Arial"/>
               </a:defRPr>
             </a:lvl1pPr>
           </a:lstStyle>
@@ -6638,22 +7173,22 @@
         <p:spPr>
           <a:xfrm>
             <a:off x="685800" y="507952"/>
-            <a:ext cx="10881361" cy="264256"/>
-          </a:xfrm>
-          <a:prstGeom prst="rect">
-            <a:avLst/>
-          </a:prstGeom>
-          <a:ln w="12700">
-            <a:miter lim="400000"/>
-          </a:ln>
-          <a:extLst>
-            <a:ext uri="{C572A759-6A51-4108-AA02-DFA0A04FC94B}">
-              <ma14:wrappingTextBoxFlag xmlns:ma14="http://schemas.microsoft.com/office/mac/drawingml/2011/main" val="1"/>
-            </a:ext>
-          </a:extLst>
-        </p:spPr>
-        <p:txBody>
-          <a:bodyPr lIns="45719" rIns="45719" anchor="ctr">
+            <a:ext cx="10881361" cy="264254"/>
+          </a:xfrm>
+          <a:prstGeom prst="rect">
+            <a:avLst/>
+          </a:prstGeom>
+          <a:ln w="12700">
+            <a:miter lim="400000"/>
+          </a:ln>
+          <a:extLst>
+            <a:ext uri="{C572A759-6A51-4108-AA02-DFA0A04FC94B}">
+              <ma14:wrappingTextBoxFlag xmlns:ma14="http://schemas.microsoft.com/office/mac/drawingml/2011/main" val="1"/>
+            </a:ext>
+          </a:extLst>
+        </p:spPr>
+        <p:txBody>
+          <a:bodyPr lIns="45718" tIns="45718" rIns="45718" bIns="45718" anchor="ctr">
             <a:spAutoFit/>
           </a:bodyPr>
           <a:lstStyle>
@@ -6662,6 +7197,10 @@
                 <a:solidFill>
                   <a:srgbClr val="2A78D6"/>
                 </a:solidFill>
+                <a:latin typeface="+mn-lt"/>
+                <a:ea typeface="+mn-ea"/>
+                <a:cs typeface="+mn-cs"/>
+                <a:sym typeface="Arial"/>
               </a:defRPr>
             </a:lvl1pPr>
           </a:lstStyle>
@@ -6682,22 +7221,22 @@
         <p:spPr>
           <a:xfrm>
             <a:off x="685799" y="891861"/>
-            <a:ext cx="7406642" cy="868038"/>
-          </a:xfrm>
-          <a:prstGeom prst="rect">
-            <a:avLst/>
-          </a:prstGeom>
-          <a:ln w="12700">
-            <a:miter lim="400000"/>
-          </a:ln>
-          <a:extLst>
-            <a:ext uri="{C572A759-6A51-4108-AA02-DFA0A04FC94B}">
-              <ma14:wrappingTextBoxFlag xmlns:ma14="http://schemas.microsoft.com/office/mac/drawingml/2011/main" val="1"/>
-            </a:ext>
-          </a:extLst>
-        </p:spPr>
-        <p:txBody>
-          <a:bodyPr lIns="45719" rIns="45719" anchor="ctr">
+            <a:ext cx="7406641" cy="868037"/>
+          </a:xfrm>
+          <a:prstGeom prst="rect">
+            <a:avLst/>
+          </a:prstGeom>
+          <a:ln w="12700">
+            <a:miter lim="400000"/>
+          </a:ln>
+          <a:extLst>
+            <a:ext uri="{C572A759-6A51-4108-AA02-DFA0A04FC94B}">
+              <ma14:wrappingTextBoxFlag xmlns:ma14="http://schemas.microsoft.com/office/mac/drawingml/2011/main" val="1"/>
+            </a:ext>
+          </a:extLst>
+        </p:spPr>
+        <p:txBody>
+          <a:bodyPr lIns="45718" tIns="45718" rIns="45718" bIns="45718" anchor="ctr">
             <a:spAutoFit/>
           </a:bodyPr>
           <a:lstStyle>
@@ -6706,6 +7245,10 @@
                 <a:solidFill>
                   <a:srgbClr val="0B0B0B"/>
                 </a:solidFill>
+                <a:latin typeface="+mn-lt"/>
+                <a:ea typeface="+mn-ea"/>
+                <a:cs typeface="+mn-cs"/>
+                <a:sym typeface="Arial"/>
               </a:defRPr>
             </a:lvl1pPr>
           </a:lstStyle>
@@ -6735,8 +7278,8 @@
         </p:blipFill>
         <p:spPr>
           <a:xfrm>
-            <a:off x="640080" y="1920239"/>
-            <a:ext cx="6858001" cy="4114801"/>
+            <a:off x="640080" y="1920238"/>
+            <a:ext cx="6858001" cy="4114803"/>
           </a:xfrm>
           <a:prstGeom prst="rect">
             <a:avLst/>
@@ -6754,8 +7297,8 @@
         </p:nvSpPr>
         <p:spPr>
           <a:xfrm>
-            <a:off x="8229600" y="2011679"/>
-            <a:ext cx="3291841" cy="2011681"/>
+            <a:off x="8229600" y="2011678"/>
+            <a:ext cx="3291841" cy="2011683"/>
           </a:xfrm>
           <a:prstGeom prst="roundRect">
             <a:avLst>
@@ -6772,10 +7315,17 @@
           </a:ln>
         </p:spPr>
         <p:txBody>
-          <a:bodyPr lIns="45719" rIns="45719"/>
+          <a:bodyPr lIns="45718" tIns="45718" rIns="45718" bIns="45718"/>
           <a:lstStyle/>
           <a:p>
-            <a:pPr/>
+            <a:pPr>
+              <a:defRPr>
+                <a:latin typeface="+mn-lt"/>
+                <a:ea typeface="+mn-ea"/>
+                <a:cs typeface="+mn-cs"/>
+                <a:sym typeface="Arial"/>
+              </a:defRPr>
+            </a:pPr>
           </a:p>
         </p:txBody>
       </p:sp>
@@ -6787,23 +7337,23 @@
         </p:nvSpPr>
         <p:spPr>
           <a:xfrm>
-            <a:off x="8503919" y="2208251"/>
-            <a:ext cx="2834642" cy="338378"/>
-          </a:xfrm>
-          <a:prstGeom prst="rect">
-            <a:avLst/>
-          </a:prstGeom>
-          <a:ln w="12700">
-            <a:miter lim="400000"/>
-          </a:ln>
-          <a:extLst>
-            <a:ext uri="{C572A759-6A51-4108-AA02-DFA0A04FC94B}">
-              <ma14:wrappingTextBoxFlag xmlns:ma14="http://schemas.microsoft.com/office/mac/drawingml/2011/main" val="1"/>
-            </a:ext>
-          </a:extLst>
-        </p:spPr>
-        <p:txBody>
-          <a:bodyPr lIns="45719" rIns="45719" anchor="ctr">
+            <a:off x="8503918" y="2208252"/>
+            <a:ext cx="2834643" cy="338375"/>
+          </a:xfrm>
+          <a:prstGeom prst="rect">
+            <a:avLst/>
+          </a:prstGeom>
+          <a:ln w="12700">
+            <a:miter lim="400000"/>
+          </a:ln>
+          <a:extLst>
+            <a:ext uri="{C572A759-6A51-4108-AA02-DFA0A04FC94B}">
+              <ma14:wrappingTextBoxFlag xmlns:ma14="http://schemas.microsoft.com/office/mac/drawingml/2011/main" val="1"/>
+            </a:ext>
+          </a:extLst>
+        </p:spPr>
+        <p:txBody>
+          <a:bodyPr lIns="45718" tIns="45718" rIns="45718" bIns="45718" anchor="ctr">
             <a:spAutoFit/>
           </a:bodyPr>
           <a:lstStyle>
@@ -6812,6 +7362,10 @@
                 <a:solidFill>
                   <a:srgbClr val="0B0B0B"/>
                 </a:solidFill>
+                <a:latin typeface="+mn-lt"/>
+                <a:ea typeface="+mn-ea"/>
+                <a:cs typeface="+mn-cs"/>
+                <a:sym typeface="Arial"/>
               </a:defRPr>
             </a:lvl1pPr>
           </a:lstStyle>
@@ -6831,23 +7385,23 @@
         </p:nvSpPr>
         <p:spPr>
           <a:xfrm>
-            <a:off x="8503919" y="2822100"/>
-            <a:ext cx="2834642" cy="848040"/>
-          </a:xfrm>
-          <a:prstGeom prst="rect">
-            <a:avLst/>
-          </a:prstGeom>
-          <a:ln w="12700">
-            <a:miter lim="400000"/>
-          </a:ln>
-          <a:extLst>
-            <a:ext uri="{C572A759-6A51-4108-AA02-DFA0A04FC94B}">
-              <ma14:wrappingTextBoxFlag xmlns:ma14="http://schemas.microsoft.com/office/mac/drawingml/2011/main" val="1"/>
-            </a:ext>
-          </a:extLst>
-        </p:spPr>
-        <p:txBody>
-          <a:bodyPr lIns="45719" rIns="45719" anchor="ctr">
+            <a:off x="8503918" y="2822101"/>
+            <a:ext cx="2834643" cy="848037"/>
+          </a:xfrm>
+          <a:prstGeom prst="rect">
+            <a:avLst/>
+          </a:prstGeom>
+          <a:ln w="12700">
+            <a:miter lim="400000"/>
+          </a:ln>
+          <a:extLst>
+            <a:ext uri="{C572A759-6A51-4108-AA02-DFA0A04FC94B}">
+              <ma14:wrappingTextBoxFlag xmlns:ma14="http://schemas.microsoft.com/office/mac/drawingml/2011/main" val="1"/>
+            </a:ext>
+          </a:extLst>
+        </p:spPr>
+        <p:txBody>
+          <a:bodyPr lIns="45718" tIns="45718" rIns="45718" bIns="45718" anchor="ctr">
             <a:spAutoFit/>
           </a:bodyPr>
           <a:lstStyle>
@@ -6856,6 +7410,10 @@
                 <a:solidFill>
                   <a:srgbClr val="6B6A66"/>
                 </a:solidFill>
+                <a:latin typeface="+mn-lt"/>
+                <a:ea typeface="+mn-ea"/>
+                <a:cs typeface="+mn-cs"/>
+                <a:sym typeface="Arial"/>
               </a:defRPr>
             </a:lvl1pPr>
           </a:lstStyle>
@@ -6875,23 +7433,23 @@
         </p:nvSpPr>
         <p:spPr>
           <a:xfrm>
-            <a:off x="685800" y="6448897"/>
-            <a:ext cx="5394961" cy="214702"/>
-          </a:xfrm>
-          <a:prstGeom prst="rect">
-            <a:avLst/>
-          </a:prstGeom>
-          <a:ln w="12700">
-            <a:miter lim="400000"/>
-          </a:ln>
-          <a:extLst>
-            <a:ext uri="{C572A759-6A51-4108-AA02-DFA0A04FC94B}">
-              <ma14:wrappingTextBoxFlag xmlns:ma14="http://schemas.microsoft.com/office/mac/drawingml/2011/main" val="1"/>
-            </a:ext>
-          </a:extLst>
-        </p:spPr>
-        <p:txBody>
-          <a:bodyPr lIns="45719" rIns="45719" anchor="ctr">
+            <a:off x="685799" y="6448898"/>
+            <a:ext cx="5394963" cy="214699"/>
+          </a:xfrm>
+          <a:prstGeom prst="rect">
+            <a:avLst/>
+          </a:prstGeom>
+          <a:ln w="12700">
+            <a:miter lim="400000"/>
+          </a:ln>
+          <a:extLst>
+            <a:ext uri="{C572A759-6A51-4108-AA02-DFA0A04FC94B}">
+              <ma14:wrappingTextBoxFlag xmlns:ma14="http://schemas.microsoft.com/office/mac/drawingml/2011/main" val="1"/>
+            </a:ext>
+          </a:extLst>
+        </p:spPr>
+        <p:txBody>
+          <a:bodyPr lIns="45718" tIns="45718" rIns="45718" bIns="45718" anchor="ctr">
             <a:spAutoFit/>
           </a:bodyPr>
           <a:lstStyle>
@@ -6900,6 +7458,10 @@
                 <a:solidFill>
                   <a:srgbClr val="6B6A66"/>
                 </a:solidFill>
+                <a:latin typeface="+mn-lt"/>
+                <a:ea typeface="+mn-ea"/>
+                <a:cs typeface="+mn-cs"/>
+                <a:sym typeface="Arial"/>
               </a:defRPr>
             </a:lvl1pPr>
           </a:lstStyle>
@@ -6919,23 +7481,23 @@
         </p:nvSpPr>
         <p:spPr>
           <a:xfrm>
-            <a:off x="11201400" y="6448897"/>
-            <a:ext cx="457201" cy="214702"/>
-          </a:xfrm>
-          <a:prstGeom prst="rect">
-            <a:avLst/>
-          </a:prstGeom>
-          <a:ln w="12700">
-            <a:miter lim="400000"/>
-          </a:ln>
-          <a:extLst>
-            <a:ext uri="{C572A759-6A51-4108-AA02-DFA0A04FC94B}">
-              <ma14:wrappingTextBoxFlag xmlns:ma14="http://schemas.microsoft.com/office/mac/drawingml/2011/main" val="1"/>
-            </a:ext>
-          </a:extLst>
-        </p:spPr>
-        <p:txBody>
-          <a:bodyPr lIns="45719" rIns="45719" anchor="ctr">
+            <a:off x="11201399" y="6448898"/>
+            <a:ext cx="457203" cy="214699"/>
+          </a:xfrm>
+          <a:prstGeom prst="rect">
+            <a:avLst/>
+          </a:prstGeom>
+          <a:ln w="12700">
+            <a:miter lim="400000"/>
+          </a:ln>
+          <a:extLst>
+            <a:ext uri="{C572A759-6A51-4108-AA02-DFA0A04FC94B}">
+              <ma14:wrappingTextBoxFlag xmlns:ma14="http://schemas.microsoft.com/office/mac/drawingml/2011/main" val="1"/>
+            </a:ext>
+          </a:extLst>
+        </p:spPr>
+        <p:txBody>
+          <a:bodyPr lIns="45718" tIns="45718" rIns="45718" bIns="45718" anchor="ctr">
             <a:spAutoFit/>
           </a:bodyPr>
           <a:lstStyle>
@@ -6944,6 +7506,10 @@
                 <a:solidFill>
                   <a:srgbClr val="6B6A66"/>
                 </a:solidFill>
+                <a:latin typeface="+mn-lt"/>
+                <a:ea typeface="+mn-ea"/>
+                <a:cs typeface="+mn-cs"/>
+                <a:sym typeface="Arial"/>
               </a:defRPr>
             </a:lvl1pPr>
           </a:lstStyle>
@@ -6990,22 +7556,22 @@
         <p:spPr>
           <a:xfrm>
             <a:off x="685800" y="507952"/>
-            <a:ext cx="10881361" cy="264256"/>
-          </a:xfrm>
-          <a:prstGeom prst="rect">
-            <a:avLst/>
-          </a:prstGeom>
-          <a:ln w="12700">
-            <a:miter lim="400000"/>
-          </a:ln>
-          <a:extLst>
-            <a:ext uri="{C572A759-6A51-4108-AA02-DFA0A04FC94B}">
-              <ma14:wrappingTextBoxFlag xmlns:ma14="http://schemas.microsoft.com/office/mac/drawingml/2011/main" val="1"/>
-            </a:ext>
-          </a:extLst>
-        </p:spPr>
-        <p:txBody>
-          <a:bodyPr lIns="45719" rIns="45719" anchor="ctr">
+            <a:ext cx="10881361" cy="264254"/>
+          </a:xfrm>
+          <a:prstGeom prst="rect">
+            <a:avLst/>
+          </a:prstGeom>
+          <a:ln w="12700">
+            <a:miter lim="400000"/>
+          </a:ln>
+          <a:extLst>
+            <a:ext uri="{C572A759-6A51-4108-AA02-DFA0A04FC94B}">
+              <ma14:wrappingTextBoxFlag xmlns:ma14="http://schemas.microsoft.com/office/mac/drawingml/2011/main" val="1"/>
+            </a:ext>
+          </a:extLst>
+        </p:spPr>
+        <p:txBody>
+          <a:bodyPr lIns="45718" tIns="45718" rIns="45718" bIns="45718" anchor="ctr">
             <a:spAutoFit/>
           </a:bodyPr>
           <a:lstStyle>
@@ -7014,6 +7580,10 @@
                 <a:solidFill>
                   <a:srgbClr val="2A78D6"/>
                 </a:solidFill>
+                <a:latin typeface="+mn-lt"/>
+                <a:ea typeface="+mn-ea"/>
+                <a:cs typeface="+mn-cs"/>
+                <a:sym typeface="Arial"/>
               </a:defRPr>
             </a:lvl1pPr>
           </a:lstStyle>
@@ -7033,23 +7603,23 @@
         </p:nvSpPr>
         <p:spPr>
           <a:xfrm>
-            <a:off x="685800" y="951551"/>
-            <a:ext cx="10881361" cy="474338"/>
-          </a:xfrm>
-          <a:prstGeom prst="rect">
-            <a:avLst/>
-          </a:prstGeom>
-          <a:ln w="12700">
-            <a:miter lim="400000"/>
-          </a:ln>
-          <a:extLst>
-            <a:ext uri="{C572A759-6A51-4108-AA02-DFA0A04FC94B}">
-              <ma14:wrappingTextBoxFlag xmlns:ma14="http://schemas.microsoft.com/office/mac/drawingml/2011/main" val="1"/>
-            </a:ext>
-          </a:extLst>
-        </p:spPr>
-        <p:txBody>
-          <a:bodyPr lIns="45719" rIns="45719" anchor="ctr">
+            <a:off x="685800" y="951552"/>
+            <a:ext cx="10881361" cy="474336"/>
+          </a:xfrm>
+          <a:prstGeom prst="rect">
+            <a:avLst/>
+          </a:prstGeom>
+          <a:ln w="12700">
+            <a:miter lim="400000"/>
+          </a:ln>
+          <a:extLst>
+            <a:ext uri="{C572A759-6A51-4108-AA02-DFA0A04FC94B}">
+              <ma14:wrappingTextBoxFlag xmlns:ma14="http://schemas.microsoft.com/office/mac/drawingml/2011/main" val="1"/>
+            </a:ext>
+          </a:extLst>
+        </p:spPr>
+        <p:txBody>
+          <a:bodyPr lIns="45718" tIns="45718" rIns="45718" bIns="45718" anchor="ctr">
             <a:spAutoFit/>
           </a:bodyPr>
           <a:lstStyle>
@@ -7058,6 +7628,10 @@
                 <a:solidFill>
                   <a:srgbClr val="0B0B0B"/>
                 </a:solidFill>
+                <a:latin typeface="+mn-lt"/>
+                <a:ea typeface="+mn-ea"/>
+                <a:cs typeface="+mn-cs"/>
+                <a:sym typeface="Arial"/>
               </a:defRPr>
             </a:lvl1pPr>
           </a:lstStyle>
@@ -7088,7 +7662,7 @@
         <p:spPr>
           <a:xfrm>
             <a:off x="640080" y="1828800"/>
-            <a:ext cx="4114801" cy="4114800"/>
+            <a:ext cx="4114802" cy="4114800"/>
           </a:xfrm>
           <a:prstGeom prst="rect">
             <a:avLst/>
@@ -7107,7 +7681,7 @@
         <p:spPr>
           <a:xfrm>
             <a:off x="5029200" y="1874520"/>
-            <a:ext cx="6492241" cy="1234441"/>
+            <a:ext cx="6492241" cy="1234442"/>
           </a:xfrm>
           <a:prstGeom prst="roundRect">
             <a:avLst>
@@ -7124,10 +7698,17 @@
           </a:ln>
         </p:spPr>
         <p:txBody>
-          <a:bodyPr lIns="45719" rIns="45719"/>
+          <a:bodyPr lIns="45718" tIns="45718" rIns="45718" bIns="45718"/>
           <a:lstStyle/>
           <a:p>
-            <a:pPr/>
+            <a:pPr>
+              <a:defRPr>
+                <a:latin typeface="+mn-lt"/>
+                <a:ea typeface="+mn-ea"/>
+                <a:cs typeface="+mn-cs"/>
+                <a:sym typeface="Arial"/>
+              </a:defRPr>
+            </a:pPr>
           </a:p>
         </p:txBody>
       </p:sp>
@@ -7139,23 +7720,23 @@
         </p:nvSpPr>
         <p:spPr>
           <a:xfrm>
-            <a:off x="5349240" y="2037863"/>
-            <a:ext cx="5852161" cy="313394"/>
-          </a:xfrm>
-          <a:prstGeom prst="rect">
-            <a:avLst/>
-          </a:prstGeom>
-          <a:ln w="12700">
-            <a:miter lim="400000"/>
-          </a:ln>
-          <a:extLst>
-            <a:ext uri="{C572A759-6A51-4108-AA02-DFA0A04FC94B}">
-              <ma14:wrappingTextBoxFlag xmlns:ma14="http://schemas.microsoft.com/office/mac/drawingml/2011/main" val="1"/>
-            </a:ext>
-          </a:extLst>
-        </p:spPr>
-        <p:txBody>
-          <a:bodyPr lIns="45719" rIns="45719" anchor="ctr">
+            <a:off x="5349240" y="2037864"/>
+            <a:ext cx="5852162" cy="313391"/>
+          </a:xfrm>
+          <a:prstGeom prst="rect">
+            <a:avLst/>
+          </a:prstGeom>
+          <a:ln w="12700">
+            <a:miter lim="400000"/>
+          </a:ln>
+          <a:extLst>
+            <a:ext uri="{C572A759-6A51-4108-AA02-DFA0A04FC94B}">
+              <ma14:wrappingTextBoxFlag xmlns:ma14="http://schemas.microsoft.com/office/mac/drawingml/2011/main" val="1"/>
+            </a:ext>
+          </a:extLst>
+        </p:spPr>
+        <p:txBody>
+          <a:bodyPr lIns="45718" tIns="45718" rIns="45718" bIns="45718" anchor="ctr">
             <a:spAutoFit/>
           </a:bodyPr>
           <a:lstStyle>
@@ -7164,6 +7745,10 @@
                 <a:solidFill>
                   <a:srgbClr val="0B0B0B"/>
                 </a:solidFill>
+                <a:latin typeface="+mn-lt"/>
+                <a:ea typeface="+mn-ea"/>
+                <a:cs typeface="+mn-cs"/>
+                <a:sym typeface="Arial"/>
               </a:defRPr>
             </a:lvl1pPr>
           </a:lstStyle>
@@ -7183,23 +7768,23 @@
         </p:nvSpPr>
         <p:spPr>
           <a:xfrm>
-            <a:off x="5349240" y="2598788"/>
-            <a:ext cx="5852161" cy="288824"/>
-          </a:xfrm>
-          <a:prstGeom prst="rect">
-            <a:avLst/>
-          </a:prstGeom>
-          <a:ln w="12700">
-            <a:miter lim="400000"/>
-          </a:ln>
-          <a:extLst>
-            <a:ext uri="{C572A759-6A51-4108-AA02-DFA0A04FC94B}">
-              <ma14:wrappingTextBoxFlag xmlns:ma14="http://schemas.microsoft.com/office/mac/drawingml/2011/main" val="1"/>
-            </a:ext>
-          </a:extLst>
-        </p:spPr>
-        <p:txBody>
-          <a:bodyPr lIns="45719" rIns="45719" anchor="ctr">
+            <a:off x="5349240" y="2598789"/>
+            <a:ext cx="5852162" cy="288822"/>
+          </a:xfrm>
+          <a:prstGeom prst="rect">
+            <a:avLst/>
+          </a:prstGeom>
+          <a:ln w="12700">
+            <a:miter lim="400000"/>
+          </a:ln>
+          <a:extLst>
+            <a:ext uri="{C572A759-6A51-4108-AA02-DFA0A04FC94B}">
+              <ma14:wrappingTextBoxFlag xmlns:ma14="http://schemas.microsoft.com/office/mac/drawingml/2011/main" val="1"/>
+            </a:ext>
+          </a:extLst>
+        </p:spPr>
+        <p:txBody>
+          <a:bodyPr lIns="45718" tIns="45718" rIns="45718" bIns="45718" anchor="ctr">
             <a:spAutoFit/>
           </a:bodyPr>
           <a:lstStyle>
@@ -7208,6 +7793,10 @@
                 <a:solidFill>
                   <a:srgbClr val="2A78D6"/>
                 </a:solidFill>
+                <a:latin typeface="+mn-lt"/>
+                <a:ea typeface="+mn-ea"/>
+                <a:cs typeface="+mn-cs"/>
+                <a:sym typeface="Arial"/>
               </a:defRPr>
             </a:lvl1pPr>
           </a:lstStyle>
@@ -7228,7 +7817,7 @@
         <p:spPr>
           <a:xfrm>
             <a:off x="5029200" y="3291840"/>
-            <a:ext cx="6492241" cy="1234441"/>
+            <a:ext cx="6492241" cy="1234442"/>
           </a:xfrm>
           <a:prstGeom prst="roundRect">
             <a:avLst>
@@ -7245,10 +7834,17 @@
           </a:ln>
         </p:spPr>
         <p:txBody>
-          <a:bodyPr lIns="45719" rIns="45719"/>
+          <a:bodyPr lIns="45718" tIns="45718" rIns="45718" bIns="45718"/>
           <a:lstStyle/>
           <a:p>
-            <a:pPr/>
+            <a:pPr>
+              <a:defRPr>
+                <a:latin typeface="+mn-lt"/>
+                <a:ea typeface="+mn-ea"/>
+                <a:cs typeface="+mn-cs"/>
+                <a:sym typeface="Arial"/>
+              </a:defRPr>
+            </a:pPr>
           </a:p>
         </p:txBody>
       </p:sp>
@@ -7261,22 +7857,22 @@
         <p:spPr>
           <a:xfrm>
             <a:off x="5349240" y="3455183"/>
-            <a:ext cx="5852161" cy="313394"/>
-          </a:xfrm>
-          <a:prstGeom prst="rect">
-            <a:avLst/>
-          </a:prstGeom>
-          <a:ln w="12700">
-            <a:miter lim="400000"/>
-          </a:ln>
-          <a:extLst>
-            <a:ext uri="{C572A759-6A51-4108-AA02-DFA0A04FC94B}">
-              <ma14:wrappingTextBoxFlag xmlns:ma14="http://schemas.microsoft.com/office/mac/drawingml/2011/main" val="1"/>
-            </a:ext>
-          </a:extLst>
-        </p:spPr>
-        <p:txBody>
-          <a:bodyPr lIns="45719" rIns="45719" anchor="ctr">
+            <a:ext cx="5852162" cy="313392"/>
+          </a:xfrm>
+          <a:prstGeom prst="rect">
+            <a:avLst/>
+          </a:prstGeom>
+          <a:ln w="12700">
+            <a:miter lim="400000"/>
+          </a:ln>
+          <a:extLst>
+            <a:ext uri="{C572A759-6A51-4108-AA02-DFA0A04FC94B}">
+              <ma14:wrappingTextBoxFlag xmlns:ma14="http://schemas.microsoft.com/office/mac/drawingml/2011/main" val="1"/>
+            </a:ext>
+          </a:extLst>
+        </p:spPr>
+        <p:txBody>
+          <a:bodyPr lIns="45718" tIns="45718" rIns="45718" bIns="45718" anchor="ctr">
             <a:spAutoFit/>
           </a:bodyPr>
           <a:lstStyle>
@@ -7285,6 +7881,10 @@
                 <a:solidFill>
                   <a:srgbClr val="0B0B0B"/>
                 </a:solidFill>
+                <a:latin typeface="+mn-lt"/>
+                <a:ea typeface="+mn-ea"/>
+                <a:cs typeface="+mn-cs"/>
+                <a:sym typeface="Arial"/>
               </a:defRPr>
             </a:lvl1pPr>
           </a:lstStyle>
@@ -7305,22 +7905,22 @@
         <p:spPr>
           <a:xfrm>
             <a:off x="5349240" y="4016108"/>
-            <a:ext cx="5852161" cy="288824"/>
-          </a:xfrm>
-          <a:prstGeom prst="rect">
-            <a:avLst/>
-          </a:prstGeom>
-          <a:ln w="12700">
-            <a:miter lim="400000"/>
-          </a:ln>
-          <a:extLst>
-            <a:ext uri="{C572A759-6A51-4108-AA02-DFA0A04FC94B}">
-              <ma14:wrappingTextBoxFlag xmlns:ma14="http://schemas.microsoft.com/office/mac/drawingml/2011/main" val="1"/>
-            </a:ext>
-          </a:extLst>
-        </p:spPr>
-        <p:txBody>
-          <a:bodyPr lIns="45719" rIns="45719" anchor="ctr">
+            <a:ext cx="5852162" cy="288823"/>
+          </a:xfrm>
+          <a:prstGeom prst="rect">
+            <a:avLst/>
+          </a:prstGeom>
+          <a:ln w="12700">
+            <a:miter lim="400000"/>
+          </a:ln>
+          <a:extLst>
+            <a:ext uri="{C572A759-6A51-4108-AA02-DFA0A04FC94B}">
+              <ma14:wrappingTextBoxFlag xmlns:ma14="http://schemas.microsoft.com/office/mac/drawingml/2011/main" val="1"/>
+            </a:ext>
+          </a:extLst>
+        </p:spPr>
+        <p:txBody>
+          <a:bodyPr lIns="45718" tIns="45718" rIns="45718" bIns="45718" anchor="ctr">
             <a:spAutoFit/>
           </a:bodyPr>
           <a:lstStyle>
@@ -7329,6 +7929,10 @@
                 <a:solidFill>
                   <a:srgbClr val="EB6834"/>
                 </a:solidFill>
+                <a:latin typeface="+mn-lt"/>
+                <a:ea typeface="+mn-ea"/>
+                <a:cs typeface="+mn-cs"/>
+                <a:sym typeface="Arial"/>
               </a:defRPr>
             </a:lvl1pPr>
           </a:lstStyle>
@@ -7349,7 +7953,7 @@
         <p:spPr>
           <a:xfrm>
             <a:off x="5029200" y="4709159"/>
-            <a:ext cx="6492241" cy="1234441"/>
+            <a:ext cx="6492241" cy="1234442"/>
           </a:xfrm>
           <a:prstGeom prst="roundRect">
             <a:avLst>
@@ -7366,10 +7970,17 @@
           </a:ln>
         </p:spPr>
         <p:txBody>
-          <a:bodyPr lIns="45719" rIns="45719"/>
+          <a:bodyPr lIns="45718" tIns="45718" rIns="45718" bIns="45718"/>
           <a:lstStyle/>
           <a:p>
-            <a:pPr/>
+            <a:pPr>
+              <a:defRPr>
+                <a:latin typeface="+mn-lt"/>
+                <a:ea typeface="+mn-ea"/>
+                <a:cs typeface="+mn-cs"/>
+                <a:sym typeface="Arial"/>
+              </a:defRPr>
+            </a:pPr>
           </a:p>
         </p:txBody>
       </p:sp>
@@ -7382,22 +7993,22 @@
         <p:spPr>
           <a:xfrm>
             <a:off x="5349240" y="4872503"/>
-            <a:ext cx="5852161" cy="313394"/>
-          </a:xfrm>
-          <a:prstGeom prst="rect">
-            <a:avLst/>
-          </a:prstGeom>
-          <a:ln w="12700">
-            <a:miter lim="400000"/>
-          </a:ln>
-          <a:extLst>
-            <a:ext uri="{C572A759-6A51-4108-AA02-DFA0A04FC94B}">
-              <ma14:wrappingTextBoxFlag xmlns:ma14="http://schemas.microsoft.com/office/mac/drawingml/2011/main" val="1"/>
-            </a:ext>
-          </a:extLst>
-        </p:spPr>
-        <p:txBody>
-          <a:bodyPr lIns="45719" rIns="45719" anchor="ctr">
+            <a:ext cx="5852162" cy="313392"/>
+          </a:xfrm>
+          <a:prstGeom prst="rect">
+            <a:avLst/>
+          </a:prstGeom>
+          <a:ln w="12700">
+            <a:miter lim="400000"/>
+          </a:ln>
+          <a:extLst>
+            <a:ext uri="{C572A759-6A51-4108-AA02-DFA0A04FC94B}">
+              <ma14:wrappingTextBoxFlag xmlns:ma14="http://schemas.microsoft.com/office/mac/drawingml/2011/main" val="1"/>
+            </a:ext>
+          </a:extLst>
+        </p:spPr>
+        <p:txBody>
+          <a:bodyPr lIns="45718" tIns="45718" rIns="45718" bIns="45718" anchor="ctr">
             <a:spAutoFit/>
           </a:bodyPr>
           <a:lstStyle>
@@ -7406,6 +8017,10 @@
                 <a:solidFill>
                   <a:srgbClr val="0B0B0B"/>
                 </a:solidFill>
+                <a:latin typeface="+mn-lt"/>
+                <a:ea typeface="+mn-ea"/>
+                <a:cs typeface="+mn-cs"/>
+                <a:sym typeface="Arial"/>
               </a:defRPr>
             </a:lvl1pPr>
           </a:lstStyle>
@@ -7425,23 +8040,23 @@
         </p:nvSpPr>
         <p:spPr>
           <a:xfrm>
-            <a:off x="5349240" y="5331828"/>
-            <a:ext cx="5852161" cy="492024"/>
-          </a:xfrm>
-          <a:prstGeom prst="rect">
-            <a:avLst/>
-          </a:prstGeom>
-          <a:ln w="12700">
-            <a:miter lim="400000"/>
-          </a:ln>
-          <a:extLst>
-            <a:ext uri="{C572A759-6A51-4108-AA02-DFA0A04FC94B}">
-              <ma14:wrappingTextBoxFlag xmlns:ma14="http://schemas.microsoft.com/office/mac/drawingml/2011/main" val="1"/>
-            </a:ext>
-          </a:extLst>
-        </p:spPr>
-        <p:txBody>
-          <a:bodyPr lIns="45719" rIns="45719" anchor="ctr">
+            <a:off x="5349240" y="5331829"/>
+            <a:ext cx="5852162" cy="492022"/>
+          </a:xfrm>
+          <a:prstGeom prst="rect">
+            <a:avLst/>
+          </a:prstGeom>
+          <a:ln w="12700">
+            <a:miter lim="400000"/>
+          </a:ln>
+          <a:extLst>
+            <a:ext uri="{C572A759-6A51-4108-AA02-DFA0A04FC94B}">
+              <ma14:wrappingTextBoxFlag xmlns:ma14="http://schemas.microsoft.com/office/mac/drawingml/2011/main" val="1"/>
+            </a:ext>
+          </a:extLst>
+        </p:spPr>
+        <p:txBody>
+          <a:bodyPr lIns="45718" tIns="45718" rIns="45718" bIns="45718" anchor="ctr">
             <a:spAutoFit/>
           </a:bodyPr>
           <a:lstStyle>
@@ -7450,6 +8065,10 @@
                 <a:solidFill>
                   <a:srgbClr val="0B0B0B"/>
                 </a:solidFill>
+                <a:latin typeface="+mn-lt"/>
+                <a:ea typeface="+mn-ea"/>
+                <a:cs typeface="+mn-cs"/>
+                <a:sym typeface="Arial"/>
               </a:defRPr>
             </a:lvl1pPr>
           </a:lstStyle>
@@ -7469,23 +8088,23 @@
         </p:nvSpPr>
         <p:spPr>
           <a:xfrm>
-            <a:off x="685800" y="6448897"/>
-            <a:ext cx="5394961" cy="214702"/>
-          </a:xfrm>
-          <a:prstGeom prst="rect">
-            <a:avLst/>
-          </a:prstGeom>
-          <a:ln w="12700">
-            <a:miter lim="400000"/>
-          </a:ln>
-          <a:extLst>
-            <a:ext uri="{C572A759-6A51-4108-AA02-DFA0A04FC94B}">
-              <ma14:wrappingTextBoxFlag xmlns:ma14="http://schemas.microsoft.com/office/mac/drawingml/2011/main" val="1"/>
-            </a:ext>
-          </a:extLst>
-        </p:spPr>
-        <p:txBody>
-          <a:bodyPr lIns="45719" rIns="45719" anchor="ctr">
+            <a:off x="685799" y="6448898"/>
+            <a:ext cx="5394963" cy="214699"/>
+          </a:xfrm>
+          <a:prstGeom prst="rect">
+            <a:avLst/>
+          </a:prstGeom>
+          <a:ln w="12700">
+            <a:miter lim="400000"/>
+          </a:ln>
+          <a:extLst>
+            <a:ext uri="{C572A759-6A51-4108-AA02-DFA0A04FC94B}">
+              <ma14:wrappingTextBoxFlag xmlns:ma14="http://schemas.microsoft.com/office/mac/drawingml/2011/main" val="1"/>
+            </a:ext>
+          </a:extLst>
+        </p:spPr>
+        <p:txBody>
+          <a:bodyPr lIns="45718" tIns="45718" rIns="45718" bIns="45718" anchor="ctr">
             <a:spAutoFit/>
           </a:bodyPr>
           <a:lstStyle>
@@ -7494,6 +8113,10 @@
                 <a:solidFill>
                   <a:srgbClr val="6B6A66"/>
                 </a:solidFill>
+                <a:latin typeface="+mn-lt"/>
+                <a:ea typeface="+mn-ea"/>
+                <a:cs typeface="+mn-cs"/>
+                <a:sym typeface="Arial"/>
               </a:defRPr>
             </a:lvl1pPr>
           </a:lstStyle>
@@ -7513,23 +8136,23 @@
         </p:nvSpPr>
         <p:spPr>
           <a:xfrm>
-            <a:off x="11201400" y="6448897"/>
-            <a:ext cx="457201" cy="214702"/>
-          </a:xfrm>
-          <a:prstGeom prst="rect">
-            <a:avLst/>
-          </a:prstGeom>
-          <a:ln w="12700">
-            <a:miter lim="400000"/>
-          </a:ln>
-          <a:extLst>
-            <a:ext uri="{C572A759-6A51-4108-AA02-DFA0A04FC94B}">
-              <ma14:wrappingTextBoxFlag xmlns:ma14="http://schemas.microsoft.com/office/mac/drawingml/2011/main" val="1"/>
-            </a:ext>
-          </a:extLst>
-        </p:spPr>
-        <p:txBody>
-          <a:bodyPr lIns="45719" rIns="45719" anchor="ctr">
+            <a:off x="11201399" y="6448898"/>
+            <a:ext cx="457203" cy="214699"/>
+          </a:xfrm>
+          <a:prstGeom prst="rect">
+            <a:avLst/>
+          </a:prstGeom>
+          <a:ln w="12700">
+            <a:miter lim="400000"/>
+          </a:ln>
+          <a:extLst>
+            <a:ext uri="{C572A759-6A51-4108-AA02-DFA0A04FC94B}">
+              <ma14:wrappingTextBoxFlag xmlns:ma14="http://schemas.microsoft.com/office/mac/drawingml/2011/main" val="1"/>
+            </a:ext>
+          </a:extLst>
+        </p:spPr>
+        <p:txBody>
+          <a:bodyPr lIns="45718" tIns="45718" rIns="45718" bIns="45718" anchor="ctr">
             <a:spAutoFit/>
           </a:bodyPr>
           <a:lstStyle>
@@ -7538,6 +8161,10 @@
                 <a:solidFill>
                   <a:srgbClr val="6B6A66"/>
                 </a:solidFill>
+                <a:latin typeface="+mn-lt"/>
+                <a:ea typeface="+mn-ea"/>
+                <a:cs typeface="+mn-cs"/>
+                <a:sym typeface="Arial"/>
               </a:defRPr>
             </a:lvl1pPr>
           </a:lstStyle>
@@ -7591,22 +8218,22 @@
         <p:spPr>
           <a:xfrm>
             <a:off x="685800" y="507952"/>
-            <a:ext cx="10881361" cy="264256"/>
-          </a:xfrm>
-          <a:prstGeom prst="rect">
-            <a:avLst/>
-          </a:prstGeom>
-          <a:ln w="12700">
-            <a:miter lim="400000"/>
-          </a:ln>
-          <a:extLst>
-            <a:ext uri="{C572A759-6A51-4108-AA02-DFA0A04FC94B}">
-              <ma14:wrappingTextBoxFlag xmlns:ma14="http://schemas.microsoft.com/office/mac/drawingml/2011/main" val="1"/>
-            </a:ext>
-          </a:extLst>
-        </p:spPr>
-        <p:txBody>
-          <a:bodyPr lIns="45719" rIns="45719" anchor="ctr">
+            <a:ext cx="10881361" cy="264254"/>
+          </a:xfrm>
+          <a:prstGeom prst="rect">
+            <a:avLst/>
+          </a:prstGeom>
+          <a:ln w="12700">
+            <a:miter lim="400000"/>
+          </a:ln>
+          <a:extLst>
+            <a:ext uri="{C572A759-6A51-4108-AA02-DFA0A04FC94B}">
+              <ma14:wrappingTextBoxFlag xmlns:ma14="http://schemas.microsoft.com/office/mac/drawingml/2011/main" val="1"/>
+            </a:ext>
+          </a:extLst>
+        </p:spPr>
+        <p:txBody>
+          <a:bodyPr lIns="45718" tIns="45718" rIns="45718" bIns="45718" anchor="ctr">
             <a:spAutoFit/>
           </a:bodyPr>
           <a:lstStyle>
@@ -7615,6 +8242,10 @@
                 <a:solidFill>
                   <a:srgbClr val="CDE2FB"/>
                 </a:solidFill>
+                <a:latin typeface="+mn-lt"/>
+                <a:ea typeface="+mn-ea"/>
+                <a:cs typeface="+mn-cs"/>
+                <a:sym typeface="Arial"/>
               </a:defRPr>
             </a:lvl1pPr>
           </a:lstStyle>
@@ -7634,23 +8265,23 @@
         </p:nvSpPr>
         <p:spPr>
           <a:xfrm>
-            <a:off x="685800" y="951551"/>
-            <a:ext cx="10881361" cy="474338"/>
-          </a:xfrm>
-          <a:prstGeom prst="rect">
-            <a:avLst/>
-          </a:prstGeom>
-          <a:ln w="12700">
-            <a:miter lim="400000"/>
-          </a:ln>
-          <a:extLst>
-            <a:ext uri="{C572A759-6A51-4108-AA02-DFA0A04FC94B}">
-              <ma14:wrappingTextBoxFlag xmlns:ma14="http://schemas.microsoft.com/office/mac/drawingml/2011/main" val="1"/>
-            </a:ext>
-          </a:extLst>
-        </p:spPr>
-        <p:txBody>
-          <a:bodyPr lIns="45719" rIns="45719" anchor="ctr">
+            <a:off x="685800" y="951552"/>
+            <a:ext cx="10881361" cy="474336"/>
+          </a:xfrm>
+          <a:prstGeom prst="rect">
+            <a:avLst/>
+          </a:prstGeom>
+          <a:ln w="12700">
+            <a:miter lim="400000"/>
+          </a:ln>
+          <a:extLst>
+            <a:ext uri="{C572A759-6A51-4108-AA02-DFA0A04FC94B}">
+              <ma14:wrappingTextBoxFlag xmlns:ma14="http://schemas.microsoft.com/office/mac/drawingml/2011/main" val="1"/>
+            </a:ext>
+          </a:extLst>
+        </p:spPr>
+        <p:txBody>
+          <a:bodyPr lIns="45718" tIns="45718" rIns="45718" bIns="45718" anchor="ctr">
             <a:spAutoFit/>
           </a:bodyPr>
           <a:lstStyle>
@@ -7659,6 +8290,10 @@
                 <a:solidFill>
                   <a:srgbClr val="FFFFFF"/>
                 </a:solidFill>
+                <a:latin typeface="+mn-lt"/>
+                <a:ea typeface="+mn-ea"/>
+                <a:cs typeface="+mn-cs"/>
+                <a:sym typeface="Arial"/>
               </a:defRPr>
             </a:lvl1pPr>
           </a:lstStyle>
@@ -7717,8 +8352,8 @@
         </p:blipFill>
         <p:spPr>
           <a:xfrm>
-            <a:off x="2926079" y="3200400"/>
-            <a:ext cx="4114801" cy="2834640"/>
+            <a:off x="2926078" y="3200400"/>
+            <a:ext cx="4114803" cy="2834640"/>
           </a:xfrm>
           <a:prstGeom prst="rect">
             <a:avLst/>
@@ -7736,23 +8371,23 @@
         </p:nvSpPr>
         <p:spPr>
           <a:xfrm>
-            <a:off x="7726679" y="1933931"/>
-            <a:ext cx="3749041" cy="338378"/>
-          </a:xfrm>
-          <a:prstGeom prst="rect">
-            <a:avLst/>
-          </a:prstGeom>
-          <a:ln w="12700">
-            <a:miter lim="400000"/>
-          </a:ln>
-          <a:extLst>
-            <a:ext uri="{C572A759-6A51-4108-AA02-DFA0A04FC94B}">
-              <ma14:wrappingTextBoxFlag xmlns:ma14="http://schemas.microsoft.com/office/mac/drawingml/2011/main" val="1"/>
-            </a:ext>
-          </a:extLst>
-        </p:spPr>
-        <p:txBody>
-          <a:bodyPr lIns="45719" rIns="45719" anchor="ctr">
+            <a:off x="7726678" y="1933932"/>
+            <a:ext cx="3749042" cy="338375"/>
+          </a:xfrm>
+          <a:prstGeom prst="rect">
+            <a:avLst/>
+          </a:prstGeom>
+          <a:ln w="12700">
+            <a:miter lim="400000"/>
+          </a:ln>
+          <a:extLst>
+            <a:ext uri="{C572A759-6A51-4108-AA02-DFA0A04FC94B}">
+              <ma14:wrappingTextBoxFlag xmlns:ma14="http://schemas.microsoft.com/office/mac/drawingml/2011/main" val="1"/>
+            </a:ext>
+          </a:extLst>
+        </p:spPr>
+        <p:txBody>
+          <a:bodyPr lIns="45718" tIns="45718" rIns="45718" bIns="45718" anchor="ctr">
             <a:spAutoFit/>
           </a:bodyPr>
           <a:lstStyle>
@@ -7761,6 +8396,10 @@
                 <a:solidFill>
                   <a:srgbClr val="FFFFFF"/>
                 </a:solidFill>
+                <a:latin typeface="+mn-lt"/>
+                <a:ea typeface="+mn-ea"/>
+                <a:cs typeface="+mn-cs"/>
+                <a:sym typeface="Arial"/>
               </a:defRPr>
             </a:lvl1pPr>
           </a:lstStyle>
@@ -7780,23 +8419,23 @@
         </p:nvSpPr>
         <p:spPr>
           <a:xfrm>
-            <a:off x="7726679" y="2555400"/>
-            <a:ext cx="3749041" cy="467040"/>
-          </a:xfrm>
-          <a:prstGeom prst="rect">
-            <a:avLst/>
-          </a:prstGeom>
-          <a:ln w="12700">
-            <a:miter lim="400000"/>
-          </a:ln>
-          <a:extLst>
-            <a:ext uri="{C572A759-6A51-4108-AA02-DFA0A04FC94B}">
-              <ma14:wrappingTextBoxFlag xmlns:ma14="http://schemas.microsoft.com/office/mac/drawingml/2011/main" val="1"/>
-            </a:ext>
-          </a:extLst>
-        </p:spPr>
-        <p:txBody>
-          <a:bodyPr lIns="45719" rIns="45719" anchor="ctr">
+            <a:off x="7726678" y="2555401"/>
+            <a:ext cx="3749042" cy="467037"/>
+          </a:xfrm>
+          <a:prstGeom prst="rect">
+            <a:avLst/>
+          </a:prstGeom>
+          <a:ln w="12700">
+            <a:miter lim="400000"/>
+          </a:ln>
+          <a:extLst>
+            <a:ext uri="{C572A759-6A51-4108-AA02-DFA0A04FC94B}">
+              <ma14:wrappingTextBoxFlag xmlns:ma14="http://schemas.microsoft.com/office/mac/drawingml/2011/main" val="1"/>
+            </a:ext>
+          </a:extLst>
+        </p:spPr>
+        <p:txBody>
+          <a:bodyPr lIns="45718" tIns="45718" rIns="45718" bIns="45718" anchor="ctr">
             <a:spAutoFit/>
           </a:bodyPr>
           <a:lstStyle>
@@ -7805,6 +8444,10 @@
                 <a:solidFill>
                   <a:srgbClr val="CDE2FB"/>
                 </a:solidFill>
+                <a:latin typeface="+mn-lt"/>
+                <a:ea typeface="+mn-ea"/>
+                <a:cs typeface="+mn-cs"/>
+                <a:sym typeface="Arial"/>
               </a:defRPr>
             </a:lvl1pPr>
           </a:lstStyle>
@@ -7824,23 +8467,23 @@
         </p:nvSpPr>
         <p:spPr>
           <a:xfrm>
-            <a:off x="7726679" y="3305531"/>
-            <a:ext cx="3749041" cy="338378"/>
-          </a:xfrm>
-          <a:prstGeom prst="rect">
-            <a:avLst/>
-          </a:prstGeom>
-          <a:ln w="12700">
-            <a:miter lim="400000"/>
-          </a:ln>
-          <a:extLst>
-            <a:ext uri="{C572A759-6A51-4108-AA02-DFA0A04FC94B}">
-              <ma14:wrappingTextBoxFlag xmlns:ma14="http://schemas.microsoft.com/office/mac/drawingml/2011/main" val="1"/>
-            </a:ext>
-          </a:extLst>
-        </p:spPr>
-        <p:txBody>
-          <a:bodyPr lIns="45719" rIns="45719" anchor="ctr">
+            <a:off x="7726678" y="3305532"/>
+            <a:ext cx="3749042" cy="338376"/>
+          </a:xfrm>
+          <a:prstGeom prst="rect">
+            <a:avLst/>
+          </a:prstGeom>
+          <a:ln w="12700">
+            <a:miter lim="400000"/>
+          </a:ln>
+          <a:extLst>
+            <a:ext uri="{C572A759-6A51-4108-AA02-DFA0A04FC94B}">
+              <ma14:wrappingTextBoxFlag xmlns:ma14="http://schemas.microsoft.com/office/mac/drawingml/2011/main" val="1"/>
+            </a:ext>
+          </a:extLst>
+        </p:spPr>
+        <p:txBody>
+          <a:bodyPr lIns="45718" tIns="45718" rIns="45718" bIns="45718" anchor="ctr">
             <a:spAutoFit/>
           </a:bodyPr>
           <a:lstStyle>
@@ -7849,6 +8492,10 @@
                 <a:solidFill>
                   <a:srgbClr val="FFFFFF"/>
                 </a:solidFill>
+                <a:latin typeface="+mn-lt"/>
+                <a:ea typeface="+mn-ea"/>
+                <a:cs typeface="+mn-cs"/>
+                <a:sym typeface="Arial"/>
               </a:defRPr>
             </a:lvl1pPr>
           </a:lstStyle>
@@ -7868,23 +8515,23 @@
         </p:nvSpPr>
         <p:spPr>
           <a:xfrm>
-            <a:off x="7726679" y="3831750"/>
-            <a:ext cx="3749041" cy="657540"/>
-          </a:xfrm>
-          <a:prstGeom prst="rect">
-            <a:avLst/>
-          </a:prstGeom>
-          <a:ln w="12700">
-            <a:miter lim="400000"/>
-          </a:ln>
-          <a:extLst>
-            <a:ext uri="{C572A759-6A51-4108-AA02-DFA0A04FC94B}">
-              <ma14:wrappingTextBoxFlag xmlns:ma14="http://schemas.microsoft.com/office/mac/drawingml/2011/main" val="1"/>
-            </a:ext>
-          </a:extLst>
-        </p:spPr>
-        <p:txBody>
-          <a:bodyPr lIns="45719" rIns="45719" anchor="ctr">
+            <a:off x="7726678" y="3831750"/>
+            <a:ext cx="3749042" cy="657538"/>
+          </a:xfrm>
+          <a:prstGeom prst="rect">
+            <a:avLst/>
+          </a:prstGeom>
+          <a:ln w="12700">
+            <a:miter lim="400000"/>
+          </a:ln>
+          <a:extLst>
+            <a:ext uri="{C572A759-6A51-4108-AA02-DFA0A04FC94B}">
+              <ma14:wrappingTextBoxFlag xmlns:ma14="http://schemas.microsoft.com/office/mac/drawingml/2011/main" val="1"/>
+            </a:ext>
+          </a:extLst>
+        </p:spPr>
+        <p:txBody>
+          <a:bodyPr lIns="45718" tIns="45718" rIns="45718" bIns="45718" anchor="ctr">
             <a:spAutoFit/>
           </a:bodyPr>
           <a:lstStyle>
@@ -7893,6 +8540,10 @@
                 <a:solidFill>
                   <a:srgbClr val="CDE2FB"/>
                 </a:solidFill>
+                <a:latin typeface="+mn-lt"/>
+                <a:ea typeface="+mn-ea"/>
+                <a:cs typeface="+mn-cs"/>
+                <a:sym typeface="Arial"/>
               </a:defRPr>
             </a:lvl1pPr>
           </a:lstStyle>
@@ -7912,23 +8563,23 @@
         </p:nvSpPr>
         <p:spPr>
           <a:xfrm>
-            <a:off x="7726679" y="4677131"/>
-            <a:ext cx="3749041" cy="338378"/>
-          </a:xfrm>
-          <a:prstGeom prst="rect">
-            <a:avLst/>
-          </a:prstGeom>
-          <a:ln w="12700">
-            <a:miter lim="400000"/>
-          </a:ln>
-          <a:extLst>
-            <a:ext uri="{C572A759-6A51-4108-AA02-DFA0A04FC94B}">
-              <ma14:wrappingTextBoxFlag xmlns:ma14="http://schemas.microsoft.com/office/mac/drawingml/2011/main" val="1"/>
-            </a:ext>
-          </a:extLst>
-        </p:spPr>
-        <p:txBody>
-          <a:bodyPr lIns="45719" rIns="45719" anchor="ctr">
+            <a:off x="7726678" y="4677132"/>
+            <a:ext cx="3749042" cy="338376"/>
+          </a:xfrm>
+          <a:prstGeom prst="rect">
+            <a:avLst/>
+          </a:prstGeom>
+          <a:ln w="12700">
+            <a:miter lim="400000"/>
+          </a:ln>
+          <a:extLst>
+            <a:ext uri="{C572A759-6A51-4108-AA02-DFA0A04FC94B}">
+              <ma14:wrappingTextBoxFlag xmlns:ma14="http://schemas.microsoft.com/office/mac/drawingml/2011/main" val="1"/>
+            </a:ext>
+          </a:extLst>
+        </p:spPr>
+        <p:txBody>
+          <a:bodyPr lIns="45718" tIns="45718" rIns="45718" bIns="45718" anchor="ctr">
             <a:spAutoFit/>
           </a:bodyPr>
           <a:lstStyle>
@@ -7937,6 +8588,10 @@
                 <a:solidFill>
                   <a:srgbClr val="FFFFFF"/>
                 </a:solidFill>
+                <a:latin typeface="+mn-lt"/>
+                <a:ea typeface="+mn-ea"/>
+                <a:cs typeface="+mn-cs"/>
+                <a:sym typeface="Arial"/>
               </a:defRPr>
             </a:lvl1pPr>
           </a:lstStyle>
@@ -7956,23 +8611,23 @@
         </p:nvSpPr>
         <p:spPr>
           <a:xfrm>
-            <a:off x="7726679" y="5298600"/>
-            <a:ext cx="3749041" cy="467040"/>
-          </a:xfrm>
-          <a:prstGeom prst="rect">
-            <a:avLst/>
-          </a:prstGeom>
-          <a:ln w="12700">
-            <a:miter lim="400000"/>
-          </a:ln>
-          <a:extLst>
-            <a:ext uri="{C572A759-6A51-4108-AA02-DFA0A04FC94B}">
-              <ma14:wrappingTextBoxFlag xmlns:ma14="http://schemas.microsoft.com/office/mac/drawingml/2011/main" val="1"/>
-            </a:ext>
-          </a:extLst>
-        </p:spPr>
-        <p:txBody>
-          <a:bodyPr lIns="45719" rIns="45719" anchor="ctr">
+            <a:off x="7726678" y="5298600"/>
+            <a:ext cx="3749042" cy="467038"/>
+          </a:xfrm>
+          <a:prstGeom prst="rect">
+            <a:avLst/>
+          </a:prstGeom>
+          <a:ln w="12700">
+            <a:miter lim="400000"/>
+          </a:ln>
+          <a:extLst>
+            <a:ext uri="{C572A759-6A51-4108-AA02-DFA0A04FC94B}">
+              <ma14:wrappingTextBoxFlag xmlns:ma14="http://schemas.microsoft.com/office/mac/drawingml/2011/main" val="1"/>
+            </a:ext>
+          </a:extLst>
+        </p:spPr>
+        <p:txBody>
+          <a:bodyPr lIns="45718" tIns="45718" rIns="45718" bIns="45718" anchor="ctr">
             <a:spAutoFit/>
           </a:bodyPr>
           <a:lstStyle>
@@ -7981,6 +8636,10 @@
                 <a:solidFill>
                   <a:srgbClr val="CDE2FB"/>
                 </a:solidFill>
+                <a:latin typeface="+mn-lt"/>
+                <a:ea typeface="+mn-ea"/>
+                <a:cs typeface="+mn-cs"/>
+                <a:sym typeface="Arial"/>
               </a:defRPr>
             </a:lvl1pPr>
           </a:lstStyle>
@@ -8000,23 +8659,23 @@
         </p:nvSpPr>
         <p:spPr>
           <a:xfrm>
-            <a:off x="685800" y="6448897"/>
-            <a:ext cx="5394961" cy="214702"/>
-          </a:xfrm>
-          <a:prstGeom prst="rect">
-            <a:avLst/>
-          </a:prstGeom>
-          <a:ln w="12700">
-            <a:miter lim="400000"/>
-          </a:ln>
-          <a:extLst>
-            <a:ext uri="{C572A759-6A51-4108-AA02-DFA0A04FC94B}">
-              <ma14:wrappingTextBoxFlag xmlns:ma14="http://schemas.microsoft.com/office/mac/drawingml/2011/main" val="1"/>
-            </a:ext>
-          </a:extLst>
-        </p:spPr>
-        <p:txBody>
-          <a:bodyPr lIns="45719" rIns="45719" anchor="ctr">
+            <a:off x="685799" y="6448898"/>
+            <a:ext cx="5394963" cy="214699"/>
+          </a:xfrm>
+          <a:prstGeom prst="rect">
+            <a:avLst/>
+          </a:prstGeom>
+          <a:ln w="12700">
+            <a:miter lim="400000"/>
+          </a:ln>
+          <a:extLst>
+            <a:ext uri="{C572A759-6A51-4108-AA02-DFA0A04FC94B}">
+              <ma14:wrappingTextBoxFlag xmlns:ma14="http://schemas.microsoft.com/office/mac/drawingml/2011/main" val="1"/>
+            </a:ext>
+          </a:extLst>
+        </p:spPr>
+        <p:txBody>
+          <a:bodyPr lIns="45718" tIns="45718" rIns="45718" bIns="45718" anchor="ctr">
             <a:spAutoFit/>
           </a:bodyPr>
           <a:lstStyle>
@@ -8025,6 +8684,10 @@
                 <a:solidFill>
                   <a:srgbClr val="6B6A66"/>
                 </a:solidFill>
+                <a:latin typeface="+mn-lt"/>
+                <a:ea typeface="+mn-ea"/>
+                <a:cs typeface="+mn-cs"/>
+                <a:sym typeface="Arial"/>
               </a:defRPr>
             </a:lvl1pPr>
           </a:lstStyle>
@@ -8044,23 +8707,23 @@
         </p:nvSpPr>
         <p:spPr>
           <a:xfrm>
-            <a:off x="11201400" y="6448897"/>
-            <a:ext cx="457201" cy="214702"/>
-          </a:xfrm>
-          <a:prstGeom prst="rect">
-            <a:avLst/>
-          </a:prstGeom>
-          <a:ln w="12700">
-            <a:miter lim="400000"/>
-          </a:ln>
-          <a:extLst>
-            <a:ext uri="{C572A759-6A51-4108-AA02-DFA0A04FC94B}">
-              <ma14:wrappingTextBoxFlag xmlns:ma14="http://schemas.microsoft.com/office/mac/drawingml/2011/main" val="1"/>
-            </a:ext>
-          </a:extLst>
-        </p:spPr>
-        <p:txBody>
-          <a:bodyPr lIns="45719" rIns="45719" anchor="ctr">
+            <a:off x="11201399" y="6448898"/>
+            <a:ext cx="457203" cy="214699"/>
+          </a:xfrm>
+          <a:prstGeom prst="rect">
+            <a:avLst/>
+          </a:prstGeom>
+          <a:ln w="12700">
+            <a:miter lim="400000"/>
+          </a:ln>
+          <a:extLst>
+            <a:ext uri="{C572A759-6A51-4108-AA02-DFA0A04FC94B}">
+              <ma14:wrappingTextBoxFlag xmlns:ma14="http://schemas.microsoft.com/office/mac/drawingml/2011/main" val="1"/>
+            </a:ext>
+          </a:extLst>
+        </p:spPr>
+        <p:txBody>
+          <a:bodyPr lIns="45718" tIns="45718" rIns="45718" bIns="45718" anchor="ctr">
             <a:spAutoFit/>
           </a:bodyPr>
           <a:lstStyle>
@@ -8069,6 +8732,10 @@
                 <a:solidFill>
                   <a:srgbClr val="6B6A66"/>
                 </a:solidFill>
+                <a:latin typeface="+mn-lt"/>
+                <a:ea typeface="+mn-ea"/>
+                <a:cs typeface="+mn-cs"/>
+                <a:sym typeface="Arial"/>
               </a:defRPr>
             </a:lvl1pPr>
           </a:lstStyle>
@@ -8132,14 +8799,14 @@
     </a:clrScheme>
     <a:fontScheme name="Office Theme">
       <a:majorFont>
+        <a:latin typeface="Helvetica"/>
+        <a:ea typeface="Helvetica"/>
+        <a:cs typeface="Helvetica"/>
+      </a:majorFont>
+      <a:minorFont>
         <a:latin typeface="Arial"/>
         <a:ea typeface="Arial"/>
         <a:cs typeface="Arial"/>
-      </a:majorFont>
-      <a:minorFont>
-        <a:latin typeface="Helvetica"/>
-        <a:ea typeface="Helvetica"/>
-        <a:cs typeface="Helvetica"/>
       </a:minorFont>
     </a:fontScheme>
     <a:fmtScheme name="Office Theme">
@@ -8282,17 +8949,17 @@
         <a:solidFill>
           <a:srgbClr val="FFFFFF"/>
         </a:solidFill>
-        <a:ln w="12700" cap="flat">
+        <a:ln w="25400" cap="flat">
           <a:solidFill>
             <a:schemeClr val="accent1"/>
           </a:solidFill>
           <a:prstDash val="solid"/>
-          <a:miter lim="800000"/>
+          <a:round/>
         </a:ln>
         <a:effectLst/>
         <a:sp3d/>
       </a:spPr>
-      <a:bodyPr rot="0" spcFirstLastPara="1" vertOverflow="overflow" horzOverflow="overflow" vert="horz" wrap="square" lIns="45719" tIns="45719" rIns="45719" bIns="45719" numCol="1" spcCol="38100" rtlCol="0" anchor="ctr" upright="0">
+      <a:bodyPr rot="0" spcFirstLastPara="1" vertOverflow="overflow" horzOverflow="overflow" vert="horz" wrap="square" lIns="45718" tIns="45718" rIns="45718" bIns="45718" numCol="1" spcCol="38100" rtlCol="0" anchor="ctr" upright="0">
         <a:spAutoFit/>
       </a:bodyPr>
       <a:lstStyle>
@@ -8323,7 +8990,7 @@
             <a:latin typeface="+mj-lt"/>
             <a:ea typeface="+mj-ea"/>
             <a:cs typeface="+mj-cs"/>
-            <a:sym typeface="Arial"/>
+            <a:sym typeface="Helvetica"/>
           </a:defRPr>
         </a:defPPr>
         <a:lvl1pPr marL="0" marR="0" indent="0" algn="l" defTabSz="914400" rtl="0" fontAlgn="auto" latinLnBrk="1" hangingPunct="0">
@@ -8571,12 +9238,12 @@
     <a:lnDef>
       <a:spPr>
         <a:noFill/>
-        <a:ln w="12700" cap="flat">
+        <a:ln w="25400" cap="flat">
           <a:solidFill>
             <a:schemeClr val="accent1"/>
           </a:solidFill>
           <a:prstDash val="solid"/>
-          <a:miter lim="800000"/>
+          <a:round/>
         </a:ln>
         <a:effectLst/>
         <a:sp3d/>
@@ -8863,7 +9530,7 @@
         <a:effectLst/>
         <a:sp3d/>
       </a:spPr>
-      <a:bodyPr rot="0" spcFirstLastPara="1" vertOverflow="overflow" horzOverflow="overflow" vert="horz" wrap="square" lIns="45719" tIns="45719" rIns="45719" bIns="45719" numCol="1" spcCol="38100" rtlCol="0" anchor="t" upright="0">
+      <a:bodyPr rot="0" spcFirstLastPara="1" vertOverflow="overflow" horzOverflow="overflow" vert="horz" wrap="square" lIns="45718" tIns="45718" rIns="45718" bIns="45718" numCol="1" spcCol="38100" rtlCol="0" anchor="t" upright="0">
         <a:spAutoFit/>
       </a:bodyPr>
       <a:lstStyle>
@@ -8894,7 +9561,7 @@
             <a:latin typeface="+mj-lt"/>
             <a:ea typeface="+mj-ea"/>
             <a:cs typeface="+mj-cs"/>
-            <a:sym typeface="Arial"/>
+            <a:sym typeface="Helvetica"/>
           </a:defRPr>
         </a:defPPr>
         <a:lvl1pPr marL="0" marR="0" indent="0" algn="l" defTabSz="914400" rtl="0" fontAlgn="auto" latinLnBrk="1" hangingPunct="0">
@@ -9186,14 +9853,14 @@
     </a:clrScheme>
     <a:fontScheme name="Office Theme">
       <a:majorFont>
+        <a:latin typeface="Helvetica"/>
+        <a:ea typeface="Helvetica"/>
+        <a:cs typeface="Helvetica"/>
+      </a:majorFont>
+      <a:minorFont>
         <a:latin typeface="Arial"/>
         <a:ea typeface="Arial"/>
         <a:cs typeface="Arial"/>
-      </a:majorFont>
-      <a:minorFont>
-        <a:latin typeface="Helvetica"/>
-        <a:ea typeface="Helvetica"/>
-        <a:cs typeface="Helvetica"/>
       </a:minorFont>
     </a:fontScheme>
     <a:fmtScheme name="Office Theme">
@@ -9336,17 +10003,17 @@
         <a:solidFill>
           <a:srgbClr val="FFFFFF"/>
         </a:solidFill>
-        <a:ln w="12700" cap="flat">
+        <a:ln w="25400" cap="flat">
           <a:solidFill>
             <a:schemeClr val="accent1"/>
           </a:solidFill>
           <a:prstDash val="solid"/>
-          <a:miter lim="800000"/>
+          <a:round/>
         </a:ln>
         <a:effectLst/>
         <a:sp3d/>
       </a:spPr>
-      <a:bodyPr rot="0" spcFirstLastPara="1" vertOverflow="overflow" horzOverflow="overflow" vert="horz" wrap="square" lIns="45719" tIns="45719" rIns="45719" bIns="45719" numCol="1" spcCol="38100" rtlCol="0" anchor="ctr" upright="0">
+      <a:bodyPr rot="0" spcFirstLastPara="1" vertOverflow="overflow" horzOverflow="overflow" vert="horz" wrap="square" lIns="45718" tIns="45718" rIns="45718" bIns="45718" numCol="1" spcCol="38100" rtlCol="0" anchor="ctr" upright="0">
         <a:spAutoFit/>
       </a:bodyPr>
       <a:lstStyle>
@@ -9377,7 +10044,7 @@
             <a:latin typeface="+mj-lt"/>
             <a:ea typeface="+mj-ea"/>
             <a:cs typeface="+mj-cs"/>
-            <a:sym typeface="Arial"/>
+            <a:sym typeface="Helvetica"/>
           </a:defRPr>
         </a:defPPr>
         <a:lvl1pPr marL="0" marR="0" indent="0" algn="l" defTabSz="914400" rtl="0" fontAlgn="auto" latinLnBrk="1" hangingPunct="0">
@@ -9625,12 +10292,12 @@
     <a:lnDef>
       <a:spPr>
         <a:noFill/>
-        <a:ln w="12700" cap="flat">
+        <a:ln w="25400" cap="flat">
           <a:solidFill>
             <a:schemeClr val="accent1"/>
           </a:solidFill>
           <a:prstDash val="solid"/>
-          <a:miter lim="800000"/>
+          <a:round/>
         </a:ln>
         <a:effectLst/>
         <a:sp3d/>
@@ -9917,7 +10584,7 @@
         <a:effectLst/>
         <a:sp3d/>
       </a:spPr>
-      <a:bodyPr rot="0" spcFirstLastPara="1" vertOverflow="overflow" horzOverflow="overflow" vert="horz" wrap="square" lIns="45719" tIns="45719" rIns="45719" bIns="45719" numCol="1" spcCol="38100" rtlCol="0" anchor="t" upright="0">
+      <a:bodyPr rot="0" spcFirstLastPara="1" vertOverflow="overflow" horzOverflow="overflow" vert="horz" wrap="square" lIns="45718" tIns="45718" rIns="45718" bIns="45718" numCol="1" spcCol="38100" rtlCol="0" anchor="t" upright="0">
         <a:spAutoFit/>
       </a:bodyPr>
       <a:lstStyle>
@@ -9948,7 +10615,7 @@
             <a:latin typeface="+mj-lt"/>
             <a:ea typeface="+mj-ea"/>
             <a:cs typeface="+mj-cs"/>
-            <a:sym typeface="Arial"/>
+            <a:sym typeface="Helvetica"/>
           </a:defRPr>
         </a:defPPr>
         <a:lvl1pPr marL="0" marR="0" indent="0" algn="l" defTabSz="914400" rtl="0" fontAlgn="auto" latinLnBrk="1" hangingPunct="0">
